--- a/diapositivas/diapositivas tp.pptx
+++ b/diapositivas/diapositivas tp.pptx
@@ -21,10 +21,6 @@
     <p:sldId id="269" r:id="rId15"/>
     <p:sldId id="270" r:id="rId16"/>
     <p:sldId id="271" r:id="rId17"/>
-    <p:sldId id="272" r:id="rId18"/>
-    <p:sldId id="273" r:id="rId19"/>
-    <p:sldId id="274" r:id="rId20"/>
-    <p:sldId id="275" r:id="rId21"/>
   </p:sldIdLst>
   <p:sldSz cx="12192000" cy="6858000"/>
   <p:notesSz cx="6858000" cy="9144000"/>
@@ -123,7 +119,453 @@
       </a:defRPr>
     </a:lvl9pPr>
   </p:defaultTextStyle>
+  <p:extLst>
+    <p:ext uri="{521415D9-36F7-43E2-AB2F-B90AF26B5E84}">
+      <p14:sectionLst xmlns:p14="http://schemas.microsoft.com/office/powerpoint/2010/main">
+        <p14:section name="Sección predeterminada" id="{96E843C6-BD70-4178-9BF4-05F25FC3EFC3}">
+          <p14:sldIdLst>
+            <p14:sldId id="256"/>
+            <p14:sldId id="257"/>
+            <p14:sldId id="258"/>
+            <p14:sldId id="259"/>
+            <p14:sldId id="260"/>
+          </p14:sldIdLst>
+        </p14:section>
+        <p14:section name="Sección sin título" id="{9CF01662-E1E3-485C-88B2-CC9A4B3C4E47}">
+          <p14:sldIdLst>
+            <p14:sldId id="261"/>
+            <p14:sldId id="262"/>
+            <p14:sldId id="263"/>
+            <p14:sldId id="264"/>
+            <p14:sldId id="265"/>
+            <p14:sldId id="266"/>
+            <p14:sldId id="267"/>
+            <p14:sldId id="268"/>
+            <p14:sldId id="269"/>
+            <p14:sldId id="270"/>
+            <p14:sldId id="271"/>
+          </p14:sldIdLst>
+        </p14:section>
+      </p14:sectionLst>
+    </p:ext>
+    <p:ext uri="{EFAFB233-063F-42B5-8137-9DF3F51BA10A}">
+      <p15:sldGuideLst xmlns:p15="http://schemas.microsoft.com/office/powerpoint/2012/main"/>
+    </p:ext>
+  </p:extLst>
 </p:presentation>
+</file>
+
+<file path=ppt/revisionInfo.xml><?xml version="1.0" encoding="utf-8"?>
+<p1510:revInfo xmlns:a="http://schemas.openxmlformats.org/drawingml/2006/main" xmlns:r="http://schemas.openxmlformats.org/officeDocument/2006/relationships" xmlns:p1510="http://schemas.microsoft.com/office/powerpoint/2015/10/main">
+  <p1510:revLst>
+    <p1510:client id="{20DBF5EE-514C-4BC8-870D-449293B2DA70}" v="55" dt="2025-11-21T02:37:02.170"/>
+  </p1510:revLst>
+</p1510:revInfo>
+</file>
+
+<file path=ppt/changesInfos/changesInfo1.xml><?xml version="1.0" encoding="utf-8"?>
+<pc:chgInfo xmlns:a="http://schemas.openxmlformats.org/drawingml/2006/main" xmlns:r="http://schemas.openxmlformats.org/officeDocument/2006/relationships" xmlns:ac="http://schemas.microsoft.com/office/drawing/2013/main/command" xmlns:pc="http://schemas.microsoft.com/office/powerpoint/2013/main/command">
+  <pc:docChgLst>
+    <pc:chgData name="pancho rubio" userId="e8d8d2042893a9b0" providerId="LiveId" clId="{D0586AA7-6981-429C-ABDD-712D4E03FEBC}"/>
+    <pc:docChg chg="undo redo custSel delSld modSld addSection modSection">
+      <pc:chgData name="pancho rubio" userId="e8d8d2042893a9b0" providerId="LiveId" clId="{D0586AA7-6981-429C-ABDD-712D4E03FEBC}" dt="2025-11-21T02:36:19.127" v="3590" actId="20577"/>
+      <pc:docMkLst>
+        <pc:docMk/>
+      </pc:docMkLst>
+      <pc:sldChg chg="modSp mod">
+        <pc:chgData name="pancho rubio" userId="e8d8d2042893a9b0" providerId="LiveId" clId="{D0586AA7-6981-429C-ABDD-712D4E03FEBC}" dt="2025-11-21T02:35:12.202" v="3588" actId="1076"/>
+        <pc:sldMkLst>
+          <pc:docMk/>
+          <pc:sldMk cId="2765068049" sldId="256"/>
+        </pc:sldMkLst>
+        <pc:spChg chg="mod">
+          <ac:chgData name="pancho rubio" userId="e8d8d2042893a9b0" providerId="LiveId" clId="{D0586AA7-6981-429C-ABDD-712D4E03FEBC}" dt="2025-11-21T02:35:12.202" v="3588" actId="1076"/>
+          <ac:spMkLst>
+            <pc:docMk/>
+            <pc:sldMk cId="2765068049" sldId="256"/>
+            <ac:spMk id="3" creationId="{9E7788A7-BFE6-1201-1B1A-1AAB3B7BC0D5}"/>
+          </ac:spMkLst>
+        </pc:spChg>
+      </pc:sldChg>
+      <pc:sldChg chg="modSp mod">
+        <pc:chgData name="pancho rubio" userId="e8d8d2042893a9b0" providerId="LiveId" clId="{D0586AA7-6981-429C-ABDD-712D4E03FEBC}" dt="2025-11-19T00:59:33.753" v="592" actId="207"/>
+        <pc:sldMkLst>
+          <pc:docMk/>
+          <pc:sldMk cId="2978458340" sldId="260"/>
+        </pc:sldMkLst>
+        <pc:spChg chg="mod">
+          <ac:chgData name="pancho rubio" userId="e8d8d2042893a9b0" providerId="LiveId" clId="{D0586AA7-6981-429C-ABDD-712D4E03FEBC}" dt="2025-11-19T00:59:33.753" v="592" actId="207"/>
+          <ac:spMkLst>
+            <pc:docMk/>
+            <pc:sldMk cId="2978458340" sldId="260"/>
+            <ac:spMk id="2" creationId="{0EBE85E4-6237-8244-774E-54E851867BB0}"/>
+          </ac:spMkLst>
+        </pc:spChg>
+        <pc:spChg chg="mod">
+          <ac:chgData name="pancho rubio" userId="e8d8d2042893a9b0" providerId="LiveId" clId="{D0586AA7-6981-429C-ABDD-712D4E03FEBC}" dt="2025-11-19T00:59:18.023" v="590" actId="207"/>
+          <ac:spMkLst>
+            <pc:docMk/>
+            <pc:sldMk cId="2978458340" sldId="260"/>
+            <ac:spMk id="3" creationId="{B2852504-F4D2-9629-1E72-6848C651959C}"/>
+          </ac:spMkLst>
+        </pc:spChg>
+      </pc:sldChg>
+      <pc:sldChg chg="addSp delSp modSp mod setBg setClrOvrMap">
+        <pc:chgData name="pancho rubio" userId="e8d8d2042893a9b0" providerId="LiveId" clId="{D0586AA7-6981-429C-ABDD-712D4E03FEBC}" dt="2025-11-21T02:36:19.127" v="3590" actId="20577"/>
+        <pc:sldMkLst>
+          <pc:docMk/>
+          <pc:sldMk cId="3299689826" sldId="261"/>
+        </pc:sldMkLst>
+        <pc:spChg chg="mod">
+          <ac:chgData name="pancho rubio" userId="e8d8d2042893a9b0" providerId="LiveId" clId="{D0586AA7-6981-429C-ABDD-712D4E03FEBC}" dt="2025-11-21T02:36:19.127" v="3590" actId="20577"/>
+          <ac:spMkLst>
+            <pc:docMk/>
+            <pc:sldMk cId="3299689826" sldId="261"/>
+            <ac:spMk id="2" creationId="{92A0C4EF-A1DE-2EC4-8EF9-7E4465679BDC}"/>
+          </ac:spMkLst>
+        </pc:spChg>
+        <pc:spChg chg="add mod">
+          <ac:chgData name="pancho rubio" userId="e8d8d2042893a9b0" providerId="LiveId" clId="{D0586AA7-6981-429C-ABDD-712D4E03FEBC}" dt="2025-11-21T01:54:36.900" v="3179" actId="1076"/>
+          <ac:spMkLst>
+            <pc:docMk/>
+            <pc:sldMk cId="3299689826" sldId="261"/>
+            <ac:spMk id="7" creationId="{5D9275BE-58EE-80E8-6775-898F39E03CB1}"/>
+          </ac:spMkLst>
+        </pc:spChg>
+        <pc:spChg chg="add mod">
+          <ac:chgData name="pancho rubio" userId="e8d8d2042893a9b0" providerId="LiveId" clId="{D0586AA7-6981-429C-ABDD-712D4E03FEBC}" dt="2025-11-19T01:42:28.032" v="693" actId="20577"/>
+          <ac:spMkLst>
+            <pc:docMk/>
+            <pc:sldMk cId="3299689826" sldId="261"/>
+            <ac:spMk id="8" creationId="{DF2C6617-175C-98AD-A3B0-85DF2CC327EC}"/>
+          </ac:spMkLst>
+        </pc:spChg>
+        <pc:spChg chg="add">
+          <ac:chgData name="pancho rubio" userId="e8d8d2042893a9b0" providerId="LiveId" clId="{D0586AA7-6981-429C-ABDD-712D4E03FEBC}" dt="2025-11-19T01:23:58.552" v="620" actId="26606"/>
+          <ac:spMkLst>
+            <pc:docMk/>
+            <pc:sldMk cId="3299689826" sldId="261"/>
+            <ac:spMk id="68" creationId="{C2E4E997-8672-4FFD-B8EC-9932A8E4714B}"/>
+          </ac:spMkLst>
+        </pc:spChg>
+        <pc:grpChg chg="add">
+          <ac:chgData name="pancho rubio" userId="e8d8d2042893a9b0" providerId="LiveId" clId="{D0586AA7-6981-429C-ABDD-712D4E03FEBC}" dt="2025-11-19T01:23:58.552" v="620" actId="26606"/>
+          <ac:grpSpMkLst>
+            <pc:docMk/>
+            <pc:sldMk cId="3299689826" sldId="261"/>
+            <ac:grpSpMk id="70" creationId="{453E4DEE-E996-40F8-8635-0FF43D7348F9}"/>
+          </ac:grpSpMkLst>
+        </pc:grpChg>
+        <pc:graphicFrameChg chg="add mod ord modGraphic">
+          <ac:chgData name="pancho rubio" userId="e8d8d2042893a9b0" providerId="LiveId" clId="{D0586AA7-6981-429C-ABDD-712D4E03FEBC}" dt="2025-11-19T01:38:05.705" v="691" actId="1076"/>
+          <ac:graphicFrameMkLst>
+            <pc:docMk/>
+            <pc:sldMk cId="3299689826" sldId="261"/>
+            <ac:graphicFrameMk id="6" creationId="{2D191B1D-310C-6396-031F-9214F53CA0AC}"/>
+          </ac:graphicFrameMkLst>
+        </pc:graphicFrameChg>
+        <pc:picChg chg="add">
+          <ac:chgData name="pancho rubio" userId="e8d8d2042893a9b0" providerId="LiveId" clId="{D0586AA7-6981-429C-ABDD-712D4E03FEBC}" dt="2025-11-19T01:23:58.552" v="620" actId="26606"/>
+          <ac:picMkLst>
+            <pc:docMk/>
+            <pc:sldMk cId="3299689826" sldId="261"/>
+            <ac:picMk id="69" creationId="{FE6BA9E6-1D9E-4D30-B528-D49FA1342E4E}"/>
+          </ac:picMkLst>
+        </pc:picChg>
+      </pc:sldChg>
+      <pc:sldChg chg="addSp delSp modSp mod">
+        <pc:chgData name="pancho rubio" userId="e8d8d2042893a9b0" providerId="LiveId" clId="{D0586AA7-6981-429C-ABDD-712D4E03FEBC}" dt="2025-11-21T01:58:49.865" v="3245" actId="207"/>
+        <pc:sldMkLst>
+          <pc:docMk/>
+          <pc:sldMk cId="3884125293" sldId="262"/>
+        </pc:sldMkLst>
+        <pc:spChg chg="mod">
+          <ac:chgData name="pancho rubio" userId="e8d8d2042893a9b0" providerId="LiveId" clId="{D0586AA7-6981-429C-ABDD-712D4E03FEBC}" dt="2025-11-21T01:57:59.109" v="3232" actId="207"/>
+          <ac:spMkLst>
+            <pc:docMk/>
+            <pc:sldMk cId="3884125293" sldId="262"/>
+            <ac:spMk id="2" creationId="{4F424629-0ADE-CA48-692C-66B731B70243}"/>
+          </ac:spMkLst>
+        </pc:spChg>
+        <pc:spChg chg="add del mod">
+          <ac:chgData name="pancho rubio" userId="e8d8d2042893a9b0" providerId="LiveId" clId="{D0586AA7-6981-429C-ABDD-712D4E03FEBC}" dt="2025-11-21T01:58:49.865" v="3245" actId="207"/>
+          <ac:spMkLst>
+            <pc:docMk/>
+            <pc:sldMk cId="3884125293" sldId="262"/>
+            <ac:spMk id="3" creationId="{FBD6E9F3-7214-313D-49F1-F257D8193357}"/>
+          </ac:spMkLst>
+        </pc:spChg>
+        <pc:picChg chg="add del mod ord">
+          <ac:chgData name="pancho rubio" userId="e8d8d2042893a9b0" providerId="LiveId" clId="{D0586AA7-6981-429C-ABDD-712D4E03FEBC}" dt="2025-11-20T17:45:54.251" v="695" actId="22"/>
+          <ac:picMkLst>
+            <pc:docMk/>
+            <pc:sldMk cId="3884125293" sldId="262"/>
+            <ac:picMk id="5" creationId="{8050F6E4-DB1C-9BFC-B2D5-568E6E3A65E2}"/>
+          </ac:picMkLst>
+        </pc:picChg>
+      </pc:sldChg>
+      <pc:sldChg chg="modSp mod">
+        <pc:chgData name="pancho rubio" userId="e8d8d2042893a9b0" providerId="LiveId" clId="{D0586AA7-6981-429C-ABDD-712D4E03FEBC}" dt="2025-11-21T01:57:46.480" v="3230" actId="20577"/>
+        <pc:sldMkLst>
+          <pc:docMk/>
+          <pc:sldMk cId="2361211101" sldId="263"/>
+        </pc:sldMkLst>
+        <pc:spChg chg="mod">
+          <ac:chgData name="pancho rubio" userId="e8d8d2042893a9b0" providerId="LiveId" clId="{D0586AA7-6981-429C-ABDD-712D4E03FEBC}" dt="2025-11-21T01:56:14.992" v="3199" actId="255"/>
+          <ac:spMkLst>
+            <pc:docMk/>
+            <pc:sldMk cId="2361211101" sldId="263"/>
+            <ac:spMk id="2" creationId="{098BC0C7-9F9B-BA26-4DD0-BFB3AA0D3018}"/>
+          </ac:spMkLst>
+        </pc:spChg>
+        <pc:spChg chg="mod">
+          <ac:chgData name="pancho rubio" userId="e8d8d2042893a9b0" providerId="LiveId" clId="{D0586AA7-6981-429C-ABDD-712D4E03FEBC}" dt="2025-11-21T01:57:46.480" v="3230" actId="20577"/>
+          <ac:spMkLst>
+            <pc:docMk/>
+            <pc:sldMk cId="2361211101" sldId="263"/>
+            <ac:spMk id="3" creationId="{68D7300B-CF1C-7BB7-BCC2-C07BFF692D18}"/>
+          </ac:spMkLst>
+        </pc:spChg>
+      </pc:sldChg>
+      <pc:sldChg chg="modSp mod">
+        <pc:chgData name="pancho rubio" userId="e8d8d2042893a9b0" providerId="LiveId" clId="{D0586AA7-6981-429C-ABDD-712D4E03FEBC}" dt="2025-11-21T01:55:58.965" v="3196" actId="1076"/>
+        <pc:sldMkLst>
+          <pc:docMk/>
+          <pc:sldMk cId="179566132" sldId="264"/>
+        </pc:sldMkLst>
+        <pc:spChg chg="mod">
+          <ac:chgData name="pancho rubio" userId="e8d8d2042893a9b0" providerId="LiveId" clId="{D0586AA7-6981-429C-ABDD-712D4E03FEBC}" dt="2025-11-21T01:55:15.822" v="3184" actId="255"/>
+          <ac:spMkLst>
+            <pc:docMk/>
+            <pc:sldMk cId="179566132" sldId="264"/>
+            <ac:spMk id="2" creationId="{773F2B30-E320-34BE-E050-B4E6042C23BE}"/>
+          </ac:spMkLst>
+        </pc:spChg>
+        <pc:spChg chg="mod">
+          <ac:chgData name="pancho rubio" userId="e8d8d2042893a9b0" providerId="LiveId" clId="{D0586AA7-6981-429C-ABDD-712D4E03FEBC}" dt="2025-11-21T01:55:58.965" v="3196" actId="1076"/>
+          <ac:spMkLst>
+            <pc:docMk/>
+            <pc:sldMk cId="179566132" sldId="264"/>
+            <ac:spMk id="3" creationId="{97413554-27DD-91FF-20D4-7D6D625DB291}"/>
+          </ac:spMkLst>
+        </pc:spChg>
+      </pc:sldChg>
+      <pc:sldChg chg="modSp mod">
+        <pc:chgData name="pancho rubio" userId="e8d8d2042893a9b0" providerId="LiveId" clId="{D0586AA7-6981-429C-ABDD-712D4E03FEBC}" dt="2025-11-21T01:54:42.105" v="3181" actId="20577"/>
+        <pc:sldMkLst>
+          <pc:docMk/>
+          <pc:sldMk cId="4173254479" sldId="265"/>
+        </pc:sldMkLst>
+        <pc:spChg chg="mod">
+          <ac:chgData name="pancho rubio" userId="e8d8d2042893a9b0" providerId="LiveId" clId="{D0586AA7-6981-429C-ABDD-712D4E03FEBC}" dt="2025-11-21T01:53:41.774" v="3166" actId="207"/>
+          <ac:spMkLst>
+            <pc:docMk/>
+            <pc:sldMk cId="4173254479" sldId="265"/>
+            <ac:spMk id="2" creationId="{10CCF51F-DA32-C3F8-2425-E68159C49208}"/>
+          </ac:spMkLst>
+        </pc:spChg>
+        <pc:spChg chg="mod">
+          <ac:chgData name="pancho rubio" userId="e8d8d2042893a9b0" providerId="LiveId" clId="{D0586AA7-6981-429C-ABDD-712D4E03FEBC}" dt="2025-11-21T01:54:42.105" v="3181" actId="20577"/>
+          <ac:spMkLst>
+            <pc:docMk/>
+            <pc:sldMk cId="4173254479" sldId="265"/>
+            <ac:spMk id="3" creationId="{F6646D0E-F9EE-E62A-2058-F1B40CE786DC}"/>
+          </ac:spMkLst>
+        </pc:spChg>
+      </pc:sldChg>
+      <pc:sldChg chg="modSp mod">
+        <pc:chgData name="pancho rubio" userId="e8d8d2042893a9b0" providerId="LiveId" clId="{D0586AA7-6981-429C-ABDD-712D4E03FEBC}" dt="2025-11-21T01:52:32.364" v="3156" actId="20577"/>
+        <pc:sldMkLst>
+          <pc:docMk/>
+          <pc:sldMk cId="458715343" sldId="266"/>
+        </pc:sldMkLst>
+        <pc:spChg chg="mod">
+          <ac:chgData name="pancho rubio" userId="e8d8d2042893a9b0" providerId="LiveId" clId="{D0586AA7-6981-429C-ABDD-712D4E03FEBC}" dt="2025-11-21T01:52:00.719" v="3143" actId="255"/>
+          <ac:spMkLst>
+            <pc:docMk/>
+            <pc:sldMk cId="458715343" sldId="266"/>
+            <ac:spMk id="2" creationId="{B01F0130-C055-BBF8-EE79-81C43A7FC6C2}"/>
+          </ac:spMkLst>
+        </pc:spChg>
+        <pc:spChg chg="mod">
+          <ac:chgData name="pancho rubio" userId="e8d8d2042893a9b0" providerId="LiveId" clId="{D0586AA7-6981-429C-ABDD-712D4E03FEBC}" dt="2025-11-21T01:52:32.364" v="3156" actId="20577"/>
+          <ac:spMkLst>
+            <pc:docMk/>
+            <pc:sldMk cId="458715343" sldId="266"/>
+            <ac:spMk id="3" creationId="{E35F3912-C90F-D0D8-927B-3A7E29356C45}"/>
+          </ac:spMkLst>
+        </pc:spChg>
+      </pc:sldChg>
+      <pc:sldChg chg="modSp mod">
+        <pc:chgData name="pancho rubio" userId="e8d8d2042893a9b0" providerId="LiveId" clId="{D0586AA7-6981-429C-ABDD-712D4E03FEBC}" dt="2025-11-21T01:50:17.366" v="3126" actId="207"/>
+        <pc:sldMkLst>
+          <pc:docMk/>
+          <pc:sldMk cId="2263333788" sldId="267"/>
+        </pc:sldMkLst>
+        <pc:spChg chg="mod">
+          <ac:chgData name="pancho rubio" userId="e8d8d2042893a9b0" providerId="LiveId" clId="{D0586AA7-6981-429C-ABDD-712D4E03FEBC}" dt="2025-11-21T01:50:17.366" v="3126" actId="207"/>
+          <ac:spMkLst>
+            <pc:docMk/>
+            <pc:sldMk cId="2263333788" sldId="267"/>
+            <ac:spMk id="2" creationId="{4D413A19-E860-4E46-94D1-8874108FE9D5}"/>
+          </ac:spMkLst>
+        </pc:spChg>
+        <pc:spChg chg="mod">
+          <ac:chgData name="pancho rubio" userId="e8d8d2042893a9b0" providerId="LiveId" clId="{D0586AA7-6981-429C-ABDD-712D4E03FEBC}" dt="2025-11-21T01:50:17.366" v="3126" actId="207"/>
+          <ac:spMkLst>
+            <pc:docMk/>
+            <pc:sldMk cId="2263333788" sldId="267"/>
+            <ac:spMk id="3" creationId="{9887BC12-E315-5E7C-A27F-6779E45D2833}"/>
+          </ac:spMkLst>
+        </pc:spChg>
+      </pc:sldChg>
+      <pc:sldChg chg="modSp mod">
+        <pc:chgData name="pancho rubio" userId="e8d8d2042893a9b0" providerId="LiveId" clId="{D0586AA7-6981-429C-ABDD-712D4E03FEBC}" dt="2025-11-21T02:05:39.607" v="3342" actId="207"/>
+        <pc:sldMkLst>
+          <pc:docMk/>
+          <pc:sldMk cId="33105164" sldId="268"/>
+        </pc:sldMkLst>
+        <pc:spChg chg="mod">
+          <ac:chgData name="pancho rubio" userId="e8d8d2042893a9b0" providerId="LiveId" clId="{D0586AA7-6981-429C-ABDD-712D4E03FEBC}" dt="2025-11-21T02:03:32.269" v="3315" actId="313"/>
+          <ac:spMkLst>
+            <pc:docMk/>
+            <pc:sldMk cId="33105164" sldId="268"/>
+            <ac:spMk id="2" creationId="{1B431A3B-E74C-DC4A-2E73-081AE7158D04}"/>
+          </ac:spMkLst>
+        </pc:spChg>
+        <pc:spChg chg="mod">
+          <ac:chgData name="pancho rubio" userId="e8d8d2042893a9b0" providerId="LiveId" clId="{D0586AA7-6981-429C-ABDD-712D4E03FEBC}" dt="2025-11-21T02:05:39.607" v="3342" actId="207"/>
+          <ac:spMkLst>
+            <pc:docMk/>
+            <pc:sldMk cId="33105164" sldId="268"/>
+            <ac:spMk id="3" creationId="{02FE94E8-1AF2-21CB-880A-D6670AC65336}"/>
+          </ac:spMkLst>
+        </pc:spChg>
+      </pc:sldChg>
+      <pc:sldChg chg="addSp modSp mod setBg">
+        <pc:chgData name="pancho rubio" userId="e8d8d2042893a9b0" providerId="LiveId" clId="{D0586AA7-6981-429C-ABDD-712D4E03FEBC}" dt="2025-11-21T02:33:40.140" v="3580" actId="5793"/>
+        <pc:sldMkLst>
+          <pc:docMk/>
+          <pc:sldMk cId="4265953033" sldId="269"/>
+        </pc:sldMkLst>
+        <pc:spChg chg="mod">
+          <ac:chgData name="pancho rubio" userId="e8d8d2042893a9b0" providerId="LiveId" clId="{D0586AA7-6981-429C-ABDD-712D4E03FEBC}" dt="2025-11-21T02:13:59.893" v="3383" actId="120"/>
+          <ac:spMkLst>
+            <pc:docMk/>
+            <pc:sldMk cId="4265953033" sldId="269"/>
+            <ac:spMk id="2" creationId="{627F7760-75C5-09E2-CACF-45A0C8EEFE1A}"/>
+          </ac:spMkLst>
+        </pc:spChg>
+        <pc:spChg chg="mod">
+          <ac:chgData name="pancho rubio" userId="e8d8d2042893a9b0" providerId="LiveId" clId="{D0586AA7-6981-429C-ABDD-712D4E03FEBC}" dt="2025-11-21T02:33:40.140" v="3580" actId="5793"/>
+          <ac:spMkLst>
+            <pc:docMk/>
+            <pc:sldMk cId="4265953033" sldId="269"/>
+            <ac:spMk id="3" creationId="{C29FC9B0-875F-DA62-5257-6878291865A0}"/>
+          </ac:spMkLst>
+        </pc:spChg>
+        <pc:picChg chg="add mod">
+          <ac:chgData name="pancho rubio" userId="e8d8d2042893a9b0" providerId="LiveId" clId="{D0586AA7-6981-429C-ABDD-712D4E03FEBC}" dt="2025-11-21T02:33:18.712" v="3578" actId="1076"/>
+          <ac:picMkLst>
+            <pc:docMk/>
+            <pc:sldMk cId="4265953033" sldId="269"/>
+            <ac:picMk id="5" creationId="{7D279742-5B4F-8DD2-2AED-7137FEEBB8C6}"/>
+          </ac:picMkLst>
+        </pc:picChg>
+      </pc:sldChg>
+      <pc:sldChg chg="modSp mod">
+        <pc:chgData name="pancho rubio" userId="e8d8d2042893a9b0" providerId="LiveId" clId="{D0586AA7-6981-429C-ABDD-712D4E03FEBC}" dt="2025-11-21T02:33:56.244" v="3583" actId="5793"/>
+        <pc:sldMkLst>
+          <pc:docMk/>
+          <pc:sldMk cId="586064055" sldId="270"/>
+        </pc:sldMkLst>
+        <pc:spChg chg="mod">
+          <ac:chgData name="pancho rubio" userId="e8d8d2042893a9b0" providerId="LiveId" clId="{D0586AA7-6981-429C-ABDD-712D4E03FEBC}" dt="2025-11-21T02:27:32.464" v="3530" actId="207"/>
+          <ac:spMkLst>
+            <pc:docMk/>
+            <pc:sldMk cId="586064055" sldId="270"/>
+            <ac:spMk id="2" creationId="{03385743-B34A-F084-2B64-4BA682D7D626}"/>
+          </ac:spMkLst>
+        </pc:spChg>
+        <pc:spChg chg="mod">
+          <ac:chgData name="pancho rubio" userId="e8d8d2042893a9b0" providerId="LiveId" clId="{D0586AA7-6981-429C-ABDD-712D4E03FEBC}" dt="2025-11-21T02:33:56.244" v="3583" actId="5793"/>
+          <ac:spMkLst>
+            <pc:docMk/>
+            <pc:sldMk cId="586064055" sldId="270"/>
+            <ac:spMk id="3" creationId="{32BC5B96-D380-CB05-86EF-08EB070A9A1F}"/>
+          </ac:spMkLst>
+        </pc:spChg>
+      </pc:sldChg>
+      <pc:sldChg chg="addSp delSp modSp mod">
+        <pc:chgData name="pancho rubio" userId="e8d8d2042893a9b0" providerId="LiveId" clId="{D0586AA7-6981-429C-ABDD-712D4E03FEBC}" dt="2025-11-21T02:32:51.100" v="3577" actId="1076"/>
+        <pc:sldMkLst>
+          <pc:docMk/>
+          <pc:sldMk cId="3797782229" sldId="271"/>
+        </pc:sldMkLst>
+        <pc:spChg chg="mod">
+          <ac:chgData name="pancho rubio" userId="e8d8d2042893a9b0" providerId="LiveId" clId="{D0586AA7-6981-429C-ABDD-712D4E03FEBC}" dt="2025-11-21T02:28:56.384" v="3537" actId="207"/>
+          <ac:spMkLst>
+            <pc:docMk/>
+            <pc:sldMk cId="3797782229" sldId="271"/>
+            <ac:spMk id="2" creationId="{BB751122-E703-C724-2015-EE2210183E42}"/>
+          </ac:spMkLst>
+        </pc:spChg>
+        <pc:spChg chg="mod">
+          <ac:chgData name="pancho rubio" userId="e8d8d2042893a9b0" providerId="LiveId" clId="{D0586AA7-6981-429C-ABDD-712D4E03FEBC}" dt="2025-11-21T02:32:44.007" v="3576" actId="207"/>
+          <ac:spMkLst>
+            <pc:docMk/>
+            <pc:sldMk cId="3797782229" sldId="271"/>
+            <ac:spMk id="3" creationId="{9EB43641-DB6B-A93F-6B2C-CEFE4B7AE234}"/>
+          </ac:spMkLst>
+        </pc:spChg>
+        <pc:picChg chg="add del mod">
+          <ac:chgData name="pancho rubio" userId="e8d8d2042893a9b0" providerId="LiveId" clId="{D0586AA7-6981-429C-ABDD-712D4E03FEBC}" dt="2025-11-21T02:31:12.030" v="3555" actId="21"/>
+          <ac:picMkLst>
+            <pc:docMk/>
+            <pc:sldMk cId="3797782229" sldId="271"/>
+            <ac:picMk id="5" creationId="{A2B52BB8-7F18-4AD8-BDBA-3EB412BF4AAE}"/>
+          </ac:picMkLst>
+        </pc:picChg>
+        <pc:picChg chg="add mod">
+          <ac:chgData name="pancho rubio" userId="e8d8d2042893a9b0" providerId="LiveId" clId="{D0586AA7-6981-429C-ABDD-712D4E03FEBC}" dt="2025-11-21T02:32:51.100" v="3577" actId="1076"/>
+          <ac:picMkLst>
+            <pc:docMk/>
+            <pc:sldMk cId="3797782229" sldId="271"/>
+            <ac:picMk id="6" creationId="{A2B52BB8-7F18-4AD8-BDBA-3EB412BF4AAE}"/>
+          </ac:picMkLst>
+        </pc:picChg>
+      </pc:sldChg>
+      <pc:sldChg chg="del">
+        <pc:chgData name="pancho rubio" userId="e8d8d2042893a9b0" providerId="LiveId" clId="{D0586AA7-6981-429C-ABDD-712D4E03FEBC}" dt="2025-11-21T02:34:47.429" v="3584" actId="2696"/>
+        <pc:sldMkLst>
+          <pc:docMk/>
+          <pc:sldMk cId="3518232468" sldId="272"/>
+        </pc:sldMkLst>
+      </pc:sldChg>
+      <pc:sldChg chg="del">
+        <pc:chgData name="pancho rubio" userId="e8d8d2042893a9b0" providerId="LiveId" clId="{D0586AA7-6981-429C-ABDD-712D4E03FEBC}" dt="2025-11-21T02:34:54.197" v="3587" actId="2696"/>
+        <pc:sldMkLst>
+          <pc:docMk/>
+          <pc:sldMk cId="2100196625" sldId="273"/>
+        </pc:sldMkLst>
+      </pc:sldChg>
+      <pc:sldChg chg="del">
+        <pc:chgData name="pancho rubio" userId="e8d8d2042893a9b0" providerId="LiveId" clId="{D0586AA7-6981-429C-ABDD-712D4E03FEBC}" dt="2025-11-21T02:34:52.327" v="3586" actId="2696"/>
+        <pc:sldMkLst>
+          <pc:docMk/>
+          <pc:sldMk cId="891299788" sldId="274"/>
+        </pc:sldMkLst>
+      </pc:sldChg>
+      <pc:sldChg chg="del">
+        <pc:chgData name="pancho rubio" userId="e8d8d2042893a9b0" providerId="LiveId" clId="{D0586AA7-6981-429C-ABDD-712D4E03FEBC}" dt="2025-11-21T02:34:50.556" v="3585" actId="2696"/>
+        <pc:sldMkLst>
+          <pc:docMk/>
+          <pc:sldMk cId="1945968711" sldId="275"/>
+        </pc:sldMkLst>
+      </pc:sldChg>
+    </pc:docChg>
+  </pc:docChgLst>
+</pc:chgInfo>
 </file>
 
 <file path=ppt/slideLayouts/slideLayout1.xml><?xml version="1.0" encoding="utf-8"?>
@@ -176,7 +618,7 @@
           <a:noFill/>
           <a:extLst>
             <a:ext uri="{909E8E84-426E-40dd-AFC4-6F175D3DCCD1}">
-              <a14:hiddenFill xmlns:a14="http://schemas.microsoft.com/office/drawing/2010/main" xmlns="">
+              <a14:hiddenFill xmlns="" xmlns:a14="http://schemas.microsoft.com/office/drawing/2010/main">
                 <a:solidFill>
                   <a:srgbClr val="FFFFFF"/>
                 </a:solidFill>
@@ -236,7 +678,7 @@
             </a:ln>
             <a:extLst>
               <a:ext uri="{91240B29-F687-4f45-9708-019B960494DF}">
-                <a14:hiddenLine xmlns:a14="http://schemas.microsoft.com/office/drawing/2010/main" xmlns="" w="9525">
+                <a14:hiddenLine xmlns="" xmlns:a14="http://schemas.microsoft.com/office/drawing/2010/main" w="9525">
                   <a:solidFill>
                     <a:srgbClr val="000000"/>
                   </a:solidFill>
@@ -333,7 +775,7 @@
             </a:ln>
             <a:extLst>
               <a:ext uri="{91240B29-F687-4f45-9708-019B960494DF}">
-                <a14:hiddenLine xmlns:a14="http://schemas.microsoft.com/office/drawing/2010/main" xmlns="" w="9525">
+                <a14:hiddenLine xmlns="" xmlns:a14="http://schemas.microsoft.com/office/drawing/2010/main" w="9525">
                   <a:solidFill>
                     <a:srgbClr val="000000"/>
                   </a:solidFill>
@@ -430,7 +872,7 @@
             </a:ln>
             <a:extLst>
               <a:ext uri="{91240B29-F687-4f45-9708-019B960494DF}">
-                <a14:hiddenLine xmlns:a14="http://schemas.microsoft.com/office/drawing/2010/main" xmlns="" w="9525">
+                <a14:hiddenLine xmlns="" xmlns:a14="http://schemas.microsoft.com/office/drawing/2010/main" w="9525">
                   <a:solidFill>
                     <a:srgbClr val="000000"/>
                   </a:solidFill>
@@ -471,7 +913,7 @@
             </a:ln>
             <a:extLst>
               <a:ext uri="{91240B29-F687-4f45-9708-019B960494DF}">
-                <a14:hiddenLine xmlns:a14="http://schemas.microsoft.com/office/drawing/2010/main" xmlns="" w="9525">
+                <a14:hiddenLine xmlns="" xmlns:a14="http://schemas.microsoft.com/office/drawing/2010/main" w="9525">
                   <a:solidFill>
                     <a:srgbClr val="000000"/>
                   </a:solidFill>
@@ -568,7 +1010,7 @@
             </a:ln>
             <a:extLst>
               <a:ext uri="{91240B29-F687-4f45-9708-019B960494DF}">
-                <a14:hiddenLine xmlns:a14="http://schemas.microsoft.com/office/drawing/2010/main" xmlns="" w="9525">
+                <a14:hiddenLine xmlns="" xmlns:a14="http://schemas.microsoft.com/office/drawing/2010/main" w="9525">
                   <a:solidFill>
                     <a:srgbClr val="000000"/>
                   </a:solidFill>
@@ -637,7 +1079,7 @@
             </a:ln>
             <a:extLst>
               <a:ext uri="{91240B29-F687-4f45-9708-019B960494DF}">
-                <a14:hiddenLine xmlns:a14="http://schemas.microsoft.com/office/drawing/2010/main" xmlns="" w="9525">
+                <a14:hiddenLine xmlns="" xmlns:a14="http://schemas.microsoft.com/office/drawing/2010/main" w="9525">
                   <a:solidFill>
                     <a:srgbClr val="000000"/>
                   </a:solidFill>
@@ -706,7 +1148,7 @@
             </a:ln>
             <a:extLst>
               <a:ext uri="{91240B29-F687-4f45-9708-019B960494DF}">
-                <a14:hiddenLine xmlns:a14="http://schemas.microsoft.com/office/drawing/2010/main" xmlns="" w="9525">
+                <a14:hiddenLine xmlns="" xmlns:a14="http://schemas.microsoft.com/office/drawing/2010/main" w="9525">
                   <a:solidFill>
                     <a:srgbClr val="000000"/>
                   </a:solidFill>
@@ -803,7 +1245,7 @@
             </a:ln>
             <a:extLst>
               <a:ext uri="{91240B29-F687-4f45-9708-019B960494DF}">
-                <a14:hiddenLine xmlns:a14="http://schemas.microsoft.com/office/drawing/2010/main" xmlns="" w="9525">
+                <a14:hiddenLine xmlns="" xmlns:a14="http://schemas.microsoft.com/office/drawing/2010/main" w="9525">
                   <a:solidFill>
                     <a:srgbClr val="000000"/>
                   </a:solidFill>
@@ -872,7 +1314,7 @@
             </a:ln>
             <a:extLst>
               <a:ext uri="{91240B29-F687-4f45-9708-019B960494DF}">
-                <a14:hiddenLine xmlns:a14="http://schemas.microsoft.com/office/drawing/2010/main" xmlns="" w="9525">
+                <a14:hiddenLine xmlns="" xmlns:a14="http://schemas.microsoft.com/office/drawing/2010/main" w="9525">
                   <a:solidFill>
                     <a:srgbClr val="000000"/>
                   </a:solidFill>
@@ -941,7 +1383,7 @@
             </a:ln>
             <a:extLst>
               <a:ext uri="{91240B29-F687-4f45-9708-019B960494DF}">
-                <a14:hiddenLine xmlns:a14="http://schemas.microsoft.com/office/drawing/2010/main" xmlns="" w="9525">
+                <a14:hiddenLine xmlns="" xmlns:a14="http://schemas.microsoft.com/office/drawing/2010/main" w="9525">
                   <a:solidFill>
                     <a:srgbClr val="000000"/>
                   </a:solidFill>
@@ -1038,7 +1480,7 @@
             </a:ln>
             <a:extLst>
               <a:ext uri="{91240B29-F687-4f45-9708-019B960494DF}">
-                <a14:hiddenLine xmlns:a14="http://schemas.microsoft.com/office/drawing/2010/main" xmlns="" w="9525">
+                <a14:hiddenLine xmlns="" xmlns:a14="http://schemas.microsoft.com/office/drawing/2010/main" w="9525">
                   <a:solidFill>
                     <a:srgbClr val="000000"/>
                   </a:solidFill>
@@ -1135,7 +1577,7 @@
             </a:ln>
             <a:extLst>
               <a:ext uri="{91240B29-F687-4f45-9708-019B960494DF}">
-                <a14:hiddenLine xmlns:a14="http://schemas.microsoft.com/office/drawing/2010/main" xmlns="" w="9525">
+                <a14:hiddenLine xmlns="" xmlns:a14="http://schemas.microsoft.com/office/drawing/2010/main" w="9525">
                   <a:solidFill>
                     <a:srgbClr val="000000"/>
                   </a:solidFill>
@@ -1204,7 +1646,7 @@
             </a:ln>
             <a:extLst>
               <a:ext uri="{91240B29-F687-4f45-9708-019B960494DF}">
-                <a14:hiddenLine xmlns:a14="http://schemas.microsoft.com/office/drawing/2010/main" xmlns="" w="9525">
+                <a14:hiddenLine xmlns="" xmlns:a14="http://schemas.microsoft.com/office/drawing/2010/main" w="9525">
                   <a:solidFill>
                     <a:srgbClr val="000000"/>
                   </a:solidFill>
@@ -1321,7 +1763,7 @@
             </a:ln>
             <a:extLst>
               <a:ext uri="{91240B29-F687-4f45-9708-019B960494DF}">
-                <a14:hiddenLine xmlns:a14="http://schemas.microsoft.com/office/drawing/2010/main" xmlns="" w="9525">
+                <a14:hiddenLine xmlns="" xmlns:a14="http://schemas.microsoft.com/office/drawing/2010/main" w="9525">
                   <a:solidFill>
                     <a:srgbClr val="000000"/>
                   </a:solidFill>
@@ -1390,7 +1832,7 @@
             </a:ln>
             <a:extLst>
               <a:ext uri="{91240B29-F687-4f45-9708-019B960494DF}">
-                <a14:hiddenLine xmlns:a14="http://schemas.microsoft.com/office/drawing/2010/main" xmlns="" w="9525">
+                <a14:hiddenLine xmlns="" xmlns:a14="http://schemas.microsoft.com/office/drawing/2010/main" w="9525">
                   <a:solidFill>
                     <a:srgbClr val="000000"/>
                   </a:solidFill>
@@ -1487,7 +1929,7 @@
             </a:ln>
             <a:extLst>
               <a:ext uri="{91240B29-F687-4f45-9708-019B960494DF}">
-                <a14:hiddenLine xmlns:a14="http://schemas.microsoft.com/office/drawing/2010/main" xmlns="" w="9525">
+                <a14:hiddenLine xmlns="" xmlns:a14="http://schemas.microsoft.com/office/drawing/2010/main" w="9525">
                   <a:solidFill>
                     <a:srgbClr val="000000"/>
                   </a:solidFill>
@@ -1584,7 +2026,7 @@
             </a:ln>
             <a:extLst>
               <a:ext uri="{91240B29-F687-4f45-9708-019B960494DF}">
-                <a14:hiddenLine xmlns:a14="http://schemas.microsoft.com/office/drawing/2010/main" xmlns="" w="9525">
+                <a14:hiddenLine xmlns="" xmlns:a14="http://schemas.microsoft.com/office/drawing/2010/main" w="9525">
                   <a:solidFill>
                     <a:srgbClr val="000000"/>
                   </a:solidFill>
@@ -1653,7 +2095,7 @@
             </a:ln>
             <a:extLst>
               <a:ext uri="{91240B29-F687-4f45-9708-019B960494DF}">
-                <a14:hiddenLine xmlns:a14="http://schemas.microsoft.com/office/drawing/2010/main" xmlns="" w="9525">
+                <a14:hiddenLine xmlns="" xmlns:a14="http://schemas.microsoft.com/office/drawing/2010/main" w="9525">
                   <a:solidFill>
                     <a:srgbClr val="000000"/>
                   </a:solidFill>
@@ -1750,7 +2192,7 @@
             </a:ln>
             <a:extLst>
               <a:ext uri="{91240B29-F687-4f45-9708-019B960494DF}">
-                <a14:hiddenLine xmlns:a14="http://schemas.microsoft.com/office/drawing/2010/main" xmlns="" w="9525">
+                <a14:hiddenLine xmlns="" xmlns:a14="http://schemas.microsoft.com/office/drawing/2010/main" w="9525">
                   <a:solidFill>
                     <a:srgbClr val="000000"/>
                   </a:solidFill>
@@ -1847,7 +2289,7 @@
             </a:ln>
             <a:extLst>
               <a:ext uri="{91240B29-F687-4f45-9708-019B960494DF}">
-                <a14:hiddenLine xmlns:a14="http://schemas.microsoft.com/office/drawing/2010/main" xmlns="" w="9525">
+                <a14:hiddenLine xmlns="" xmlns:a14="http://schemas.microsoft.com/office/drawing/2010/main" w="9525">
                   <a:solidFill>
                     <a:srgbClr val="000000"/>
                   </a:solidFill>
@@ -1910,7 +2352,7 @@
             </a:ln>
             <a:extLst>
               <a:ext uri="{91240B29-F687-4f45-9708-019B960494DF}">
-                <a14:hiddenLine xmlns:a14="http://schemas.microsoft.com/office/drawing/2010/main" xmlns="" w="9525">
+                <a14:hiddenLine xmlns="" xmlns:a14="http://schemas.microsoft.com/office/drawing/2010/main" w="9525">
                   <a:solidFill>
                     <a:srgbClr val="000000"/>
                   </a:solidFill>
@@ -2007,7 +2449,7 @@
             </a:ln>
             <a:extLst>
               <a:ext uri="{91240B29-F687-4f45-9708-019B960494DF}">
-                <a14:hiddenLine xmlns:a14="http://schemas.microsoft.com/office/drawing/2010/main" xmlns="" w="9525">
+                <a14:hiddenLine xmlns="" xmlns:a14="http://schemas.microsoft.com/office/drawing/2010/main" w="9525">
                   <a:solidFill>
                     <a:srgbClr val="000000"/>
                   </a:solidFill>
@@ -2070,7 +2512,7 @@
             </a:ln>
             <a:extLst>
               <a:ext uri="{91240B29-F687-4f45-9708-019B960494DF}">
-                <a14:hiddenLine xmlns:a14="http://schemas.microsoft.com/office/drawing/2010/main" xmlns="" w="9525">
+                <a14:hiddenLine xmlns="" xmlns:a14="http://schemas.microsoft.com/office/drawing/2010/main" w="9525">
                   <a:solidFill>
                     <a:srgbClr val="000000"/>
                   </a:solidFill>
@@ -2167,7 +2609,7 @@
             </a:ln>
             <a:extLst>
               <a:ext uri="{91240B29-F687-4f45-9708-019B960494DF}">
-                <a14:hiddenLine xmlns:a14="http://schemas.microsoft.com/office/drawing/2010/main" xmlns="" w="9525">
+                <a14:hiddenLine xmlns="" xmlns:a14="http://schemas.microsoft.com/office/drawing/2010/main" w="9525">
                   <a:solidFill>
                     <a:srgbClr val="000000"/>
                   </a:solidFill>
@@ -2242,7 +2684,7 @@
             </a:ln>
             <a:extLst>
               <a:ext uri="{91240B29-F687-4f45-9708-019B960494DF}">
-                <a14:hiddenLine xmlns:a14="http://schemas.microsoft.com/office/drawing/2010/main" xmlns="" w="9525">
+                <a14:hiddenLine xmlns="" xmlns:a14="http://schemas.microsoft.com/office/drawing/2010/main" w="9525">
                   <a:solidFill>
                     <a:srgbClr val="000000"/>
                   </a:solidFill>
@@ -2339,7 +2781,7 @@
             </a:ln>
             <a:extLst>
               <a:ext uri="{91240B29-F687-4f45-9708-019B960494DF}">
-                <a14:hiddenLine xmlns:a14="http://schemas.microsoft.com/office/drawing/2010/main" xmlns="" w="9525">
+                <a14:hiddenLine xmlns="" xmlns:a14="http://schemas.microsoft.com/office/drawing/2010/main" w="9525">
                   <a:solidFill>
                     <a:srgbClr val="000000"/>
                   </a:solidFill>
@@ -2414,7 +2856,7 @@
             </a:ln>
             <a:extLst>
               <a:ext uri="{91240B29-F687-4f45-9708-019B960494DF}">
-                <a14:hiddenLine xmlns:a14="http://schemas.microsoft.com/office/drawing/2010/main" xmlns="" w="9525">
+                <a14:hiddenLine xmlns="" xmlns:a14="http://schemas.microsoft.com/office/drawing/2010/main" w="9525">
                   <a:solidFill>
                     <a:srgbClr val="000000"/>
                   </a:solidFill>
@@ -2511,7 +2953,7 @@
             </a:ln>
             <a:extLst>
               <a:ext uri="{91240B29-F687-4f45-9708-019B960494DF}">
-                <a14:hiddenLine xmlns:a14="http://schemas.microsoft.com/office/drawing/2010/main" xmlns="" w="9525">
+                <a14:hiddenLine xmlns="" xmlns:a14="http://schemas.microsoft.com/office/drawing/2010/main" w="9525">
                   <a:solidFill>
                     <a:srgbClr val="000000"/>
                   </a:solidFill>
@@ -2552,7 +2994,7 @@
             </a:ln>
             <a:extLst>
               <a:ext uri="{91240B29-F687-4f45-9708-019B960494DF}">
-                <a14:hiddenLine xmlns:a14="http://schemas.microsoft.com/office/drawing/2010/main" xmlns="" w="9525">
+                <a14:hiddenLine xmlns="" xmlns:a14="http://schemas.microsoft.com/office/drawing/2010/main" w="9525">
                   <a:solidFill>
                     <a:srgbClr val="000000"/>
                   </a:solidFill>
@@ -2649,7 +3091,7 @@
             </a:ln>
             <a:extLst>
               <a:ext uri="{91240B29-F687-4f45-9708-019B960494DF}">
-                <a14:hiddenLine xmlns:a14="http://schemas.microsoft.com/office/drawing/2010/main" xmlns="" w="9525">
+                <a14:hiddenLine xmlns="" xmlns:a14="http://schemas.microsoft.com/office/drawing/2010/main" w="9525">
                   <a:solidFill>
                     <a:srgbClr val="000000"/>
                   </a:solidFill>
@@ -2718,7 +3160,7 @@
             </a:ln>
             <a:extLst>
               <a:ext uri="{91240B29-F687-4f45-9708-019B960494DF}">
-                <a14:hiddenLine xmlns:a14="http://schemas.microsoft.com/office/drawing/2010/main" xmlns="" w="9525">
+                <a14:hiddenLine xmlns="" xmlns:a14="http://schemas.microsoft.com/office/drawing/2010/main" w="9525">
                   <a:solidFill>
                     <a:srgbClr val="000000"/>
                   </a:solidFill>
@@ -2787,7 +3229,7 @@
             </a:ln>
             <a:extLst>
               <a:ext uri="{91240B29-F687-4f45-9708-019B960494DF}">
-                <a14:hiddenLine xmlns:a14="http://schemas.microsoft.com/office/drawing/2010/main" xmlns="" w="9525">
+                <a14:hiddenLine xmlns="" xmlns:a14="http://schemas.microsoft.com/office/drawing/2010/main" w="9525">
                   <a:solidFill>
                     <a:srgbClr val="000000"/>
                   </a:solidFill>
@@ -2884,7 +3326,7 @@
             </a:ln>
             <a:extLst>
               <a:ext uri="{91240B29-F687-4f45-9708-019B960494DF}">
-                <a14:hiddenLine xmlns:a14="http://schemas.microsoft.com/office/drawing/2010/main" xmlns="" w="9525">
+                <a14:hiddenLine xmlns="" xmlns:a14="http://schemas.microsoft.com/office/drawing/2010/main" w="9525">
                   <a:solidFill>
                     <a:srgbClr val="000000"/>
                   </a:solidFill>
@@ -2959,7 +3401,7 @@
             </a:ln>
             <a:extLst>
               <a:ext uri="{91240B29-F687-4f45-9708-019B960494DF}">
-                <a14:hiddenLine xmlns:a14="http://schemas.microsoft.com/office/drawing/2010/main" xmlns="" w="9525">
+                <a14:hiddenLine xmlns="" xmlns:a14="http://schemas.microsoft.com/office/drawing/2010/main" w="9525">
                   <a:solidFill>
                     <a:srgbClr val="000000"/>
                   </a:solidFill>
@@ -3028,7 +3470,7 @@
             </a:ln>
             <a:extLst>
               <a:ext uri="{91240B29-F687-4f45-9708-019B960494DF}">
-                <a14:hiddenLine xmlns:a14="http://schemas.microsoft.com/office/drawing/2010/main" xmlns="" w="9525">
+                <a14:hiddenLine xmlns="" xmlns:a14="http://schemas.microsoft.com/office/drawing/2010/main" w="9525">
                   <a:solidFill>
                     <a:srgbClr val="000000"/>
                   </a:solidFill>
@@ -3125,7 +3567,7 @@
             </a:ln>
             <a:extLst>
               <a:ext uri="{91240B29-F687-4f45-9708-019B960494DF}">
-                <a14:hiddenLine xmlns:a14="http://schemas.microsoft.com/office/drawing/2010/main" xmlns="" w="9525">
+                <a14:hiddenLine xmlns="" xmlns:a14="http://schemas.microsoft.com/office/drawing/2010/main" w="9525">
                   <a:solidFill>
                     <a:srgbClr val="000000"/>
                   </a:solidFill>
@@ -3194,7 +3636,7 @@
             </a:ln>
             <a:extLst>
               <a:ext uri="{91240B29-F687-4f45-9708-019B960494DF}">
-                <a14:hiddenLine xmlns:a14="http://schemas.microsoft.com/office/drawing/2010/main" xmlns="" w="9525">
+                <a14:hiddenLine xmlns="" xmlns:a14="http://schemas.microsoft.com/office/drawing/2010/main" w="9525">
                   <a:solidFill>
                     <a:srgbClr val="000000"/>
                   </a:solidFill>
@@ -3291,7 +3733,7 @@
             </a:ln>
             <a:extLst>
               <a:ext uri="{91240B29-F687-4f45-9708-019B960494DF}">
-                <a14:hiddenLine xmlns:a14="http://schemas.microsoft.com/office/drawing/2010/main" xmlns="" w="9525">
+                <a14:hiddenLine xmlns="" xmlns:a14="http://schemas.microsoft.com/office/drawing/2010/main" w="9525">
                   <a:solidFill>
                     <a:srgbClr val="000000"/>
                   </a:solidFill>
@@ -3360,7 +3802,7 @@
             </a:ln>
             <a:extLst>
               <a:ext uri="{91240B29-F687-4f45-9708-019B960494DF}">
-                <a14:hiddenLine xmlns:a14="http://schemas.microsoft.com/office/drawing/2010/main" xmlns="" w="9525">
+                <a14:hiddenLine xmlns="" xmlns:a14="http://schemas.microsoft.com/office/drawing/2010/main" w="9525">
                   <a:solidFill>
                     <a:srgbClr val="000000"/>
                   </a:solidFill>
@@ -3457,7 +3899,7 @@
             </a:ln>
             <a:extLst>
               <a:ext uri="{91240B29-F687-4f45-9708-019B960494DF}">
-                <a14:hiddenLine xmlns:a14="http://schemas.microsoft.com/office/drawing/2010/main" xmlns="" w="9525">
+                <a14:hiddenLine xmlns="" xmlns:a14="http://schemas.microsoft.com/office/drawing/2010/main" w="9525">
                   <a:solidFill>
                     <a:srgbClr val="000000"/>
                   </a:solidFill>
@@ -3498,7 +3940,7 @@
             </a:ln>
             <a:extLst>
               <a:ext uri="{91240B29-F687-4f45-9708-019B960494DF}">
-                <a14:hiddenLine xmlns:a14="http://schemas.microsoft.com/office/drawing/2010/main" xmlns="" w="9525">
+                <a14:hiddenLine xmlns="" xmlns:a14="http://schemas.microsoft.com/office/drawing/2010/main" w="9525">
                   <a:solidFill>
                     <a:srgbClr val="000000"/>
                   </a:solidFill>
@@ -3570,7 +4012,7 @@
             </a:ln>
             <a:extLst>
               <a:ext uri="{91240B29-F687-4f45-9708-019B960494DF}">
-                <a14:hiddenLine xmlns:a14="http://schemas.microsoft.com/office/drawing/2010/main" xmlns="" w="9525">
+                <a14:hiddenLine xmlns="" xmlns:a14="http://schemas.microsoft.com/office/drawing/2010/main" w="9525">
                   <a:solidFill>
                     <a:srgbClr val="000000"/>
                   </a:solidFill>
@@ -3667,7 +4109,7 @@
             </a:ln>
             <a:extLst>
               <a:ext uri="{91240B29-F687-4f45-9708-019B960494DF}">
-                <a14:hiddenLine xmlns:a14="http://schemas.microsoft.com/office/drawing/2010/main" xmlns="" w="9525">
+                <a14:hiddenLine xmlns="" xmlns:a14="http://schemas.microsoft.com/office/drawing/2010/main" w="9525">
                   <a:solidFill>
                     <a:srgbClr val="000000"/>
                   </a:solidFill>
@@ -3736,7 +4178,7 @@
             </a:ln>
             <a:extLst>
               <a:ext uri="{91240B29-F687-4f45-9708-019B960494DF}">
-                <a14:hiddenLine xmlns:a14="http://schemas.microsoft.com/office/drawing/2010/main" xmlns="" w="9525">
+                <a14:hiddenLine xmlns="" xmlns:a14="http://schemas.microsoft.com/office/drawing/2010/main" w="9525">
                   <a:solidFill>
                     <a:srgbClr val="000000"/>
                   </a:solidFill>
@@ -3833,7 +4275,7 @@
             </a:ln>
             <a:extLst>
               <a:ext uri="{91240B29-F687-4f45-9708-019B960494DF}">
-                <a14:hiddenLine xmlns:a14="http://schemas.microsoft.com/office/drawing/2010/main" xmlns="" w="9525">
+                <a14:hiddenLine xmlns="" xmlns:a14="http://schemas.microsoft.com/office/drawing/2010/main" w="9525">
                   <a:solidFill>
                     <a:srgbClr val="000000"/>
                   </a:solidFill>
@@ -3930,7 +4372,7 @@
             </a:ln>
             <a:extLst>
               <a:ext uri="{91240B29-F687-4f45-9708-019B960494DF}">
-                <a14:hiddenLine xmlns:a14="http://schemas.microsoft.com/office/drawing/2010/main" xmlns="" w="9525">
+                <a14:hiddenLine xmlns="" xmlns:a14="http://schemas.microsoft.com/office/drawing/2010/main" w="9525">
                   <a:solidFill>
                     <a:srgbClr val="000000"/>
                   </a:solidFill>
@@ -4002,7 +4444,7 @@
             </a:ln>
             <a:extLst>
               <a:ext uri="{91240B29-F687-4f45-9708-019B960494DF}">
-                <a14:hiddenLine xmlns:a14="http://schemas.microsoft.com/office/drawing/2010/main" xmlns="" w="9525">
+                <a14:hiddenLine xmlns="" xmlns:a14="http://schemas.microsoft.com/office/drawing/2010/main" w="9525">
                   <a:solidFill>
                     <a:srgbClr val="000000"/>
                   </a:solidFill>
@@ -4071,7 +4513,7 @@
             </a:ln>
             <a:extLst>
               <a:ext uri="{91240B29-F687-4f45-9708-019B960494DF}">
-                <a14:hiddenLine xmlns:a14="http://schemas.microsoft.com/office/drawing/2010/main" xmlns="" w="9525">
+                <a14:hiddenLine xmlns="" xmlns:a14="http://schemas.microsoft.com/office/drawing/2010/main" w="9525">
                   <a:solidFill>
                     <a:srgbClr val="000000"/>
                   </a:solidFill>
@@ -4168,7 +4610,7 @@
             </a:ln>
             <a:extLst>
               <a:ext uri="{91240B29-F687-4f45-9708-019B960494DF}">
-                <a14:hiddenLine xmlns:a14="http://schemas.microsoft.com/office/drawing/2010/main" xmlns="" w="9525">
+                <a14:hiddenLine xmlns="" xmlns:a14="http://schemas.microsoft.com/office/drawing/2010/main" w="9525">
                   <a:solidFill>
                     <a:srgbClr val="000000"/>
                   </a:solidFill>
@@ -4265,7 +4707,7 @@
             </a:ln>
             <a:extLst>
               <a:ext uri="{91240B29-F687-4f45-9708-019B960494DF}">
-                <a14:hiddenLine xmlns:a14="http://schemas.microsoft.com/office/drawing/2010/main" xmlns="" w="9525">
+                <a14:hiddenLine xmlns="" xmlns:a14="http://schemas.microsoft.com/office/drawing/2010/main" w="9525">
                   <a:solidFill>
                     <a:srgbClr val="000000"/>
                   </a:solidFill>
@@ -4334,7 +4776,7 @@
             </a:ln>
             <a:extLst>
               <a:ext uri="{91240B29-F687-4f45-9708-019B960494DF}">
-                <a14:hiddenLine xmlns:a14="http://schemas.microsoft.com/office/drawing/2010/main" xmlns="" w="9525">
+                <a14:hiddenLine xmlns="" xmlns:a14="http://schemas.microsoft.com/office/drawing/2010/main" w="9525">
                   <a:solidFill>
                     <a:srgbClr val="000000"/>
                   </a:solidFill>
@@ -4461,7 +4903,7 @@
             </a:ln>
             <a:extLst>
               <a:ext uri="{91240B29-F687-4f45-9708-019B960494DF}">
-                <a14:hiddenLine xmlns:a14="http://schemas.microsoft.com/office/drawing/2010/main" xmlns="" w="9525">
+                <a14:hiddenLine xmlns="" xmlns:a14="http://schemas.microsoft.com/office/drawing/2010/main" w="9525">
                   <a:solidFill>
                     <a:srgbClr val="000000"/>
                   </a:solidFill>
@@ -4536,7 +4978,7 @@
             </a:ln>
             <a:extLst>
               <a:ext uri="{91240B29-F687-4f45-9708-019B960494DF}">
-                <a14:hiddenLine xmlns:a14="http://schemas.microsoft.com/office/drawing/2010/main" xmlns="" w="9525">
+                <a14:hiddenLine xmlns="" xmlns:a14="http://schemas.microsoft.com/office/drawing/2010/main" w="9525">
                   <a:solidFill>
                     <a:srgbClr val="000000"/>
                   </a:solidFill>
@@ -4633,7 +5075,7 @@
             </a:ln>
             <a:extLst>
               <a:ext uri="{91240B29-F687-4f45-9708-019B960494DF}">
-                <a14:hiddenLine xmlns:a14="http://schemas.microsoft.com/office/drawing/2010/main" xmlns="" w="9525">
+                <a14:hiddenLine xmlns="" xmlns:a14="http://schemas.microsoft.com/office/drawing/2010/main" w="9525">
                   <a:solidFill>
                     <a:srgbClr val="000000"/>
                   </a:solidFill>
@@ -4780,7 +5222,7 @@
           <a:p>
             <a:fld id="{48A87A34-81AB-432B-8DAE-1953F412C126}" type="datetimeFigureOut">
               <a:rPr lang="en-US" dirty="0"/>
-              <a:t>11/16/2025</a:t>
+              <a:t>11/18/2025</a:t>
             </a:fld>
             <a:endParaRPr lang="en-US" dirty="0"/>
           </a:p>
@@ -5042,7 +5484,7 @@
           <a:p>
             <a:fld id="{48A87A34-81AB-432B-8DAE-1953F412C126}" type="datetimeFigureOut">
               <a:rPr lang="en-US" dirty="0"/>
-              <a:t>11/16/2025</a:t>
+              <a:t>11/18/2025</a:t>
             </a:fld>
             <a:endParaRPr lang="en-US" dirty="0"/>
           </a:p>
@@ -5233,7 +5675,7 @@
           <a:p>
             <a:fld id="{48A87A34-81AB-432B-8DAE-1953F412C126}" type="datetimeFigureOut">
               <a:rPr lang="en-US" dirty="0"/>
-              <a:t>11/16/2025</a:t>
+              <a:t>11/18/2025</a:t>
             </a:fld>
             <a:endParaRPr lang="en-US" dirty="0"/>
           </a:p>
@@ -5491,7 +5933,7 @@
           <a:p>
             <a:fld id="{48A87A34-81AB-432B-8DAE-1953F412C126}" type="datetimeFigureOut">
               <a:rPr lang="en-US" dirty="0"/>
-              <a:t>11/16/2025</a:t>
+              <a:t>11/18/2025</a:t>
             </a:fld>
             <a:endParaRPr lang="en-US" dirty="0"/>
           </a:p>
@@ -5920,7 +6362,7 @@
           <a:p>
             <a:fld id="{48A87A34-81AB-432B-8DAE-1953F412C126}" type="datetimeFigureOut">
               <a:rPr lang="en-US" dirty="0"/>
-              <a:t>11/16/2025</a:t>
+              <a:t>11/18/2025</a:t>
             </a:fld>
             <a:endParaRPr lang="en-US" dirty="0"/>
           </a:p>
@@ -6461,7 +6903,7 @@
           <a:p>
             <a:fld id="{48A87A34-81AB-432B-8DAE-1953F412C126}" type="datetimeFigureOut">
               <a:rPr lang="en-US" dirty="0"/>
-              <a:t>11/16/2025</a:t>
+              <a:t>11/18/2025</a:t>
             </a:fld>
             <a:endParaRPr lang="en-US" dirty="0"/>
           </a:p>
@@ -7176,7 +7618,7 @@
           <a:p>
             <a:fld id="{48A87A34-81AB-432B-8DAE-1953F412C126}" type="datetimeFigureOut">
               <a:rPr lang="en-US" dirty="0"/>
-              <a:t>11/16/2025</a:t>
+              <a:t>11/18/2025</a:t>
             </a:fld>
             <a:endParaRPr lang="en-US" dirty="0"/>
           </a:p>
@@ -7341,7 +7783,7 @@
           <a:p>
             <a:fld id="{48A87A34-81AB-432B-8DAE-1953F412C126}" type="datetimeFigureOut">
               <a:rPr lang="en-US" dirty="0"/>
-              <a:t>11/16/2025</a:t>
+              <a:t>11/18/2025</a:t>
             </a:fld>
             <a:endParaRPr lang="en-US" dirty="0"/>
           </a:p>
@@ -7516,7 +7958,7 @@
           <a:p>
             <a:fld id="{48A87A34-81AB-432B-8DAE-1953F412C126}" type="datetimeFigureOut">
               <a:rPr lang="en-US" dirty="0"/>
-              <a:t>11/16/2025</a:t>
+              <a:t>11/18/2025</a:t>
             </a:fld>
             <a:endParaRPr lang="en-US" dirty="0"/>
           </a:p>
@@ -7681,7 +8123,7 @@
           <a:p>
             <a:fld id="{48A87A34-81AB-432B-8DAE-1953F412C126}" type="datetimeFigureOut">
               <a:rPr lang="en-US" dirty="0"/>
-              <a:t>11/16/2025</a:t>
+              <a:t>11/18/2025</a:t>
             </a:fld>
             <a:endParaRPr lang="en-US" dirty="0"/>
           </a:p>
@@ -7926,7 +8368,7 @@
           <a:p>
             <a:fld id="{48A87A34-81AB-432B-8DAE-1953F412C126}" type="datetimeFigureOut">
               <a:rPr lang="en-US" dirty="0"/>
-              <a:t>11/16/2025</a:t>
+              <a:t>11/18/2025</a:t>
             </a:fld>
             <a:endParaRPr lang="en-US" dirty="0"/>
           </a:p>
@@ -8153,7 +8595,7 @@
           <a:p>
             <a:fld id="{48A87A34-81AB-432B-8DAE-1953F412C126}" type="datetimeFigureOut">
               <a:rPr lang="en-US" dirty="0"/>
-              <a:t>11/16/2025</a:t>
+              <a:t>11/18/2025</a:t>
             </a:fld>
             <a:endParaRPr lang="en-US" dirty="0"/>
           </a:p>
@@ -8529,7 +8971,7 @@
           <a:p>
             <a:fld id="{48A87A34-81AB-432B-8DAE-1953F412C126}" type="datetimeFigureOut">
               <a:rPr lang="en-US" dirty="0"/>
-              <a:t>11/16/2025</a:t>
+              <a:t>11/18/2025</a:t>
             </a:fld>
             <a:endParaRPr lang="en-US" dirty="0"/>
           </a:p>
@@ -8642,7 +9084,7 @@
           <a:p>
             <a:fld id="{48A87A34-81AB-432B-8DAE-1953F412C126}" type="datetimeFigureOut">
               <a:rPr lang="en-US" dirty="0"/>
-              <a:t>11/16/2025</a:t>
+              <a:t>11/18/2025</a:t>
             </a:fld>
             <a:endParaRPr lang="en-US" dirty="0"/>
           </a:p>
@@ -8732,7 +9174,7 @@
           <a:p>
             <a:fld id="{48A87A34-81AB-432B-8DAE-1953F412C126}" type="datetimeFigureOut">
               <a:rPr lang="en-US" dirty="0"/>
-              <a:t>11/16/2025</a:t>
+              <a:t>11/18/2025</a:t>
             </a:fld>
             <a:endParaRPr lang="en-US" dirty="0"/>
           </a:p>
@@ -8976,7 +9418,7 @@
           <a:p>
             <a:fld id="{48A87A34-81AB-432B-8DAE-1953F412C126}" type="datetimeFigureOut">
               <a:rPr lang="en-US" dirty="0"/>
-              <a:t>11/16/2025</a:t>
+              <a:t>11/18/2025</a:t>
             </a:fld>
             <a:endParaRPr lang="en-US" dirty="0"/>
           </a:p>
@@ -9251,7 +9693,7 @@
           <a:p>
             <a:fld id="{48A87A34-81AB-432B-8DAE-1953F412C126}" type="datetimeFigureOut">
               <a:rPr lang="en-US" dirty="0"/>
-              <a:t>11/16/2025</a:t>
+              <a:t>11/18/2025</a:t>
             </a:fld>
             <a:endParaRPr lang="en-US" dirty="0"/>
           </a:p>
@@ -9362,7 +9804,7 @@
           <a:noFill/>
           <a:extLst>
             <a:ext uri="{909E8E84-426E-40dd-AFC4-6F175D3DCCD1}">
-              <a14:hiddenFill xmlns:a14="http://schemas.microsoft.com/office/drawing/2010/main" xmlns="">
+              <a14:hiddenFill xmlns="" xmlns:a14="http://schemas.microsoft.com/office/drawing/2010/main">
                 <a:solidFill>
                   <a:srgbClr val="FFFFFF"/>
                 </a:solidFill>
@@ -9436,7 +9878,7 @@
               </a:ln>
               <a:extLst>
                 <a:ext uri="{91240B29-F687-4f45-9708-019B960494DF}">
-                  <a14:hiddenLine xmlns:a14="http://schemas.microsoft.com/office/drawing/2010/main" xmlns="" w="9525">
+                  <a14:hiddenLine xmlns="" xmlns:a14="http://schemas.microsoft.com/office/drawing/2010/main" w="9525">
                     <a:solidFill>
                       <a:srgbClr val="000000"/>
                     </a:solidFill>
@@ -9533,7 +9975,7 @@
               </a:ln>
               <a:extLst>
                 <a:ext uri="{91240B29-F687-4f45-9708-019B960494DF}">
-                  <a14:hiddenLine xmlns:a14="http://schemas.microsoft.com/office/drawing/2010/main" xmlns="" w="9525">
+                  <a14:hiddenLine xmlns="" xmlns:a14="http://schemas.microsoft.com/office/drawing/2010/main" w="9525">
                     <a:solidFill>
                       <a:srgbClr val="000000"/>
                     </a:solidFill>
@@ -9630,7 +10072,7 @@
               </a:ln>
               <a:extLst>
                 <a:ext uri="{91240B29-F687-4f45-9708-019B960494DF}">
-                  <a14:hiddenLine xmlns:a14="http://schemas.microsoft.com/office/drawing/2010/main" xmlns="" w="9525">
+                  <a14:hiddenLine xmlns="" xmlns:a14="http://schemas.microsoft.com/office/drawing/2010/main" w="9525">
                     <a:solidFill>
                       <a:srgbClr val="000000"/>
                     </a:solidFill>
@@ -9699,7 +10141,7 @@
               </a:ln>
               <a:extLst>
                 <a:ext uri="{91240B29-F687-4f45-9708-019B960494DF}">
-                  <a14:hiddenLine xmlns:a14="http://schemas.microsoft.com/office/drawing/2010/main" xmlns="" w="9525">
+                  <a14:hiddenLine xmlns="" xmlns:a14="http://schemas.microsoft.com/office/drawing/2010/main" w="9525">
                     <a:solidFill>
                       <a:srgbClr val="000000"/>
                     </a:solidFill>
@@ -9796,7 +10238,7 @@
               </a:ln>
               <a:extLst>
                 <a:ext uri="{91240B29-F687-4f45-9708-019B960494DF}">
-                  <a14:hiddenLine xmlns:a14="http://schemas.microsoft.com/office/drawing/2010/main" xmlns="" w="9525">
+                  <a14:hiddenLine xmlns="" xmlns:a14="http://schemas.microsoft.com/office/drawing/2010/main" w="9525">
                     <a:solidFill>
                       <a:srgbClr val="000000"/>
                     </a:solidFill>
@@ -9865,7 +10307,7 @@
               </a:ln>
               <a:extLst>
                 <a:ext uri="{91240B29-F687-4f45-9708-019B960494DF}">
-                  <a14:hiddenLine xmlns:a14="http://schemas.microsoft.com/office/drawing/2010/main" xmlns="" w="9525">
+                  <a14:hiddenLine xmlns="" xmlns:a14="http://schemas.microsoft.com/office/drawing/2010/main" w="9525">
                     <a:solidFill>
                       <a:srgbClr val="000000"/>
                     </a:solidFill>
@@ -9934,7 +10376,7 @@
               </a:ln>
               <a:extLst>
                 <a:ext uri="{91240B29-F687-4f45-9708-019B960494DF}">
-                  <a14:hiddenLine xmlns:a14="http://schemas.microsoft.com/office/drawing/2010/main" xmlns="" w="9525">
+                  <a14:hiddenLine xmlns="" xmlns:a14="http://schemas.microsoft.com/office/drawing/2010/main" w="9525">
                     <a:solidFill>
                       <a:srgbClr val="000000"/>
                     </a:solidFill>
@@ -10031,7 +10473,7 @@
               </a:ln>
               <a:extLst>
                 <a:ext uri="{91240B29-F687-4f45-9708-019B960494DF}">
-                  <a14:hiddenLine xmlns:a14="http://schemas.microsoft.com/office/drawing/2010/main" xmlns="" w="9525">
+                  <a14:hiddenLine xmlns="" xmlns:a14="http://schemas.microsoft.com/office/drawing/2010/main" w="9525">
                     <a:solidFill>
                       <a:srgbClr val="000000"/>
                     </a:solidFill>
@@ -10128,7 +10570,7 @@
               </a:ln>
               <a:extLst>
                 <a:ext uri="{91240B29-F687-4f45-9708-019B960494DF}">
-                  <a14:hiddenLine xmlns:a14="http://schemas.microsoft.com/office/drawing/2010/main" xmlns="" w="9525">
+                  <a14:hiddenLine xmlns="" xmlns:a14="http://schemas.microsoft.com/office/drawing/2010/main" w="9525">
                     <a:solidFill>
                       <a:srgbClr val="000000"/>
                     </a:solidFill>
@@ -10197,7 +10639,7 @@
               </a:ln>
               <a:extLst>
                 <a:ext uri="{91240B29-F687-4f45-9708-019B960494DF}">
-                  <a14:hiddenLine xmlns:a14="http://schemas.microsoft.com/office/drawing/2010/main" xmlns="" w="9525">
+                  <a14:hiddenLine xmlns="" xmlns:a14="http://schemas.microsoft.com/office/drawing/2010/main" w="9525">
                     <a:solidFill>
                       <a:srgbClr val="000000"/>
                     </a:solidFill>
@@ -10314,7 +10756,7 @@
               </a:ln>
               <a:extLst>
                 <a:ext uri="{91240B29-F687-4f45-9708-019B960494DF}">
-                  <a14:hiddenLine xmlns:a14="http://schemas.microsoft.com/office/drawing/2010/main" xmlns="" w="9525">
+                  <a14:hiddenLine xmlns="" xmlns:a14="http://schemas.microsoft.com/office/drawing/2010/main" w="9525">
                     <a:solidFill>
                       <a:srgbClr val="000000"/>
                     </a:solidFill>
@@ -10412,7 +10854,7 @@
               </a:ln>
               <a:extLst>
                 <a:ext uri="{91240B29-F687-4f45-9708-019B960494DF}">
-                  <a14:hiddenLine xmlns:a14="http://schemas.microsoft.com/office/drawing/2010/main" xmlns="" w="9525">
+                  <a14:hiddenLine xmlns="" xmlns:a14="http://schemas.microsoft.com/office/drawing/2010/main" w="9525">
                     <a:solidFill>
                       <a:srgbClr val="000000"/>
                     </a:solidFill>
@@ -10481,7 +10923,7 @@
               </a:ln>
               <a:extLst>
                 <a:ext uri="{91240B29-F687-4f45-9708-019B960494DF}">
-                  <a14:hiddenLine xmlns:a14="http://schemas.microsoft.com/office/drawing/2010/main" xmlns="" w="9525">
+                  <a14:hiddenLine xmlns="" xmlns:a14="http://schemas.microsoft.com/office/drawing/2010/main" w="9525">
                     <a:solidFill>
                       <a:srgbClr val="000000"/>
                     </a:solidFill>
@@ -10550,7 +10992,7 @@
               </a:ln>
               <a:extLst>
                 <a:ext uri="{91240B29-F687-4f45-9708-019B960494DF}">
-                  <a14:hiddenLine xmlns:a14="http://schemas.microsoft.com/office/drawing/2010/main" xmlns="" w="9525">
+                  <a14:hiddenLine xmlns="" xmlns:a14="http://schemas.microsoft.com/office/drawing/2010/main" w="9525">
                     <a:solidFill>
                       <a:srgbClr val="000000"/>
                     </a:solidFill>
@@ -10647,7 +11089,7 @@
               </a:ln>
               <a:extLst>
                 <a:ext uri="{91240B29-F687-4f45-9708-019B960494DF}">
-                  <a14:hiddenLine xmlns:a14="http://schemas.microsoft.com/office/drawing/2010/main" xmlns="" w="9525">
+                  <a14:hiddenLine xmlns="" xmlns:a14="http://schemas.microsoft.com/office/drawing/2010/main" w="9525">
                     <a:solidFill>
                       <a:srgbClr val="000000"/>
                     </a:solidFill>
@@ -10688,7 +11130,7 @@
               </a:ln>
               <a:extLst>
                 <a:ext uri="{91240B29-F687-4f45-9708-019B960494DF}">
-                  <a14:hiddenLine xmlns:a14="http://schemas.microsoft.com/office/drawing/2010/main" xmlns="" w="9525">
+                  <a14:hiddenLine xmlns="" xmlns:a14="http://schemas.microsoft.com/office/drawing/2010/main" w="9525">
                     <a:solidFill>
                       <a:srgbClr val="000000"/>
                     </a:solidFill>
@@ -10760,7 +11202,7 @@
               </a:ln>
               <a:extLst>
                 <a:ext uri="{91240B29-F687-4f45-9708-019B960494DF}">
-                  <a14:hiddenLine xmlns:a14="http://schemas.microsoft.com/office/drawing/2010/main" xmlns="" w="9525">
+                  <a14:hiddenLine xmlns="" xmlns:a14="http://schemas.microsoft.com/office/drawing/2010/main" w="9525">
                     <a:solidFill>
                       <a:srgbClr val="000000"/>
                     </a:solidFill>
@@ -10857,7 +11299,7 @@
               </a:ln>
               <a:extLst>
                 <a:ext uri="{91240B29-F687-4f45-9708-019B960494DF}">
-                  <a14:hiddenLine xmlns:a14="http://schemas.microsoft.com/office/drawing/2010/main" xmlns="" w="9525">
+                  <a14:hiddenLine xmlns="" xmlns:a14="http://schemas.microsoft.com/office/drawing/2010/main" w="9525">
                     <a:solidFill>
                       <a:srgbClr val="000000"/>
                     </a:solidFill>
@@ -10926,7 +11368,7 @@
               </a:ln>
               <a:extLst>
                 <a:ext uri="{91240B29-F687-4f45-9708-019B960494DF}">
-                  <a14:hiddenLine xmlns:a14="http://schemas.microsoft.com/office/drawing/2010/main" xmlns="" w="9525">
+                  <a14:hiddenLine xmlns="" xmlns:a14="http://schemas.microsoft.com/office/drawing/2010/main" w="9525">
                     <a:solidFill>
                       <a:srgbClr val="000000"/>
                     </a:solidFill>
@@ -11023,7 +11465,7 @@
               </a:ln>
               <a:extLst>
                 <a:ext uri="{91240B29-F687-4f45-9708-019B960494DF}">
-                  <a14:hiddenLine xmlns:a14="http://schemas.microsoft.com/office/drawing/2010/main" xmlns="" w="9525">
+                  <a14:hiddenLine xmlns="" xmlns:a14="http://schemas.microsoft.com/office/drawing/2010/main" w="9525">
                     <a:solidFill>
                       <a:srgbClr val="000000"/>
                     </a:solidFill>
@@ -11095,7 +11537,7 @@
               </a:ln>
               <a:extLst>
                 <a:ext uri="{91240B29-F687-4f45-9708-019B960494DF}">
-                  <a14:hiddenLine xmlns:a14="http://schemas.microsoft.com/office/drawing/2010/main" xmlns="" w="9525">
+                  <a14:hiddenLine xmlns="" xmlns:a14="http://schemas.microsoft.com/office/drawing/2010/main" w="9525">
                     <a:solidFill>
                       <a:srgbClr val="000000"/>
                     </a:solidFill>
@@ -11164,7 +11606,7 @@
               </a:ln>
               <a:extLst>
                 <a:ext uri="{91240B29-F687-4f45-9708-019B960494DF}">
-                  <a14:hiddenLine xmlns:a14="http://schemas.microsoft.com/office/drawing/2010/main" xmlns="" w="9525">
+                  <a14:hiddenLine xmlns="" xmlns:a14="http://schemas.microsoft.com/office/drawing/2010/main" w="9525">
                     <a:solidFill>
                       <a:srgbClr val="000000"/>
                     </a:solidFill>
@@ -11261,7 +11703,7 @@
               </a:ln>
               <a:extLst>
                 <a:ext uri="{91240B29-F687-4f45-9708-019B960494DF}">
-                  <a14:hiddenLine xmlns:a14="http://schemas.microsoft.com/office/drawing/2010/main" xmlns="" w="9525">
+                  <a14:hiddenLine xmlns="" xmlns:a14="http://schemas.microsoft.com/office/drawing/2010/main" w="9525">
                     <a:solidFill>
                       <a:srgbClr val="000000"/>
                     </a:solidFill>
@@ -11358,7 +11800,7 @@
               </a:ln>
               <a:extLst>
                 <a:ext uri="{91240B29-F687-4f45-9708-019B960494DF}">
-                  <a14:hiddenLine xmlns:a14="http://schemas.microsoft.com/office/drawing/2010/main" xmlns="" w="9525">
+                  <a14:hiddenLine xmlns="" xmlns:a14="http://schemas.microsoft.com/office/drawing/2010/main" w="9525">
                     <a:solidFill>
                       <a:srgbClr val="000000"/>
                     </a:solidFill>
@@ -11430,7 +11872,7 @@
               </a:ln>
               <a:extLst>
                 <a:ext uri="{91240B29-F687-4f45-9708-019B960494DF}">
-                  <a14:hiddenLine xmlns:a14="http://schemas.microsoft.com/office/drawing/2010/main" xmlns="" w="9525">
+                  <a14:hiddenLine xmlns="" xmlns:a14="http://schemas.microsoft.com/office/drawing/2010/main" w="9525">
                     <a:solidFill>
                       <a:srgbClr val="000000"/>
                     </a:solidFill>
@@ -11557,7 +11999,7 @@
               </a:ln>
               <a:extLst>
                 <a:ext uri="{91240B29-F687-4f45-9708-019B960494DF}">
-                  <a14:hiddenLine xmlns:a14="http://schemas.microsoft.com/office/drawing/2010/main" xmlns="" w="9525">
+                  <a14:hiddenLine xmlns="" xmlns:a14="http://schemas.microsoft.com/office/drawing/2010/main" w="9525">
                     <a:solidFill>
                       <a:srgbClr val="000000"/>
                     </a:solidFill>
@@ -11662,7 +12104,7 @@
               </a:ln>
               <a:extLst>
                 <a:ext uri="{91240B29-F687-4f45-9708-019B960494DF}">
-                  <a14:hiddenLine xmlns:a14="http://schemas.microsoft.com/office/drawing/2010/main" xmlns="" w="9525">
+                  <a14:hiddenLine xmlns="" xmlns:a14="http://schemas.microsoft.com/office/drawing/2010/main" w="9525">
                     <a:solidFill>
                       <a:srgbClr val="000000"/>
                     </a:solidFill>
@@ -11784,7 +12226,7 @@
               </a:ln>
               <a:extLst>
                 <a:ext uri="{91240B29-F687-4f45-9708-019B960494DF}">
-                  <a14:hiddenLine xmlns:a14="http://schemas.microsoft.com/office/drawing/2010/main" xmlns="" w="9525">
+                  <a14:hiddenLine xmlns="" xmlns:a14="http://schemas.microsoft.com/office/drawing/2010/main" w="9525">
                     <a:solidFill>
                       <a:srgbClr val="000000"/>
                     </a:solidFill>
@@ -11881,7 +12323,7 @@
               </a:ln>
               <a:extLst>
                 <a:ext uri="{91240B29-F687-4f45-9708-019B960494DF}">
-                  <a14:hiddenLine xmlns:a14="http://schemas.microsoft.com/office/drawing/2010/main" xmlns="" w="9525">
+                  <a14:hiddenLine xmlns="" xmlns:a14="http://schemas.microsoft.com/office/drawing/2010/main" w="9525">
                     <a:solidFill>
                       <a:srgbClr val="000000"/>
                     </a:solidFill>
@@ -11953,7 +12395,7 @@
               </a:ln>
               <a:extLst>
                 <a:ext uri="{91240B29-F687-4f45-9708-019B960494DF}">
-                  <a14:hiddenLine xmlns:a14="http://schemas.microsoft.com/office/drawing/2010/main" xmlns="" w="9525">
+                  <a14:hiddenLine xmlns="" xmlns:a14="http://schemas.microsoft.com/office/drawing/2010/main" w="9525">
                     <a:solidFill>
                       <a:srgbClr val="000000"/>
                     </a:solidFill>
@@ -12050,7 +12492,7 @@
               </a:ln>
               <a:extLst>
                 <a:ext uri="{91240B29-F687-4f45-9708-019B960494DF}">
-                  <a14:hiddenLine xmlns:a14="http://schemas.microsoft.com/office/drawing/2010/main" xmlns="" w="9525">
+                  <a14:hiddenLine xmlns="" xmlns:a14="http://schemas.microsoft.com/office/drawing/2010/main" w="9525">
                     <a:solidFill>
                       <a:srgbClr val="000000"/>
                     </a:solidFill>
@@ -12125,7 +12567,7 @@
               </a:ln>
               <a:extLst>
                 <a:ext uri="{91240B29-F687-4f45-9708-019B960494DF}">
-                  <a14:hiddenLine xmlns:a14="http://schemas.microsoft.com/office/drawing/2010/main" xmlns="" w="9525">
+                  <a14:hiddenLine xmlns="" xmlns:a14="http://schemas.microsoft.com/office/drawing/2010/main" w="9525">
                     <a:solidFill>
                       <a:srgbClr val="000000"/>
                     </a:solidFill>
@@ -12222,7 +12664,7 @@
               </a:ln>
               <a:extLst>
                 <a:ext uri="{91240B29-F687-4f45-9708-019B960494DF}">
-                  <a14:hiddenLine xmlns:a14="http://schemas.microsoft.com/office/drawing/2010/main" xmlns="" w="9525">
+                  <a14:hiddenLine xmlns="" xmlns:a14="http://schemas.microsoft.com/office/drawing/2010/main" w="9525">
                     <a:solidFill>
                       <a:srgbClr val="000000"/>
                     </a:solidFill>
@@ -12297,7 +12739,7 @@
               </a:ln>
               <a:extLst>
                 <a:ext uri="{91240B29-F687-4f45-9708-019B960494DF}">
-                  <a14:hiddenLine xmlns:a14="http://schemas.microsoft.com/office/drawing/2010/main" xmlns="" w="9525">
+                  <a14:hiddenLine xmlns="" xmlns:a14="http://schemas.microsoft.com/office/drawing/2010/main" w="9525">
                     <a:solidFill>
                       <a:srgbClr val="000000"/>
                     </a:solidFill>
@@ -12394,7 +12836,7 @@
               </a:ln>
               <a:extLst>
                 <a:ext uri="{91240B29-F687-4f45-9708-019B960494DF}">
-                  <a14:hiddenLine xmlns:a14="http://schemas.microsoft.com/office/drawing/2010/main" xmlns="" w="9525">
+                  <a14:hiddenLine xmlns="" xmlns:a14="http://schemas.microsoft.com/office/drawing/2010/main" w="9525">
                     <a:solidFill>
                       <a:srgbClr val="000000"/>
                     </a:solidFill>
@@ -12435,7 +12877,7 @@
               </a:ln>
               <a:extLst>
                 <a:ext uri="{91240B29-F687-4f45-9708-019B960494DF}">
-                  <a14:hiddenLine xmlns:a14="http://schemas.microsoft.com/office/drawing/2010/main" xmlns="" w="9525">
+                  <a14:hiddenLine xmlns="" xmlns:a14="http://schemas.microsoft.com/office/drawing/2010/main" w="9525">
                     <a:solidFill>
                       <a:srgbClr val="000000"/>
                     </a:solidFill>
@@ -12583,7 +13025,7 @@
             <a:fld id="{48A87A34-81AB-432B-8DAE-1953F412C126}" type="datetimeFigureOut">
               <a:rPr lang="en-US" dirty="0"/>
               <a:pPr/>
-              <a:t>11/16/2025</a:t>
+              <a:t>11/18/2025</a:t>
             </a:fld>
             <a:endParaRPr lang="en-US" dirty="0"/>
           </a:p>
@@ -13084,7 +13526,7 @@
         </p:nvSpPr>
         <p:spPr>
           <a:xfrm>
-            <a:off x="1886256" y="4378787"/>
+            <a:off x="2092733" y="4378787"/>
             <a:ext cx="8791575" cy="1655762"/>
           </a:xfrm>
         </p:spPr>
@@ -13188,10 +13630,45 @@
         </p:nvSpPr>
         <p:spPr/>
         <p:txBody>
-          <a:bodyPr/>
+          <a:bodyPr>
+            <a:normAutofit/>
+          </a:bodyPr>
           <a:lstStyle/>
           <a:p>
-            <a:endParaRPr lang="es-AR"/>
+            <a:r>
+              <a:rPr lang="es-AR" b="1" dirty="0">
+                <a:solidFill>
+                  <a:schemeClr val="accent3">
+                    <a:lumMod val="75000"/>
+                  </a:schemeClr>
+                </a:solidFill>
+              </a:rPr>
+              <a:t>Algoritmo clave: recursividad</a:t>
+            </a:r>
+            <a:br>
+              <a:rPr lang="es-AR" b="1" dirty="0">
+                <a:solidFill>
+                  <a:schemeClr val="accent3">
+                    <a:lumMod val="75000"/>
+                  </a:schemeClr>
+                </a:solidFill>
+              </a:rPr>
+            </a:br>
+            <a:r>
+              <a:rPr lang="es-AR" sz="1600" dirty="0">
+                <a:solidFill>
+                  <a:schemeClr val="bg1"/>
+                </a:solidFill>
+              </a:rPr>
+              <a:t>Motor de navegación para estructuras anidadas</a:t>
+            </a:r>
+            <a:br>
+              <a:rPr lang="es-AR" dirty="0"/>
+            </a:br>
+            <a:r>
+              <a:rPr lang="es-AR" dirty="0"/>
+              <a:t>	</a:t>
+            </a:r>
           </a:p>
         </p:txBody>
       </p:sp>
@@ -13213,10 +13690,102 @@
         </p:nvSpPr>
         <p:spPr/>
         <p:txBody>
-          <a:bodyPr/>
+          <a:bodyPr>
+            <a:normAutofit fontScale="85000" lnSpcReduction="20000"/>
+          </a:bodyPr>
           <a:lstStyle/>
           <a:p>
-            <a:endParaRPr lang="es-AR"/>
+            <a:pPr marL="0" indent="0">
+              <a:buNone/>
+            </a:pPr>
+            <a:r>
+              <a:rPr lang="es-AR" dirty="0">
+                <a:solidFill>
+                  <a:schemeClr val="bg1"/>
+                </a:solidFill>
+              </a:rPr>
+              <a:t>Permite procesar una jerarquía de carpetas de profundidad </a:t>
+            </a:r>
+            <a:r>
+              <a:rPr lang="es-ES" dirty="0">
+                <a:solidFill>
+                  <a:schemeClr val="bg1"/>
+                </a:solidFill>
+              </a:rPr>
+              <a:t> desconocida sin necesidad de bucles complejos.</a:t>
+            </a:r>
+          </a:p>
+          <a:p>
+            <a:pPr marL="0" indent="0">
+              <a:buNone/>
+            </a:pPr>
+            <a:endParaRPr lang="es-ES" dirty="0">
+              <a:solidFill>
+                <a:schemeClr val="bg1"/>
+              </a:solidFill>
+            </a:endParaRPr>
+          </a:p>
+          <a:p>
+            <a:pPr marL="0" indent="0">
+              <a:buNone/>
+            </a:pPr>
+            <a:r>
+              <a:rPr lang="es-ES" b="1" dirty="0">
+                <a:solidFill>
+                  <a:schemeClr val="accent3">
+                    <a:lumMod val="75000"/>
+                  </a:schemeClr>
+                </a:solidFill>
+              </a:rPr>
+              <a:t>Lógica “Divide y Vencerás” </a:t>
+            </a:r>
+          </a:p>
+          <a:p>
+            <a:pPr marL="0" indent="0">
+              <a:buNone/>
+            </a:pPr>
+            <a:r>
+              <a:rPr lang="es-ES" dirty="0">
+                <a:solidFill>
+                  <a:schemeClr val="bg1"/>
+                </a:solidFill>
+              </a:rPr>
+              <a:t>El problema global (buscar en todo el correo) se reduce a un problema pequeño (buscar en l carpeta actual y repetir)</a:t>
+            </a:r>
+          </a:p>
+          <a:p>
+            <a:pPr marL="0" indent="0">
+              <a:buNone/>
+            </a:pPr>
+            <a:r>
+              <a:rPr lang="es-ES" b="1" dirty="0">
+                <a:solidFill>
+                  <a:schemeClr val="accent3">
+                    <a:lumMod val="75000"/>
+                  </a:schemeClr>
+                </a:solidFill>
+              </a:rPr>
+              <a:t>Eficiencia de Código </a:t>
+            </a:r>
+          </a:p>
+          <a:p>
+            <a:pPr marL="0" indent="0">
+              <a:buNone/>
+            </a:pPr>
+            <a:r>
+              <a:rPr lang="es-ES" dirty="0">
+                <a:solidFill>
+                  <a:schemeClr val="bg1"/>
+                </a:solidFill>
+              </a:rPr>
+              <a:t>Reduce la complejidad del mantenimiento con una sola función que gestiona tanto la carpeta raíz como la subcarpeta más profunda. </a:t>
+            </a:r>
+          </a:p>
+          <a:p>
+            <a:pPr marL="0" indent="0">
+              <a:buNone/>
+            </a:pPr>
+            <a:endParaRPr lang="es-AR" dirty="0"/>
           </a:p>
         </p:txBody>
       </p:sp>
@@ -13266,12 +13835,68 @@
             <p:ph type="title"/>
           </p:nvPr>
         </p:nvSpPr>
-        <p:spPr/>
+        <p:spPr>
+          <a:xfrm>
+            <a:off x="1143001" y="634560"/>
+            <a:ext cx="9905998" cy="1478570"/>
+          </a:xfrm>
+        </p:spPr>
         <p:txBody>
-          <a:bodyPr/>
+          <a:bodyPr>
+            <a:normAutofit fontScale="90000"/>
+          </a:bodyPr>
           <a:lstStyle/>
           <a:p>
-            <a:endParaRPr lang="es-AR"/>
+            <a:r>
+              <a:rPr lang="es-AR" sz="4400" b="1" dirty="0">
+                <a:solidFill>
+                  <a:schemeClr val="accent3">
+                    <a:lumMod val="75000"/>
+                  </a:schemeClr>
+                </a:solidFill>
+              </a:rPr>
+              <a:t>Desafíos y soluciones I </a:t>
+            </a:r>
+            <a:br>
+              <a:rPr lang="es-AR" dirty="0">
+                <a:solidFill>
+                  <a:schemeClr val="accent3">
+                    <a:lumMod val="75000"/>
+                  </a:schemeClr>
+                </a:solidFill>
+              </a:rPr>
+            </a:br>
+            <a:r>
+              <a:rPr lang="es-ES" sz="1600" b="1" dirty="0">
+                <a:solidFill>
+                  <a:schemeClr val="bg1"/>
+                </a:solidFill>
+              </a:rPr>
+              <a:t>Riesgo de la Complejidad Lineal</a:t>
+            </a:r>
+            <a:br>
+              <a:rPr lang="es-ES" sz="1600" b="1" dirty="0">
+                <a:solidFill>
+                  <a:schemeClr val="bg1"/>
+                </a:solidFill>
+              </a:rPr>
+            </a:br>
+            <a:br>
+              <a:rPr lang="es-AR" dirty="0">
+                <a:solidFill>
+                  <a:schemeClr val="accent3">
+                    <a:lumMod val="75000"/>
+                  </a:schemeClr>
+                </a:solidFill>
+              </a:rPr>
+            </a:br>
+            <a:endParaRPr lang="es-AR" dirty="0">
+              <a:solidFill>
+                <a:schemeClr val="accent3">
+                  <a:lumMod val="75000"/>
+                </a:schemeClr>
+              </a:solidFill>
+            </a:endParaRPr>
           </a:p>
         </p:txBody>
       </p:sp>
@@ -13291,12 +13916,129 @@
             <p:ph idx="1"/>
           </p:nvPr>
         </p:nvSpPr>
-        <p:spPr/>
+        <p:spPr>
+          <a:xfrm>
+            <a:off x="1143001" y="2239654"/>
+            <a:ext cx="9905999" cy="3541714"/>
+          </a:xfrm>
+        </p:spPr>
         <p:txBody>
-          <a:bodyPr/>
+          <a:bodyPr>
+            <a:normAutofit fontScale="70000" lnSpcReduction="20000"/>
+          </a:bodyPr>
           <a:lstStyle/>
           <a:p>
-            <a:endParaRPr lang="es-AR"/>
+            <a:pPr marL="0" indent="0">
+              <a:buNone/>
+            </a:pPr>
+            <a:r>
+              <a:rPr lang="es-ES" b="1" dirty="0">
+                <a:solidFill>
+                  <a:schemeClr val="accent3">
+                    <a:lumMod val="75000"/>
+                  </a:schemeClr>
+                </a:solidFill>
+              </a:rPr>
+              <a:t>Riesgo Identificado (Árboles): </a:t>
+            </a:r>
+            <a:r>
+              <a:rPr lang="es-ES" dirty="0">
+                <a:solidFill>
+                  <a:schemeClr val="bg1"/>
+                </a:solidFill>
+              </a:rPr>
+              <a:t>Aunque el Árbol Binario de Búsqueda ofrece una complejidad , si los usuarios crean carpetas de forma secuencial (ej. siempre añadiendo al final), el árbol puede convertirse en una lista enlazada.</a:t>
+            </a:r>
+          </a:p>
+          <a:p>
+            <a:pPr marL="0" indent="0">
+              <a:buNone/>
+            </a:pPr>
+            <a:r>
+              <a:rPr lang="es-ES" b="1" dirty="0">
+                <a:solidFill>
+                  <a:schemeClr val="accent3">
+                    <a:lumMod val="75000"/>
+                  </a:schemeClr>
+                </a:solidFill>
+              </a:rPr>
+              <a:t>Consecuencia Crítica: </a:t>
+            </a:r>
+            <a:r>
+              <a:rPr lang="es-ES" dirty="0">
+                <a:solidFill>
+                  <a:schemeClr val="bg1"/>
+                </a:solidFill>
+              </a:rPr>
+              <a:t>Esto provoca que las operaciones de búsqueda de carpetas pasen a tener una complejidad lineal , volviendo el sistema lento e ineficiente a medida que aumenta el número de carpetas.</a:t>
+            </a:r>
+          </a:p>
+          <a:p>
+            <a:pPr marL="0" indent="0">
+              <a:buNone/>
+            </a:pPr>
+            <a:r>
+              <a:rPr lang="es-ES" b="1" dirty="0">
+                <a:solidFill>
+                  <a:schemeClr val="accent3">
+                    <a:lumMod val="75000"/>
+                  </a:schemeClr>
+                </a:solidFill>
+              </a:rPr>
+              <a:t>Solución Propuesta (Mitigación)</a:t>
+            </a:r>
+          </a:p>
+          <a:p>
+            <a:pPr marL="0" indent="0">
+              <a:buNone/>
+            </a:pPr>
+            <a:r>
+              <a:rPr lang="es-ES" b="1" dirty="0">
+                <a:solidFill>
+                  <a:schemeClr val="accent3">
+                    <a:lumMod val="75000"/>
+                  </a:schemeClr>
+                </a:solidFill>
+              </a:rPr>
+              <a:t>Estructuras Auto-Balanceadas: </a:t>
+            </a:r>
+            <a:r>
+              <a:rPr lang="es-ES" dirty="0">
+                <a:solidFill>
+                  <a:schemeClr val="bg1"/>
+                </a:solidFill>
+              </a:rPr>
+              <a:t>Para garantizar la eficiencia en el peor caso, la solución recomendada es migrar la estructura a un Árbol AVL o un Árbol Rojo-Negro.</a:t>
+            </a:r>
+          </a:p>
+          <a:p>
+            <a:pPr marL="0" indent="0">
+              <a:buNone/>
+            </a:pPr>
+            <a:r>
+              <a:rPr lang="es-ES" b="1" dirty="0">
+                <a:solidFill>
+                  <a:schemeClr val="accent3">
+                    <a:lumMod val="75000"/>
+                  </a:schemeClr>
+                </a:solidFill>
+              </a:rPr>
+              <a:t>Garantía de Rendimiento: </a:t>
+            </a:r>
+            <a:r>
+              <a:rPr lang="es-ES" dirty="0">
+                <a:solidFill>
+                  <a:schemeClr val="bg1"/>
+                </a:solidFill>
+              </a:rPr>
+              <a:t>Estas estructuras aseguran que la complejidad de las operaciones de búsqueda, inserción y eliminación se mantenga consistentemente en , independientemente del patrón de creación de carpetas por parte del usuario.</a:t>
+            </a:r>
+          </a:p>
+          <a:p>
+            <a:pPr marL="0" indent="0">
+              <a:buNone/>
+            </a:pPr>
+            <a:endParaRPr lang="es-AR" dirty="0"/>
           </a:p>
         </p:txBody>
       </p:sp>
@@ -13351,7 +14093,16 @@
           <a:bodyPr/>
           <a:lstStyle/>
           <a:p>
-            <a:endParaRPr lang="es-AR"/>
+            <a:r>
+              <a:rPr lang="es-AR" dirty="0">
+                <a:solidFill>
+                  <a:schemeClr val="accent3">
+                    <a:lumMod val="75000"/>
+                  </a:schemeClr>
+                </a:solidFill>
+              </a:rPr>
+              <a:t>Desafíos y soluciones II</a:t>
+            </a:r>
           </a:p>
         </p:txBody>
       </p:sp>
@@ -13373,10 +14124,204 @@
         </p:nvSpPr>
         <p:spPr/>
         <p:txBody>
-          <a:bodyPr/>
+          <a:bodyPr>
+            <a:normAutofit fontScale="62500" lnSpcReduction="20000"/>
+          </a:bodyPr>
           <a:lstStyle/>
           <a:p>
-            <a:endParaRPr lang="es-AR"/>
+            <a:pPr marL="0" indent="0">
+              <a:buNone/>
+            </a:pPr>
+            <a:r>
+              <a:rPr lang="es-ES" b="1" dirty="0">
+                <a:solidFill>
+                  <a:schemeClr val="accent3">
+                    <a:lumMod val="75000"/>
+                  </a:schemeClr>
+                </a:solidFill>
+              </a:rPr>
+              <a:t>Desafío del Flujo de Mensajes:</a:t>
+            </a:r>
+            <a:r>
+              <a:rPr lang="es-ES" dirty="0">
+                <a:solidFill>
+                  <a:schemeClr val="accent3">
+                    <a:lumMod val="75000"/>
+                  </a:schemeClr>
+                </a:solidFill>
+              </a:rPr>
+              <a:t> </a:t>
+            </a:r>
+            <a:r>
+              <a:rPr lang="es-ES" dirty="0">
+                <a:solidFill>
+                  <a:schemeClr val="bg1"/>
+                </a:solidFill>
+              </a:rPr>
+              <a:t>Necesidad de que los mensajes críticos interrumpan la cola normal para ser procesados inmediatamente, respetando la regla FIFO entre iguales.</a:t>
+            </a:r>
+          </a:p>
+          <a:p>
+            <a:pPr marL="0" indent="0">
+              <a:buNone/>
+            </a:pPr>
+            <a:r>
+              <a:rPr lang="es-ES" b="1" dirty="0">
+                <a:solidFill>
+                  <a:schemeClr val="accent3">
+                    <a:lumMod val="75000"/>
+                  </a:schemeClr>
+                </a:solidFill>
+              </a:rPr>
+              <a:t>Solución (Heap):</a:t>
+            </a:r>
+            <a:r>
+              <a:rPr lang="es-ES" dirty="0">
+                <a:solidFill>
+                  <a:schemeClr val="accent3">
+                    <a:lumMod val="75000"/>
+                  </a:schemeClr>
+                </a:solidFill>
+              </a:rPr>
+              <a:t> </a:t>
+            </a:r>
+            <a:r>
+              <a:rPr lang="es-ES" dirty="0">
+                <a:solidFill>
+                  <a:schemeClr val="bg1"/>
+                </a:solidFill>
+              </a:rPr>
+              <a:t>Uso del Heap de Prioridad Mínima. La estructura gestiona la urgencia automáticamente, permitiendo la extracción rápida del mensaje más importante.</a:t>
+            </a:r>
+          </a:p>
+          <a:p>
+            <a:pPr marL="0" indent="0">
+              <a:buNone/>
+            </a:pPr>
+            <a:r>
+              <a:rPr lang="es-ES" b="1" dirty="0">
+                <a:solidFill>
+                  <a:schemeClr val="accent3">
+                    <a:lumMod val="75000"/>
+                  </a:schemeClr>
+                </a:solidFill>
+              </a:rPr>
+              <a:t>Desafío de la Búsqueda Exhaustiva:</a:t>
+            </a:r>
+            <a:r>
+              <a:rPr lang="es-ES" dirty="0">
+                <a:solidFill>
+                  <a:schemeClr val="accent3">
+                    <a:lumMod val="75000"/>
+                  </a:schemeClr>
+                </a:solidFill>
+              </a:rPr>
+              <a:t> </a:t>
+            </a:r>
+            <a:r>
+              <a:rPr lang="es-ES" dirty="0">
+                <a:solidFill>
+                  <a:schemeClr val="bg1"/>
+                </a:solidFill>
+              </a:rPr>
+              <a:t>Necesidad de buscar mensajes en toda la jerarquía de carpetas de un usuario sin perder ningún mensaje.</a:t>
+            </a:r>
+          </a:p>
+          <a:p>
+            <a:pPr marL="0" indent="0">
+              <a:buNone/>
+            </a:pPr>
+            <a:r>
+              <a:rPr lang="es-ES" b="1" dirty="0">
+                <a:solidFill>
+                  <a:schemeClr val="accent3">
+                    <a:lumMod val="75000"/>
+                  </a:schemeClr>
+                </a:solidFill>
+              </a:rPr>
+              <a:t>Solución (Recursividad/DFS):</a:t>
+            </a:r>
+            <a:r>
+              <a:rPr lang="es-ES" dirty="0">
+                <a:solidFill>
+                  <a:schemeClr val="accent3">
+                    <a:lumMod val="75000"/>
+                  </a:schemeClr>
+                </a:solidFill>
+              </a:rPr>
+              <a:t> </a:t>
+            </a:r>
+            <a:r>
+              <a:rPr lang="es-ES" dirty="0">
+                <a:solidFill>
+                  <a:schemeClr val="bg1"/>
+                </a:solidFill>
+              </a:rPr>
+              <a:t>Implementación de la recursividad en la clase Carpeta y uso del DFS (Búsqueda en Profundidad) para recorrer todo el Árbol de forma completa y segura.</a:t>
+            </a:r>
+          </a:p>
+          <a:p>
+            <a:pPr marL="0" indent="0">
+              <a:buNone/>
+            </a:pPr>
+            <a:r>
+              <a:rPr lang="es-ES" b="1" dirty="0">
+                <a:solidFill>
+                  <a:schemeClr val="accent3">
+                    <a:lumMod val="75000"/>
+                  </a:schemeClr>
+                </a:solidFill>
+              </a:rPr>
+              <a:t>Desafío de Enrutamiento:</a:t>
+            </a:r>
+            <a:r>
+              <a:rPr lang="es-ES" dirty="0"/>
+              <a:t> </a:t>
+            </a:r>
+            <a:r>
+              <a:rPr lang="es-ES" dirty="0">
+                <a:solidFill>
+                  <a:schemeClr val="bg1"/>
+                </a:solidFill>
+              </a:rPr>
+              <a:t>Necesidad de organizar la bandeja de entrada del usuario de forma automática para mensajes conocidos.</a:t>
+            </a:r>
+          </a:p>
+          <a:p>
+            <a:pPr marL="0" indent="0">
+              <a:buNone/>
+            </a:pPr>
+            <a:r>
+              <a:rPr lang="es-ES" b="1" dirty="0">
+                <a:solidFill>
+                  <a:schemeClr val="accent3">
+                    <a:lumMod val="75000"/>
+                  </a:schemeClr>
+                </a:solidFill>
+              </a:rPr>
+              <a:t>Solución (Filtros):</a:t>
+            </a:r>
+            <a:r>
+              <a:rPr lang="es-ES" dirty="0">
+                <a:solidFill>
+                  <a:schemeClr val="accent3">
+                    <a:lumMod val="75000"/>
+                  </a:schemeClr>
+                </a:solidFill>
+              </a:rPr>
+              <a:t> </a:t>
+            </a:r>
+            <a:r>
+              <a:rPr lang="es-ES" dirty="0">
+                <a:solidFill>
+                  <a:schemeClr val="bg1"/>
+                </a:solidFill>
+              </a:rPr>
+              <a:t>Implementación de la clase Filtro y la lógica de enrutamiento, usando un criterio lambda para redirigir mensajes a la carpeta destino tras la recepción.</a:t>
+            </a:r>
+          </a:p>
+          <a:p>
+            <a:endParaRPr lang="es-AR" dirty="0"/>
           </a:p>
         </p:txBody>
       </p:sp>
@@ -13428,10 +14373,44 @@
         </p:nvSpPr>
         <p:spPr/>
         <p:txBody>
-          <a:bodyPr/>
+          <a:bodyPr>
+            <a:normAutofit/>
+          </a:bodyPr>
           <a:lstStyle/>
           <a:p>
-            <a:endParaRPr lang="es-AR"/>
+            <a:r>
+              <a:rPr lang="es-AR" sz="4400" b="1" dirty="0">
+                <a:solidFill>
+                  <a:schemeClr val="accent3">
+                    <a:lumMod val="75000"/>
+                  </a:schemeClr>
+                </a:solidFill>
+              </a:rPr>
+              <a:t>Validación de Estructuras: Heap</a:t>
+            </a:r>
+            <a:br>
+              <a:rPr lang="es-AR" b="1" dirty="0"/>
+            </a:br>
+            <a:r>
+              <a:rPr lang="es-AR" sz="1600" dirty="0">
+                <a:solidFill>
+                  <a:schemeClr val="bg1"/>
+                </a:solidFill>
+              </a:rPr>
+              <a:t>Verificación unitaria de la cola de prioridad y orden fifo</a:t>
+            </a:r>
+            <a:br>
+              <a:rPr lang="es-AR" sz="1600" dirty="0">
+                <a:solidFill>
+                  <a:schemeClr val="bg1"/>
+                </a:solidFill>
+              </a:rPr>
+            </a:br>
+            <a:endParaRPr lang="es-AR" sz="1600" dirty="0">
+              <a:solidFill>
+                <a:schemeClr val="bg1"/>
+              </a:solidFill>
+            </a:endParaRPr>
           </a:p>
         </p:txBody>
       </p:sp>
@@ -13453,10 +14432,130 @@
         </p:nvSpPr>
         <p:spPr/>
         <p:txBody>
-          <a:bodyPr/>
+          <a:bodyPr>
+            <a:normAutofit fontScale="92500" lnSpcReduction="10000"/>
+          </a:bodyPr>
           <a:lstStyle/>
           <a:p>
-            <a:endParaRPr lang="es-AR"/>
+            <a:pPr marL="0" indent="0">
+              <a:buNone/>
+            </a:pPr>
+            <a:r>
+              <a:rPr lang="es-AR" b="1" dirty="0">
+                <a:solidFill>
+                  <a:schemeClr val="accent3">
+                    <a:lumMod val="75000"/>
+                  </a:schemeClr>
+                </a:solidFill>
+              </a:rPr>
+              <a:t>Caso: Prioridad Mixta</a:t>
+            </a:r>
+            <a:endParaRPr lang="es-ES" b="1" dirty="0">
+              <a:solidFill>
+                <a:schemeClr val="accent3">
+                  <a:lumMod val="75000"/>
+                </a:schemeClr>
+              </a:solidFill>
+            </a:endParaRPr>
+          </a:p>
+          <a:p>
+            <a:pPr marL="0" indent="0">
+              <a:buNone/>
+            </a:pPr>
+            <a:r>
+              <a:rPr lang="es-ES" dirty="0">
+                <a:solidFill>
+                  <a:schemeClr val="bg1"/>
+                </a:solidFill>
+              </a:rPr>
+              <a:t>Se simuló la llegada de mensajes con prioridades {5, 1, 3}.</a:t>
+            </a:r>
+            <a:br>
+              <a:rPr lang="es-ES" dirty="0"/>
+            </a:br>
+            <a:r>
+              <a:rPr lang="es-ES" b="1" dirty="0">
+                <a:solidFill>
+                  <a:schemeClr val="bg1"/>
+                </a:solidFill>
+              </a:rPr>
+              <a:t>Resultado Esperado: </a:t>
+            </a:r>
+            <a:r>
+              <a:rPr lang="es-ES" dirty="0">
+                <a:solidFill>
+                  <a:schemeClr val="bg1"/>
+                </a:solidFill>
+              </a:rPr>
+              <a:t>Extracción en orden {1, 3, 5}.</a:t>
+            </a:r>
+            <a:br>
+              <a:rPr lang="es-ES" dirty="0"/>
+            </a:br>
+            <a:r>
+              <a:rPr lang="es-ES" b="1" dirty="0">
+                <a:solidFill>
+                  <a:schemeClr val="bg1"/>
+                </a:solidFill>
+              </a:rPr>
+              <a:t>Resultado Obtenido: </a:t>
+            </a:r>
+            <a:r>
+              <a:rPr lang="es-ES" dirty="0">
+                <a:solidFill>
+                  <a:schemeClr val="bg1"/>
+                </a:solidFill>
+              </a:rPr>
+              <a:t>El Heap reordenó correctamente la salida.</a:t>
+            </a:r>
+          </a:p>
+          <a:p>
+            <a:pPr marL="0" indent="0">
+              <a:buNone/>
+            </a:pPr>
+            <a:r>
+              <a:rPr lang="es-AR" b="1" dirty="0">
+                <a:solidFill>
+                  <a:schemeClr val="accent3">
+                    <a:lumMod val="75000"/>
+                  </a:schemeClr>
+                </a:solidFill>
+              </a:rPr>
+              <a:t>Caso: Empate de Prioridad</a:t>
+            </a:r>
+          </a:p>
+          <a:p>
+            <a:pPr marL="0" indent="0">
+              <a:buNone/>
+            </a:pPr>
+            <a:r>
+              <a:rPr lang="es-ES" dirty="0">
+                <a:solidFill>
+                  <a:schemeClr val="bg1"/>
+                </a:solidFill>
+              </a:rPr>
+              <a:t>Se enviaron 3 mensajes urgentes (Prioridad 1) consecutivos.</a:t>
+            </a:r>
+            <a:br>
+              <a:rPr lang="es-ES" dirty="0">
+                <a:solidFill>
+                  <a:schemeClr val="bg1"/>
+                </a:solidFill>
+              </a:rPr>
+            </a:br>
+            <a:r>
+              <a:rPr lang="es-ES" dirty="0">
+                <a:solidFill>
+                  <a:schemeClr val="bg1"/>
+                </a:solidFill>
+              </a:rPr>
+              <a:t>Validación: Se confirmó que se respeta estrictamente el orden de llegada (FIFO) dentro del mismo nivel de prioridad.</a:t>
+            </a:r>
+            <a:endParaRPr lang="es-AR" dirty="0">
+              <a:solidFill>
+                <a:schemeClr val="bg1"/>
+              </a:solidFill>
+            </a:endParaRPr>
           </a:p>
         </p:txBody>
       </p:sp>
@@ -13476,6 +14575,30 @@
 <file path=ppt/slides/slide14.xml><?xml version="1.0" encoding="utf-8"?>
 <p:sld xmlns:a="http://schemas.openxmlformats.org/drawingml/2006/main" xmlns:r="http://schemas.openxmlformats.org/officeDocument/2006/relationships" xmlns:p="http://schemas.openxmlformats.org/presentationml/2006/main">
   <p:cSld>
+    <p:bg>
+      <p:bgPr>
+        <a:blipFill>
+          <a:blip r:embed="rId2">
+            <a:duotone>
+              <a:schemeClr val="bg2">
+                <a:shade val="88000"/>
+                <a:hueMod val="106000"/>
+                <a:satMod val="140000"/>
+                <a:lumMod val="54000"/>
+              </a:schemeClr>
+              <a:schemeClr val="bg2">
+                <a:tint val="98000"/>
+                <a:hueMod val="90000"/>
+                <a:satMod val="150000"/>
+                <a:lumMod val="160000"/>
+              </a:schemeClr>
+            </a:duotone>
+          </a:blip>
+          <a:stretch/>
+        </a:blipFill>
+        <a:effectLst/>
+      </p:bgPr>
+    </p:bg>
     <p:spTree>
       <p:nvGrpSpPr>
         <p:cNvPr id="1" name=""/>
@@ -13506,12 +14629,43 @@
             <p:ph type="title"/>
           </p:nvPr>
         </p:nvSpPr>
-        <p:spPr/>
+        <p:spPr>
+          <a:xfrm>
+            <a:off x="1141412" y="507986"/>
+            <a:ext cx="9905998" cy="1478570"/>
+          </a:xfrm>
+        </p:spPr>
         <p:txBody>
-          <a:bodyPr/>
+          <a:bodyPr>
+            <a:normAutofit/>
+          </a:bodyPr>
           <a:lstStyle/>
           <a:p>
-            <a:endParaRPr lang="es-AR"/>
+            <a:r>
+              <a:rPr lang="es-AR" sz="4400" b="1" dirty="0">
+                <a:solidFill>
+                  <a:schemeClr val="accent3">
+                    <a:lumMod val="75000"/>
+                  </a:schemeClr>
+                </a:solidFill>
+              </a:rPr>
+              <a:t>Validación de Integración</a:t>
+            </a:r>
+            <a:br>
+              <a:rPr lang="es-AR" sz="2800" b="1" dirty="0"/>
+            </a:br>
+            <a:r>
+              <a:rPr lang="es-ES" sz="1400" dirty="0">
+                <a:solidFill>
+                  <a:schemeClr val="bg1"/>
+                </a:solidFill>
+              </a:rPr>
+              <a:t>Pruebas de recursividad y flujo completo del sistema</a:t>
+            </a:r>
+            <a:br>
+              <a:rPr lang="es-AR" sz="2800" b="1" dirty="0"/>
+            </a:br>
+            <a:endParaRPr lang="es-AR" sz="2800" dirty="0"/>
           </a:p>
         </p:txBody>
       </p:sp>
@@ -13531,15 +14685,102 @@
             <p:ph idx="1"/>
           </p:nvPr>
         </p:nvSpPr>
-        <p:spPr/>
+        <p:spPr>
+          <a:xfrm>
+            <a:off x="1141412" y="2642715"/>
+            <a:ext cx="3772231" cy="1999623"/>
+          </a:xfrm>
+        </p:spPr>
         <p:txBody>
-          <a:bodyPr/>
+          <a:bodyPr anchor="ctr">
+            <a:normAutofit fontScale="85000" lnSpcReduction="10000"/>
+          </a:bodyPr>
           <a:lstStyle/>
           <a:p>
-            <a:endParaRPr lang="es-AR"/>
+            <a:pPr marL="0" indent="0">
+              <a:buNone/>
+            </a:pPr>
+            <a:r>
+              <a:rPr lang="es-ES" dirty="0">
+                <a:solidFill>
+                  <a:schemeClr val="bg1"/>
+                </a:solidFill>
+              </a:rPr>
+              <a:t>Confirma que la recursividad no rompe la integridad de los datos.</a:t>
+            </a:r>
+          </a:p>
+          <a:p>
+            <a:pPr marL="0" indent="0">
+              <a:buNone/>
+            </a:pPr>
+            <a:r>
+              <a:rPr lang="es-ES" dirty="0">
+                <a:solidFill>
+                  <a:schemeClr val="bg1"/>
+                </a:solidFill>
+              </a:rPr>
+              <a:t>Verifica la creación dinámica de carpetas de destino si no existen.</a:t>
+            </a:r>
+          </a:p>
+          <a:p>
+            <a:pPr marL="0" indent="0">
+              <a:buNone/>
+            </a:pPr>
+            <a:endParaRPr lang="es-ES" b="1" dirty="0"/>
           </a:p>
         </p:txBody>
       </p:sp>
+      <p:pic>
+        <p:nvPicPr>
+          <p:cNvPr id="5" name="Imagen 4">
+            <a:extLst>
+              <a:ext uri="{FF2B5EF4-FFF2-40B4-BE49-F238E27FC236}">
+                <a16:creationId xmlns:a16="http://schemas.microsoft.com/office/drawing/2014/main" id="{7D279742-5B4F-8DD2-2AED-7137FEEBB8C6}"/>
+              </a:ext>
+            </a:extLst>
+          </p:cNvPr>
+          <p:cNvPicPr>
+            <a:picLocks noChangeAspect="1"/>
+          </p:cNvPicPr>
+          <p:nvPr/>
+        </p:nvPicPr>
+        <p:blipFill>
+          <a:blip r:embed="rId3"/>
+          <a:srcRect r="27455" b="3"/>
+          <a:stretch>
+            <a:fillRect/>
+          </a:stretch>
+        </p:blipFill>
+        <p:spPr>
+          <a:xfrm>
+            <a:off x="6167598" y="2205242"/>
+            <a:ext cx="4655075" cy="3047892"/>
+          </a:xfrm>
+          <a:prstGeom prst="round2DiagRect">
+            <a:avLst>
+              <a:gd name="adj1" fmla="val 4860"/>
+              <a:gd name="adj2" fmla="val 0"/>
+            </a:avLst>
+          </a:prstGeom>
+          <a:ln w="19050" cap="sq">
+            <a:solidFill>
+              <a:schemeClr val="tx2">
+                <a:lumMod val="60000"/>
+                <a:lumOff val="40000"/>
+                <a:alpha val="60000"/>
+              </a:schemeClr>
+            </a:solidFill>
+            <a:miter lim="800000"/>
+          </a:ln>
+          <a:effectLst>
+            <a:outerShdw blurRad="88900" dist="38100" dir="5400000" algn="t" rotWithShape="0">
+              <a:prstClr val="black">
+                <a:alpha val="40000"/>
+              </a:prstClr>
+            </a:outerShdw>
+          </a:effectLst>
+        </p:spPr>
+      </p:pic>
     </p:spTree>
     <p:extLst>
       <p:ext uri="{BB962C8B-B14F-4D97-AF65-F5344CB8AC3E}">
@@ -13588,10 +14829,36 @@
         </p:nvSpPr>
         <p:spPr/>
         <p:txBody>
-          <a:bodyPr/>
+          <a:bodyPr>
+            <a:normAutofit/>
+          </a:bodyPr>
           <a:lstStyle/>
           <a:p>
-            <a:endParaRPr lang="es-AR"/>
+            <a:r>
+              <a:rPr lang="es-AR" sz="4400" b="1" dirty="0">
+                <a:solidFill>
+                  <a:schemeClr val="accent3">
+                    <a:lumMod val="75000"/>
+                  </a:schemeClr>
+                </a:solidFill>
+              </a:rPr>
+              <a:t>Conclusiones Generales</a:t>
+            </a:r>
+            <a:br>
+              <a:rPr lang="es-AR" b="1" dirty="0"/>
+            </a:br>
+            <a:r>
+              <a:rPr lang="es-AR" sz="1600" dirty="0">
+                <a:solidFill>
+                  <a:schemeClr val="bg1"/>
+                </a:solidFill>
+              </a:rPr>
+              <a:t>resumen de logros técnicos y cumplimiento de objetivos.</a:t>
+            </a:r>
+            <a:br>
+              <a:rPr lang="es-AR" b="1" dirty="0"/>
+            </a:br>
+            <a:endParaRPr lang="es-AR" dirty="0"/>
           </a:p>
         </p:txBody>
       </p:sp>
@@ -13613,10 +14880,108 @@
         </p:nvSpPr>
         <p:spPr/>
         <p:txBody>
-          <a:bodyPr/>
+          <a:bodyPr>
+            <a:normAutofit fontScale="85000" lnSpcReduction="20000"/>
+          </a:bodyPr>
           <a:lstStyle/>
           <a:p>
-            <a:endParaRPr lang="es-AR"/>
+            <a:pPr marL="0" indent="0">
+              <a:buNone/>
+            </a:pPr>
+            <a:r>
+              <a:rPr lang="es-AR" b="1" dirty="0">
+                <a:solidFill>
+                  <a:schemeClr val="accent3">
+                    <a:lumMod val="75000"/>
+                  </a:schemeClr>
+                </a:solidFill>
+              </a:rPr>
+              <a:t>Dominio de estructuras:</a:t>
+            </a:r>
+          </a:p>
+          <a:p>
+            <a:pPr marL="0" indent="0">
+              <a:buNone/>
+            </a:pPr>
+            <a:r>
+              <a:rPr lang="es-ES" dirty="0">
+                <a:solidFill>
+                  <a:schemeClr val="bg1"/>
+                </a:solidFill>
+              </a:rPr>
+              <a:t>Se demostró la aplicación exitosa de Árboles para jerarquías complejas y Heaps para la gestión de prioridades, yendo más allá de la teoría.</a:t>
+            </a:r>
+          </a:p>
+          <a:p>
+            <a:pPr marL="0" indent="0">
+              <a:buNone/>
+            </a:pPr>
+            <a:r>
+              <a:rPr lang="es-AR" b="1" dirty="0">
+                <a:solidFill>
+                  <a:schemeClr val="accent3">
+                    <a:lumMod val="75000"/>
+                  </a:schemeClr>
+                </a:solidFill>
+              </a:rPr>
+              <a:t>Eficiencia Logarítmica:</a:t>
+            </a:r>
+          </a:p>
+          <a:p>
+            <a:pPr marL="0" indent="0">
+              <a:buNone/>
+            </a:pPr>
+            <a:r>
+              <a:rPr lang="es-ES" dirty="0">
+                <a:solidFill>
+                  <a:schemeClr val="bg1"/>
+                </a:solidFill>
+              </a:rPr>
+              <a:t>Se cumplió el objetivo de rendimiento: las operaciones críticas (búsqueda y gestión de urgencia) mantienen una complejidad de O(log n) asegurando escalabilidad.</a:t>
+            </a:r>
+          </a:p>
+          <a:p>
+            <a:pPr marL="0" indent="0">
+              <a:buNone/>
+            </a:pPr>
+            <a:r>
+              <a:rPr lang="es-AR" b="1" dirty="0">
+                <a:solidFill>
+                  <a:schemeClr val="accent3">
+                    <a:lumMod val="75000"/>
+                  </a:schemeClr>
+                </a:solidFill>
+              </a:rPr>
+              <a:t>Integración Robusta</a:t>
+            </a:r>
+            <a:r>
+              <a:rPr lang="es-ES" b="1" dirty="0">
+                <a:solidFill>
+                  <a:schemeClr val="accent3">
+                    <a:lumMod val="75000"/>
+                  </a:schemeClr>
+                </a:solidFill>
+              </a:rPr>
+              <a:t>:</a:t>
+            </a:r>
+          </a:p>
+          <a:p>
+            <a:pPr marL="0" indent="0">
+              <a:buNone/>
+            </a:pPr>
+            <a:r>
+              <a:rPr lang="es-ES" dirty="0">
+                <a:solidFill>
+                  <a:schemeClr val="bg1"/>
+                </a:solidFill>
+              </a:rPr>
+              <a:t>La implementación de algoritmos recursivos (DFS) y filtros automáticos permitió integrar las estructuras en un sistema funcional y modular.</a:t>
+            </a:r>
+            <a:endParaRPr lang="es-AR" dirty="0">
+              <a:solidFill>
+                <a:schemeClr val="bg1"/>
+              </a:solidFill>
+            </a:endParaRPr>
           </a:p>
         </p:txBody>
       </p:sp>
@@ -13671,7 +15036,21 @@
           <a:bodyPr/>
           <a:lstStyle/>
           <a:p>
-            <a:endParaRPr lang="es-AR"/>
+            <a:pPr algn="ctr"/>
+            <a:r>
+              <a:rPr lang="es-AR" sz="4800" b="1" dirty="0">
+                <a:solidFill>
+                  <a:schemeClr val="accent3">
+                    <a:lumMod val="75000"/>
+                  </a:schemeClr>
+                </a:solidFill>
+              </a:rPr>
+              <a:t>¡Muchas Gracias!</a:t>
+            </a:r>
+            <a:br>
+              <a:rPr lang="es-AR" b="1" dirty="0"/>
+            </a:br>
+            <a:endParaRPr lang="es-AR" dirty="0"/>
           </a:p>
         </p:txBody>
       </p:sp>
@@ -13696,254 +15075,120 @@
           <a:bodyPr/>
           <a:lstStyle/>
           <a:p>
-            <a:endParaRPr lang="es-AR"/>
+            <a:pPr marL="0" indent="0" algn="ctr">
+              <a:buNone/>
+            </a:pPr>
+            <a:r>
+              <a:rPr lang="es-ES" dirty="0">
+                <a:solidFill>
+                  <a:schemeClr val="bg1"/>
+                </a:solidFill>
+              </a:rPr>
+              <a:t>Estamos a disposición para responder sus preguntas.</a:t>
+            </a:r>
+          </a:p>
+          <a:p>
+            <a:pPr marL="0" indent="0">
+              <a:buNone/>
+            </a:pPr>
+            <a:endParaRPr lang="es-ES" dirty="0">
+              <a:solidFill>
+                <a:schemeClr val="bg1"/>
+              </a:solidFill>
+            </a:endParaRPr>
+          </a:p>
+          <a:p>
+            <a:pPr marL="0" indent="0">
+              <a:buNone/>
+            </a:pPr>
+            <a:r>
+              <a:rPr lang="es-ES" dirty="0"/>
+              <a:t> </a:t>
+            </a:r>
+          </a:p>
+          <a:p>
+            <a:pPr marL="0" indent="0">
+              <a:buNone/>
+            </a:pPr>
+            <a:endParaRPr lang="es-ES" dirty="0"/>
+          </a:p>
+          <a:p>
+            <a:pPr marL="0" indent="0">
+              <a:buNone/>
+            </a:pPr>
+            <a:endParaRPr lang="es-ES" dirty="0"/>
+          </a:p>
+          <a:p>
+            <a:pPr marL="0" indent="0" algn="ctr">
+              <a:buNone/>
+            </a:pPr>
+            <a:r>
+              <a:rPr lang="es-ES" dirty="0">
+                <a:solidFill>
+                  <a:schemeClr val="bg1"/>
+                </a:solidFill>
+              </a:rPr>
+              <a:t>     TP Integrador - 2025     &lt;/&gt;Estructuras de Datos </a:t>
+            </a:r>
+          </a:p>
+          <a:p>
+            <a:pPr marL="0" indent="0">
+              <a:buNone/>
+            </a:pPr>
+            <a:endParaRPr lang="es-ES" dirty="0">
+              <a:solidFill>
+                <a:schemeClr val="bg1"/>
+              </a:solidFill>
+            </a:endParaRPr>
+          </a:p>
+          <a:p>
+            <a:pPr marL="0" indent="0">
+              <a:buNone/>
+            </a:pPr>
+            <a:endParaRPr lang="es-AR" dirty="0"/>
           </a:p>
         </p:txBody>
       </p:sp>
+      <p:pic>
+        <p:nvPicPr>
+          <p:cNvPr id="6" name="Gráfico 5" descr="Correo electrónico con relleno sólido">
+            <a:extLst>
+              <a:ext uri="{FF2B5EF4-FFF2-40B4-BE49-F238E27FC236}">
+                <a16:creationId xmlns:a16="http://schemas.microsoft.com/office/drawing/2014/main" id="{A2B52BB8-7F18-4AD8-BDBA-3EB412BF4AAE}"/>
+              </a:ext>
+            </a:extLst>
+          </p:cNvPr>
+          <p:cNvPicPr>
+            <a:picLocks noChangeAspect="1"/>
+          </p:cNvPicPr>
+          <p:nvPr/>
+        </p:nvPicPr>
+        <p:blipFill>
+          <a:blip r:embed="rId2">
+            <a:extLst>
+              <a:ext uri="{96DAC541-7B7A-43D3-8B79-37D633B846F1}">
+                <asvg:svgBlip xmlns:asvg="http://schemas.microsoft.com/office/drawing/2016/SVG/main" r:embed="rId3"/>
+              </a:ext>
+            </a:extLst>
+          </a:blip>
+          <a:stretch>
+            <a:fillRect/>
+          </a:stretch>
+        </p:blipFill>
+        <p:spPr>
+          <a:xfrm>
+            <a:off x="2910403" y="5152725"/>
+            <a:ext cx="344156" cy="344156"/>
+          </a:xfrm>
+          <a:prstGeom prst="rect">
+            <a:avLst/>
+          </a:prstGeom>
+        </p:spPr>
+      </p:pic>
     </p:spTree>
     <p:extLst>
       <p:ext uri="{BB962C8B-B14F-4D97-AF65-F5344CB8AC3E}">
         <p14:creationId xmlns:p14="http://schemas.microsoft.com/office/powerpoint/2010/main" val="3797782229"/>
-      </p:ext>
-    </p:extLst>
-  </p:cSld>
-  <p:clrMapOvr>
-    <a:masterClrMapping/>
-  </p:clrMapOvr>
-</p:sld>
-</file>
-
-<file path=ppt/slides/slide17.xml><?xml version="1.0" encoding="utf-8"?>
-<p:sld xmlns:a="http://schemas.openxmlformats.org/drawingml/2006/main" xmlns:r="http://schemas.openxmlformats.org/officeDocument/2006/relationships" xmlns:p="http://schemas.openxmlformats.org/presentationml/2006/main">
-  <p:cSld>
-    <p:spTree>
-      <p:nvGrpSpPr>
-        <p:cNvPr id="1" name=""/>
-        <p:cNvGrpSpPr/>
-        <p:nvPr/>
-      </p:nvGrpSpPr>
-      <p:grpSpPr>
-        <a:xfrm>
-          <a:off x="0" y="0"/>
-          <a:ext cx="0" cy="0"/>
-          <a:chOff x="0" y="0"/>
-          <a:chExt cx="0" cy="0"/>
-        </a:xfrm>
-      </p:grpSpPr>
-      <p:sp>
-        <p:nvSpPr>
-          <p:cNvPr id="2" name="Título 1">
-            <a:extLst>
-              <a:ext uri="{FF2B5EF4-FFF2-40B4-BE49-F238E27FC236}">
-                <a16:creationId xmlns:a16="http://schemas.microsoft.com/office/drawing/2014/main" id="{DEC48206-CDF8-C475-172A-2EBC792C57B6}"/>
-              </a:ext>
-            </a:extLst>
-          </p:cNvPr>
-          <p:cNvSpPr>
-            <a:spLocks noGrp="1"/>
-          </p:cNvSpPr>
-          <p:nvPr>
-            <p:ph type="title"/>
-          </p:nvPr>
-        </p:nvSpPr>
-        <p:spPr/>
-        <p:txBody>
-          <a:bodyPr/>
-          <a:lstStyle/>
-          <a:p>
-            <a:endParaRPr lang="es-AR"/>
-          </a:p>
-        </p:txBody>
-      </p:sp>
-      <p:sp>
-        <p:nvSpPr>
-          <p:cNvPr id="3" name="Marcador de contenido 2">
-            <a:extLst>
-              <a:ext uri="{FF2B5EF4-FFF2-40B4-BE49-F238E27FC236}">
-                <a16:creationId xmlns:a16="http://schemas.microsoft.com/office/drawing/2014/main" id="{929205EA-9F01-2B14-6C98-244C31AD8F74}"/>
-              </a:ext>
-            </a:extLst>
-          </p:cNvPr>
-          <p:cNvSpPr>
-            <a:spLocks noGrp="1"/>
-          </p:cNvSpPr>
-          <p:nvPr>
-            <p:ph idx="1"/>
-          </p:nvPr>
-        </p:nvSpPr>
-        <p:spPr/>
-        <p:txBody>
-          <a:bodyPr/>
-          <a:lstStyle/>
-          <a:p>
-            <a:endParaRPr lang="es-AR"/>
-          </a:p>
-        </p:txBody>
-      </p:sp>
-    </p:spTree>
-    <p:extLst>
-      <p:ext uri="{BB962C8B-B14F-4D97-AF65-F5344CB8AC3E}">
-        <p14:creationId xmlns:p14="http://schemas.microsoft.com/office/powerpoint/2010/main" val="3518232468"/>
-      </p:ext>
-    </p:extLst>
-  </p:cSld>
-  <p:clrMapOvr>
-    <a:masterClrMapping/>
-  </p:clrMapOvr>
-</p:sld>
-</file>
-
-<file path=ppt/slides/slide18.xml><?xml version="1.0" encoding="utf-8"?>
-<p:sld xmlns:a="http://schemas.openxmlformats.org/drawingml/2006/main" xmlns:r="http://schemas.openxmlformats.org/officeDocument/2006/relationships" xmlns:p="http://schemas.openxmlformats.org/presentationml/2006/main">
-  <p:cSld>
-    <p:spTree>
-      <p:nvGrpSpPr>
-        <p:cNvPr id="1" name=""/>
-        <p:cNvGrpSpPr/>
-        <p:nvPr/>
-      </p:nvGrpSpPr>
-      <p:grpSpPr>
-        <a:xfrm>
-          <a:off x="0" y="0"/>
-          <a:ext cx="0" cy="0"/>
-          <a:chOff x="0" y="0"/>
-          <a:chExt cx="0" cy="0"/>
-        </a:xfrm>
-      </p:grpSpPr>
-      <p:sp>
-        <p:nvSpPr>
-          <p:cNvPr id="2" name="Título 1">
-            <a:extLst>
-              <a:ext uri="{FF2B5EF4-FFF2-40B4-BE49-F238E27FC236}">
-                <a16:creationId xmlns:a16="http://schemas.microsoft.com/office/drawing/2014/main" id="{5226CCDD-F492-B256-6184-A8F23B735FE0}"/>
-              </a:ext>
-            </a:extLst>
-          </p:cNvPr>
-          <p:cNvSpPr>
-            <a:spLocks noGrp="1"/>
-          </p:cNvSpPr>
-          <p:nvPr>
-            <p:ph type="title"/>
-          </p:nvPr>
-        </p:nvSpPr>
-        <p:spPr/>
-        <p:txBody>
-          <a:bodyPr/>
-          <a:lstStyle/>
-          <a:p>
-            <a:endParaRPr lang="es-AR"/>
-          </a:p>
-        </p:txBody>
-      </p:sp>
-      <p:sp>
-        <p:nvSpPr>
-          <p:cNvPr id="3" name="Marcador de contenido 2">
-            <a:extLst>
-              <a:ext uri="{FF2B5EF4-FFF2-40B4-BE49-F238E27FC236}">
-                <a16:creationId xmlns:a16="http://schemas.microsoft.com/office/drawing/2014/main" id="{2DE14971-C6F1-315B-4D01-7B2EF49ADCF8}"/>
-              </a:ext>
-            </a:extLst>
-          </p:cNvPr>
-          <p:cNvSpPr>
-            <a:spLocks noGrp="1"/>
-          </p:cNvSpPr>
-          <p:nvPr>
-            <p:ph idx="1"/>
-          </p:nvPr>
-        </p:nvSpPr>
-        <p:spPr/>
-        <p:txBody>
-          <a:bodyPr/>
-          <a:lstStyle/>
-          <a:p>
-            <a:endParaRPr lang="es-AR"/>
-          </a:p>
-        </p:txBody>
-      </p:sp>
-    </p:spTree>
-    <p:extLst>
-      <p:ext uri="{BB962C8B-B14F-4D97-AF65-F5344CB8AC3E}">
-        <p14:creationId xmlns:p14="http://schemas.microsoft.com/office/powerpoint/2010/main" val="2100196625"/>
-      </p:ext>
-    </p:extLst>
-  </p:cSld>
-  <p:clrMapOvr>
-    <a:masterClrMapping/>
-  </p:clrMapOvr>
-</p:sld>
-</file>
-
-<file path=ppt/slides/slide19.xml><?xml version="1.0" encoding="utf-8"?>
-<p:sld xmlns:a="http://schemas.openxmlformats.org/drawingml/2006/main" xmlns:r="http://schemas.openxmlformats.org/officeDocument/2006/relationships" xmlns:p="http://schemas.openxmlformats.org/presentationml/2006/main">
-  <p:cSld>
-    <p:spTree>
-      <p:nvGrpSpPr>
-        <p:cNvPr id="1" name=""/>
-        <p:cNvGrpSpPr/>
-        <p:nvPr/>
-      </p:nvGrpSpPr>
-      <p:grpSpPr>
-        <a:xfrm>
-          <a:off x="0" y="0"/>
-          <a:ext cx="0" cy="0"/>
-          <a:chOff x="0" y="0"/>
-          <a:chExt cx="0" cy="0"/>
-        </a:xfrm>
-      </p:grpSpPr>
-      <p:sp>
-        <p:nvSpPr>
-          <p:cNvPr id="2" name="Título 1">
-            <a:extLst>
-              <a:ext uri="{FF2B5EF4-FFF2-40B4-BE49-F238E27FC236}">
-                <a16:creationId xmlns:a16="http://schemas.microsoft.com/office/drawing/2014/main" id="{ACA7D2AC-7F3B-A292-0310-AE1B081A6028}"/>
-              </a:ext>
-            </a:extLst>
-          </p:cNvPr>
-          <p:cNvSpPr>
-            <a:spLocks noGrp="1"/>
-          </p:cNvSpPr>
-          <p:nvPr>
-            <p:ph type="title"/>
-          </p:nvPr>
-        </p:nvSpPr>
-        <p:spPr/>
-        <p:txBody>
-          <a:bodyPr/>
-          <a:lstStyle/>
-          <a:p>
-            <a:endParaRPr lang="es-AR"/>
-          </a:p>
-        </p:txBody>
-      </p:sp>
-      <p:sp>
-        <p:nvSpPr>
-          <p:cNvPr id="3" name="Marcador de contenido 2">
-            <a:extLst>
-              <a:ext uri="{FF2B5EF4-FFF2-40B4-BE49-F238E27FC236}">
-                <a16:creationId xmlns:a16="http://schemas.microsoft.com/office/drawing/2014/main" id="{EBCB3592-E7DB-0B36-6A06-4CBF44C8B765}"/>
-              </a:ext>
-            </a:extLst>
-          </p:cNvPr>
-          <p:cNvSpPr>
-            <a:spLocks noGrp="1"/>
-          </p:cNvSpPr>
-          <p:nvPr>
-            <p:ph idx="1"/>
-          </p:nvPr>
-        </p:nvSpPr>
-        <p:spPr/>
-        <p:txBody>
-          <a:bodyPr/>
-          <a:lstStyle/>
-          <a:p>
-            <a:endParaRPr lang="es-AR"/>
-          </a:p>
-        </p:txBody>
-      </p:sp>
-    </p:spTree>
-    <p:extLst>
-      <p:ext uri="{BB962C8B-B14F-4D97-AF65-F5344CB8AC3E}">
-        <p14:creationId xmlns:p14="http://schemas.microsoft.com/office/powerpoint/2010/main" val="891299788"/>
       </p:ext>
     </p:extLst>
   </p:cSld>
@@ -14189,86 +15434,6 @@
 </p:sld>
 </file>
 
-<file path=ppt/slides/slide20.xml><?xml version="1.0" encoding="utf-8"?>
-<p:sld xmlns:a="http://schemas.openxmlformats.org/drawingml/2006/main" xmlns:r="http://schemas.openxmlformats.org/officeDocument/2006/relationships" xmlns:p="http://schemas.openxmlformats.org/presentationml/2006/main">
-  <p:cSld>
-    <p:spTree>
-      <p:nvGrpSpPr>
-        <p:cNvPr id="1" name=""/>
-        <p:cNvGrpSpPr/>
-        <p:nvPr/>
-      </p:nvGrpSpPr>
-      <p:grpSpPr>
-        <a:xfrm>
-          <a:off x="0" y="0"/>
-          <a:ext cx="0" cy="0"/>
-          <a:chOff x="0" y="0"/>
-          <a:chExt cx="0" cy="0"/>
-        </a:xfrm>
-      </p:grpSpPr>
-      <p:sp>
-        <p:nvSpPr>
-          <p:cNvPr id="2" name="Título 1">
-            <a:extLst>
-              <a:ext uri="{FF2B5EF4-FFF2-40B4-BE49-F238E27FC236}">
-                <a16:creationId xmlns:a16="http://schemas.microsoft.com/office/drawing/2014/main" id="{18A2CEAD-9571-6010-96CD-16B2A4DB0025}"/>
-              </a:ext>
-            </a:extLst>
-          </p:cNvPr>
-          <p:cNvSpPr>
-            <a:spLocks noGrp="1"/>
-          </p:cNvSpPr>
-          <p:nvPr>
-            <p:ph type="title"/>
-          </p:nvPr>
-        </p:nvSpPr>
-        <p:spPr/>
-        <p:txBody>
-          <a:bodyPr/>
-          <a:lstStyle/>
-          <a:p>
-            <a:endParaRPr lang="es-AR"/>
-          </a:p>
-        </p:txBody>
-      </p:sp>
-      <p:sp>
-        <p:nvSpPr>
-          <p:cNvPr id="3" name="Marcador de contenido 2">
-            <a:extLst>
-              <a:ext uri="{FF2B5EF4-FFF2-40B4-BE49-F238E27FC236}">
-                <a16:creationId xmlns:a16="http://schemas.microsoft.com/office/drawing/2014/main" id="{0B205B3A-35AE-8E23-43D3-8791CDF3903E}"/>
-              </a:ext>
-            </a:extLst>
-          </p:cNvPr>
-          <p:cNvSpPr>
-            <a:spLocks noGrp="1"/>
-          </p:cNvSpPr>
-          <p:nvPr>
-            <p:ph idx="1"/>
-          </p:nvPr>
-        </p:nvSpPr>
-        <p:spPr/>
-        <p:txBody>
-          <a:bodyPr/>
-          <a:lstStyle/>
-          <a:p>
-            <a:endParaRPr lang="es-AR"/>
-          </a:p>
-        </p:txBody>
-      </p:sp>
-    </p:spTree>
-    <p:extLst>
-      <p:ext uri="{BB962C8B-B14F-4D97-AF65-F5344CB8AC3E}">
-        <p14:creationId xmlns:p14="http://schemas.microsoft.com/office/powerpoint/2010/main" val="1945968711"/>
-      </p:ext>
-    </p:extLst>
-  </p:cSld>
-  <p:clrMapOvr>
-    <a:masterClrMapping/>
-  </p:clrMapOvr>
-</p:sld>
-</file>
-
 <file path=ppt/slides/slide3.xml><?xml version="1.0" encoding="utf-8"?>
 <p:sld xmlns:a="http://schemas.openxmlformats.org/drawingml/2006/main" xmlns:r="http://schemas.openxmlformats.org/officeDocument/2006/relationships" xmlns:p="http://schemas.openxmlformats.org/presentationml/2006/main">
   <p:cSld>
@@ -14808,7 +15973,24 @@
           <a:bodyPr/>
           <a:lstStyle/>
           <a:p>
-            <a:endParaRPr lang="es-AR"/>
+            <a:r>
+              <a:rPr lang="es-AR" sz="4400" b="1" dirty="0">
+                <a:solidFill>
+                  <a:schemeClr val="accent3">
+                    <a:lumMod val="75000"/>
+                  </a:schemeClr>
+                </a:solidFill>
+              </a:rPr>
+              <a:t>Arquitectura del sistema</a:t>
+            </a:r>
+            <a:r>
+              <a:rPr lang="es-AR" b="1" dirty="0"/>
+              <a:t>	</a:t>
+            </a:r>
+            <a:br>
+              <a:rPr lang="es-AR" b="1" dirty="0"/>
+            </a:br>
+            <a:endParaRPr lang="es-AR" dirty="0"/>
           </a:p>
         </p:txBody>
       </p:sp>
@@ -14830,10 +16012,114 @@
         </p:nvSpPr>
         <p:spPr/>
         <p:txBody>
-          <a:bodyPr/>
+          <a:bodyPr>
+            <a:normAutofit fontScale="92500" lnSpcReduction="10000"/>
+          </a:bodyPr>
           <a:lstStyle/>
           <a:p>
-            <a:endParaRPr lang="es-AR"/>
+            <a:pPr marL="0" indent="0">
+              <a:buNone/>
+            </a:pPr>
+            <a:r>
+              <a:rPr lang="es-ES" b="1" dirty="0">
+                <a:solidFill>
+                  <a:schemeClr val="accent3">
+                    <a:lumMod val="75000"/>
+                  </a:schemeClr>
+                </a:solidFill>
+              </a:rPr>
+              <a:t>ServidorCorreo: </a:t>
+            </a:r>
+            <a:r>
+              <a:rPr lang="es-ES" dirty="0">
+                <a:solidFill>
+                  <a:schemeClr val="bg1"/>
+                </a:solidFill>
+              </a:rPr>
+              <a:t>actúa como núcleo central del sistema, centralizando el registro de usuarios, la autenticación y el enrutamiento de mensajes.</a:t>
+            </a:r>
+          </a:p>
+          <a:p>
+            <a:pPr marL="0" indent="0">
+              <a:buNone/>
+            </a:pPr>
+            <a:r>
+              <a:rPr lang="es-ES" b="1" dirty="0">
+                <a:solidFill>
+                  <a:schemeClr val="accent3">
+                    <a:lumMod val="75000"/>
+                  </a:schemeClr>
+                </a:solidFill>
+              </a:rPr>
+              <a:t>Usuario: </a:t>
+            </a:r>
+            <a:r>
+              <a:rPr lang="es-ES" dirty="0">
+                <a:solidFill>
+                  <a:schemeClr val="bg1"/>
+                </a:solidFill>
+              </a:rPr>
+              <a:t>Representa a cada usuario registrado, donde se van a alojar las distintas carpetas de mensajes </a:t>
+            </a:r>
+          </a:p>
+          <a:p>
+            <a:pPr marL="0" indent="0">
+              <a:buNone/>
+            </a:pPr>
+            <a:r>
+              <a:rPr lang="es-ES" b="1" dirty="0">
+                <a:solidFill>
+                  <a:schemeClr val="accent3">
+                    <a:lumMod val="75000"/>
+                  </a:schemeClr>
+                </a:solidFill>
+              </a:rPr>
+              <a:t>Mensaje:</a:t>
+            </a:r>
+            <a:r>
+              <a:rPr lang="es-ES" dirty="0">
+                <a:solidFill>
+                  <a:schemeClr val="accent3">
+                    <a:lumMod val="75000"/>
+                  </a:schemeClr>
+                </a:solidFill>
+              </a:rPr>
+              <a:t> </a:t>
+            </a:r>
+            <a:r>
+              <a:rPr lang="es-ES" dirty="0">
+                <a:solidFill>
+                  <a:schemeClr val="bg1"/>
+                </a:solidFill>
+              </a:rPr>
+              <a:t>Actúa como una clase inmutable con  atributos necesarios  del objeto para que las estructuras de datos y los algoritmos funciones, excluyendo el cuerpo de texto.</a:t>
+            </a:r>
+          </a:p>
+          <a:p>
+            <a:pPr marL="0" indent="0">
+              <a:buNone/>
+            </a:pPr>
+            <a:r>
+              <a:rPr lang="es-ES" b="1" dirty="0">
+                <a:solidFill>
+                  <a:schemeClr val="accent3">
+                    <a:lumMod val="75000"/>
+                  </a:schemeClr>
+                </a:solidFill>
+              </a:rPr>
+              <a:t>Algorithms: </a:t>
+            </a:r>
+            <a:r>
+              <a:rPr lang="es-ES" dirty="0">
+                <a:solidFill>
+                  <a:schemeClr val="bg1"/>
+                </a:solidFill>
+              </a:rPr>
+              <a:t>Reúne las utilidades para  la búsqueda recursiva, recorridos (DFS/BFS) y ordenamiento.</a:t>
+            </a:r>
+          </a:p>
+          <a:p>
+            <a:endParaRPr lang="es-AR" dirty="0"/>
           </a:p>
         </p:txBody>
       </p:sp>
@@ -14853,6 +16139,30 @@
 <file path=ppt/slides/slide6.xml><?xml version="1.0" encoding="utf-8"?>
 <p:sld xmlns:a="http://schemas.openxmlformats.org/drawingml/2006/main" xmlns:r="http://schemas.openxmlformats.org/officeDocument/2006/relationships" xmlns:p="http://schemas.openxmlformats.org/presentationml/2006/main">
   <p:cSld>
+    <p:bg>
+      <p:bgPr>
+        <a:blipFill>
+          <a:blip r:embed="rId2">
+            <a:duotone>
+              <a:schemeClr val="bg2">
+                <a:shade val="88000"/>
+                <a:hueMod val="106000"/>
+                <a:satMod val="140000"/>
+                <a:lumMod val="54000"/>
+              </a:schemeClr>
+              <a:schemeClr val="bg2">
+                <a:tint val="98000"/>
+                <a:hueMod val="90000"/>
+                <a:satMod val="150000"/>
+                <a:lumMod val="160000"/>
+              </a:schemeClr>
+            </a:duotone>
+          </a:blip>
+          <a:stretch/>
+        </a:blipFill>
+        <a:effectLst/>
+      </p:bgPr>
+    </p:bg>
     <p:spTree>
       <p:nvGrpSpPr>
         <p:cNvPr id="1" name=""/>
@@ -14867,6 +16177,123 @@
           <a:chExt cx="0" cy="0"/>
         </a:xfrm>
       </p:grpSpPr>
+      <p:sp useBgFill="1">
+        <p:nvSpPr>
+          <p:cNvPr id="68" name="Rectangle 11">
+            <a:extLst>
+              <a:ext uri="{FF2B5EF4-FFF2-40B4-BE49-F238E27FC236}">
+                <a16:creationId xmlns:a16="http://schemas.microsoft.com/office/drawing/2014/main" id="{C2E4E997-8672-4FFD-B8EC-9932A8E4714B}"/>
+              </a:ext>
+              <a:ext uri="{C183D7F6-B498-43B3-948B-1728B52AA6E4}">
+                <adec:decorative xmlns:adec="http://schemas.microsoft.com/office/drawing/2017/decorative" val="1"/>
+              </a:ext>
+            </a:extLst>
+          </p:cNvPr>
+          <p:cNvSpPr>
+            <a:spLocks noGrp="1" noRot="1" noChangeAspect="1" noMove="1" noResize="1" noEditPoints="1" noAdjustHandles="1" noChangeArrowheads="1" noChangeShapeType="1" noTextEdit="1"/>
+          </p:cNvSpPr>
+          <p:nvPr>
+            <p:extLst>
+              <p:ext uri="{386F3935-93C4-4BCD-93E2-E3B085C9AB24}">
+                <p16:designElem xmlns:p16="http://schemas.microsoft.com/office/powerpoint/2015/main" val="1"/>
+              </p:ext>
+            </p:extLst>
+          </p:nvPr>
+        </p:nvSpPr>
+        <p:spPr>
+          <a:xfrm>
+            <a:off x="0" y="0"/>
+            <a:ext cx="12192000" cy="6858000"/>
+          </a:xfrm>
+          <a:prstGeom prst="rect">
+            <a:avLst/>
+          </a:prstGeom>
+          <a:ln>
+            <a:noFill/>
+          </a:ln>
+        </p:spPr>
+        <p:style>
+          <a:lnRef idx="2">
+            <a:schemeClr val="accent1">
+              <a:shade val="50000"/>
+            </a:schemeClr>
+          </a:lnRef>
+          <a:fillRef idx="1003">
+            <a:schemeClr val="dk2"/>
+          </a:fillRef>
+          <a:effectRef idx="0">
+            <a:schemeClr val="accent1"/>
+          </a:effectRef>
+          <a:fontRef idx="minor">
+            <a:schemeClr val="lt1"/>
+          </a:fontRef>
+        </p:style>
+        <p:txBody>
+          <a:bodyPr rtlCol="0" anchor="ctr"/>
+          <a:lstStyle/>
+          <a:p>
+            <a:pPr algn="ctr"/>
+            <a:endParaRPr lang="en-US"/>
+          </a:p>
+        </p:txBody>
+      </p:sp>
+      <p:pic>
+        <p:nvPicPr>
+          <p:cNvPr id="69" name="Picture 2">
+            <a:extLst>
+              <a:ext uri="{FF2B5EF4-FFF2-40B4-BE49-F238E27FC236}">
+                <a16:creationId xmlns:a16="http://schemas.microsoft.com/office/drawing/2014/main" id="{FE6BA9E6-1D9E-4D30-B528-D49FA1342E4E}"/>
+              </a:ext>
+              <a:ext uri="{C183D7F6-B498-43B3-948B-1728B52AA6E4}">
+                <adec:decorative xmlns:adec="http://schemas.microsoft.com/office/drawing/2017/decorative" val="1"/>
+              </a:ext>
+            </a:extLst>
+          </p:cNvPr>
+          <p:cNvPicPr>
+            <a:picLocks noGrp="1" noRot="1" noChangeAspect="1" noMove="1" noResize="1" noEditPoints="1" noAdjustHandles="1" noChangeArrowheads="1" noChangeShapeType="1" noCrop="1"/>
+          </p:cNvPicPr>
+          <p:nvPr>
+            <p:extLst>
+              <p:ext uri="{386F3935-93C4-4BCD-93E2-E3B085C9AB24}">
+                <p16:designElem xmlns:p16="http://schemas.microsoft.com/office/powerpoint/2015/main" val="1"/>
+              </p:ext>
+            </p:extLst>
+          </p:nvPr>
+        </p:nvPicPr>
+        <p:blipFill>
+          <a:blip r:embed="rId3">
+            <a:alphaModFix amt="30000"/>
+            <a:extLst>
+              <a:ext uri="{28A0092B-C50C-407E-A947-70E740481C1C}">
+                <a14:useLocalDpi xmlns:a14="http://schemas.microsoft.com/office/drawing/2010/main" val="0"/>
+              </a:ext>
+            </a:extLst>
+          </a:blip>
+          <a:srcRect/>
+          <a:stretch>
+            <a:fillRect/>
+          </a:stretch>
+        </p:blipFill>
+        <p:spPr bwMode="auto">
+          <a:xfrm>
+            <a:off x="0" y="0"/>
+            <a:ext cx="12192003" cy="6858001"/>
+          </a:xfrm>
+          <a:prstGeom prst="rect">
+            <a:avLst/>
+          </a:prstGeom>
+          <a:noFill/>
+          <a:extLst>
+            <a:ext uri="{909E8E84-426E-40dd-AFC4-6F175D3DCCD1}">
+              <a14:hiddenFill xmlns="" xmlns:a16="http://schemas.microsoft.com/office/drawing/2014/main" xmlns:p14="http://schemas.microsoft.com/office/powerpoint/2010/main" xmlns:a14="http://schemas.microsoft.com/office/drawing/2010/main">
+                <a:solidFill>
+                  <a:srgbClr val="FFFFFF"/>
+                </a:solidFill>
+              </a14:hiddenFill>
+            </a:ext>
+          </a:extLst>
+        </p:spPr>
+      </p:pic>
       <p:sp>
         <p:nvSpPr>
           <p:cNvPr id="2" name="Título 1">
@@ -14883,37 +16310,4204 @@
             <p:ph type="title"/>
           </p:nvPr>
         </p:nvSpPr>
-        <p:spPr/>
+        <p:spPr>
+          <a:xfrm>
+            <a:off x="1250158" y="105577"/>
+            <a:ext cx="4459286" cy="1478570"/>
+          </a:xfrm>
+        </p:spPr>
         <p:txBody>
-          <a:bodyPr/>
+          <a:bodyPr vert="horz" lIns="91440" tIns="45720" rIns="91440" bIns="45720" rtlCol="0" anchor="ctr">
+            <a:normAutofit/>
+          </a:bodyPr>
           <a:lstStyle/>
           <a:p>
-            <a:endParaRPr lang="es-AR"/>
+            <a:r>
+              <a:rPr lang="en-US" sz="4000" b="1" dirty="0">
+                <a:solidFill>
+                  <a:schemeClr val="accent3">
+                    <a:lumMod val="75000"/>
+                  </a:schemeClr>
+                </a:solidFill>
+              </a:rPr>
+              <a:t>modularización</a:t>
+            </a:r>
           </a:p>
         </p:txBody>
       </p:sp>
       <p:sp>
         <p:nvSpPr>
-          <p:cNvPr id="3" name="Marcador de contenido 2">
+          <p:cNvPr id="7" name="Rectangle 2">
             <a:extLst>
               <a:ext uri="{FF2B5EF4-FFF2-40B4-BE49-F238E27FC236}">
-                <a16:creationId xmlns:a16="http://schemas.microsoft.com/office/drawing/2014/main" id="{21A3C995-D6B5-BB70-FCCC-7BF5C7BBE2EC}"/>
+                <a16:creationId xmlns:a16="http://schemas.microsoft.com/office/drawing/2014/main" id="{5D9275BE-58EE-80E8-6775-898F39E03CB1}"/>
               </a:ext>
             </a:extLst>
           </p:cNvPr>
           <p:cNvSpPr>
-            <a:spLocks noGrp="1"/>
+            <a:spLocks noChangeArrowheads="1"/>
           </p:cNvSpPr>
+          <p:nvPr/>
+        </p:nvSpPr>
+        <p:spPr bwMode="auto">
+          <a:xfrm>
+            <a:off x="1077913" y="2227528"/>
+            <a:ext cx="4459287" cy="3965046"/>
+          </a:xfrm>
+          <a:prstGeom prst="rect">
+            <a:avLst/>
+          </a:prstGeom>
+          <a:extLst>
+            <a:ext uri="{909E8E84-426E-40DD-AFC4-6F175D3DCCD1}">
+              <a14:hiddenFill xmlns:a14="http://schemas.microsoft.com/office/drawing/2010/main">
+                <a:solidFill>
+                  <a:schemeClr val="accent1"/>
+                </a:solidFill>
+              </a14:hiddenFill>
+            </a:ext>
+            <a:ext uri="{91240B29-F687-4F45-9708-019B960494DF}">
+              <a14:hiddenLine xmlns:a14="http://schemas.microsoft.com/office/drawing/2010/main" w="9525">
+                <a:solidFill>
+                  <a:schemeClr val="tx1"/>
+                </a:solidFill>
+                <a:miter lim="800000"/>
+                <a:headEnd/>
+                <a:tailEnd/>
+              </a14:hiddenLine>
+            </a:ext>
+            <a:ext uri="{AF507438-7753-43E0-B8FC-AC1667EBCBE1}">
+              <a14:hiddenEffects xmlns:a14="http://schemas.microsoft.com/office/drawing/2010/main">
+                <a:effectLst>
+                  <a:outerShdw dist="35921" dir="2700000" algn="ctr" rotWithShape="0">
+                    <a:schemeClr val="bg2"/>
+                  </a:outerShdw>
+                </a:effectLst>
+              </a14:hiddenEffects>
+            </a:ext>
+          </a:extLst>
+        </p:spPr>
+        <p:txBody>
+          <a:bodyPr vert="horz" lIns="91440" tIns="45720" rIns="91440" bIns="45720" numCol="1" rtlCol="0" anchorCtr="0" compatLnSpc="1">
+            <a:prstTxWarp prst="textNoShape">
+              <a:avLst/>
+            </a:prstTxWarp>
+            <a:normAutofit lnSpcReduction="10000"/>
+          </a:bodyPr>
+          <a:lstStyle/>
+          <a:p>
+            <a:pPr marR="0" lvl="0" defTabSz="914400" fontAlgn="base">
+              <a:lnSpc>
+                <a:spcPct val="110000"/>
+              </a:lnSpc>
+              <a:spcBef>
+                <a:spcPct val="0"/>
+              </a:spcBef>
+              <a:spcAft>
+                <a:spcPts val="600"/>
+              </a:spcAft>
+              <a:buClrTx/>
+              <a:buSzPct val="125000"/>
+              <a:tabLst/>
+            </a:pPr>
+            <a:r>
+              <a:rPr kumimoji="0" lang="en-US" altLang="es-AR" b="1" i="0" u="none" strike="noStrike" cap="none" normalizeH="0" baseline="0" dirty="0">
+                <a:ln>
+                  <a:noFill/>
+                </a:ln>
+                <a:solidFill>
+                  <a:schemeClr val="accent3">
+                    <a:lumMod val="75000"/>
+                  </a:schemeClr>
+                </a:solidFill>
+                <a:effectLst/>
+              </a:rPr>
+              <a:t>Relaciones de la Estructura</a:t>
+            </a:r>
+          </a:p>
+          <a:p>
+            <a:pPr marR="0" lvl="0" defTabSz="914400" fontAlgn="base">
+              <a:lnSpc>
+                <a:spcPct val="110000"/>
+              </a:lnSpc>
+              <a:spcBef>
+                <a:spcPct val="0"/>
+              </a:spcBef>
+              <a:spcAft>
+                <a:spcPts val="600"/>
+              </a:spcAft>
+              <a:buClrTx/>
+              <a:buSzPct val="125000"/>
+              <a:tabLst/>
+            </a:pPr>
+            <a:r>
+              <a:rPr kumimoji="0" lang="en-US" altLang="es-AR" i="0" u="none" strike="noStrike" cap="none" normalizeH="0" baseline="0" dirty="0">
+                <a:ln>
+                  <a:noFill/>
+                </a:ln>
+                <a:solidFill>
+                  <a:schemeClr val="bg1"/>
+                </a:solidFill>
+                <a:effectLst/>
+              </a:rPr>
+              <a:t>Composición Jerárquica: El Usuario contiene la estructura de Árbol mediante la anidación </a:t>
+            </a:r>
+            <a:r>
+              <a:rPr kumimoji="0" lang="en-US" altLang="es-AR" i="0" u="none" strike="noStrike" cap="none" normalizeH="0" baseline="0" dirty="0" err="1">
+                <a:ln>
+                  <a:noFill/>
+                </a:ln>
+                <a:solidFill>
+                  <a:schemeClr val="bg1"/>
+                </a:solidFill>
+                <a:effectLst/>
+              </a:rPr>
+              <a:t>recursiva</a:t>
+            </a:r>
+            <a:r>
+              <a:rPr kumimoji="0" lang="en-US" altLang="es-AR" i="0" u="none" strike="noStrike" cap="none" normalizeH="0" baseline="0" dirty="0">
+                <a:ln>
+                  <a:noFill/>
+                </a:ln>
+                <a:solidFill>
+                  <a:schemeClr val="bg1"/>
+                </a:solidFill>
+                <a:effectLst/>
+              </a:rPr>
+              <a:t> de </a:t>
+            </a:r>
+            <a:r>
+              <a:rPr kumimoji="0" lang="en-US" altLang="es-AR" i="0" u="none" strike="noStrike" cap="none" normalizeH="0" baseline="0" dirty="0" err="1">
+                <a:ln>
+                  <a:noFill/>
+                </a:ln>
+                <a:solidFill>
+                  <a:schemeClr val="bg1"/>
+                </a:solidFill>
+                <a:effectLst/>
+              </a:rPr>
+              <a:t>Carpetas</a:t>
+            </a:r>
+            <a:r>
+              <a:rPr kumimoji="0" lang="en-US" altLang="es-AR" i="0" u="none" strike="noStrike" cap="none" normalizeH="0" baseline="0" dirty="0">
+                <a:ln>
+                  <a:noFill/>
+                </a:ln>
+                <a:solidFill>
+                  <a:schemeClr val="bg1"/>
+                </a:solidFill>
+                <a:effectLst/>
+              </a:rPr>
+              <a:t>. Esta es la base de la </a:t>
+            </a:r>
+            <a:r>
+              <a:rPr kumimoji="0" lang="en-US" altLang="es-AR" i="0" u="none" strike="noStrike" cap="none" normalizeH="0" baseline="0" dirty="0" err="1">
+                <a:ln>
+                  <a:noFill/>
+                </a:ln>
+                <a:solidFill>
+                  <a:schemeClr val="bg1"/>
+                </a:solidFill>
+                <a:effectLst/>
+              </a:rPr>
+              <a:t>organización</a:t>
+            </a:r>
+            <a:r>
+              <a:rPr kumimoji="0" lang="en-US" altLang="es-AR" i="0" u="none" strike="noStrike" cap="none" normalizeH="0" baseline="0" dirty="0">
+                <a:ln>
+                  <a:noFill/>
+                </a:ln>
+                <a:solidFill>
+                  <a:schemeClr val="bg1"/>
+                </a:solidFill>
+                <a:effectLst/>
+              </a:rPr>
+              <a:t> del </a:t>
+            </a:r>
+            <a:r>
+              <a:rPr kumimoji="0" lang="en-US" altLang="es-AR" i="0" u="none" strike="noStrike" cap="none" normalizeH="0" baseline="0" dirty="0" err="1">
+                <a:ln>
+                  <a:noFill/>
+                </a:ln>
+                <a:solidFill>
+                  <a:schemeClr val="bg1"/>
+                </a:solidFill>
+                <a:effectLst/>
+              </a:rPr>
+              <a:t>usuario</a:t>
+            </a:r>
+            <a:r>
+              <a:rPr kumimoji="0" lang="en-US" altLang="es-AR" i="0" u="none" strike="noStrike" cap="none" normalizeH="0" baseline="0" dirty="0">
+                <a:ln>
+                  <a:noFill/>
+                </a:ln>
+                <a:solidFill>
+                  <a:schemeClr val="bg1"/>
+                </a:solidFill>
+                <a:effectLst/>
+              </a:rPr>
+              <a:t>.</a:t>
+            </a:r>
+          </a:p>
+          <a:p>
+            <a:pPr marR="0" lvl="0" defTabSz="914400" fontAlgn="base">
+              <a:lnSpc>
+                <a:spcPct val="110000"/>
+              </a:lnSpc>
+              <a:spcBef>
+                <a:spcPct val="0"/>
+              </a:spcBef>
+              <a:spcAft>
+                <a:spcPts val="600"/>
+              </a:spcAft>
+              <a:buClrTx/>
+              <a:buSzPct val="125000"/>
+              <a:tabLst/>
+            </a:pPr>
+            <a:r>
+              <a:rPr kumimoji="0" lang="en-US" altLang="es-AR" i="0" u="none" strike="noStrike" cap="none" normalizeH="0" baseline="0" dirty="0">
+                <a:ln>
+                  <a:noFill/>
+                </a:ln>
+                <a:solidFill>
+                  <a:schemeClr val="bg1"/>
+                </a:solidFill>
+                <a:effectLst/>
+              </a:rPr>
+              <a:t>Gestión de Prioridad: El Servidor utiliza el Heap (</a:t>
+            </a:r>
+            <a:r>
+              <a:rPr kumimoji="0" lang="en-US" altLang="es-AR" i="0" u="none" strike="noStrike" cap="none" normalizeH="0" baseline="0" dirty="0" err="1">
+                <a:ln>
+                  <a:noFill/>
+                </a:ln>
+                <a:solidFill>
+                  <a:schemeClr val="bg1"/>
+                </a:solidFill>
+                <a:effectLst/>
+              </a:rPr>
+              <a:t>implementado</a:t>
+            </a:r>
+            <a:r>
+              <a:rPr kumimoji="0" lang="en-US" altLang="es-AR" i="0" u="none" strike="noStrike" cap="none" normalizeH="0" baseline="0" dirty="0">
+                <a:ln>
+                  <a:noFill/>
+                </a:ln>
+                <a:solidFill>
+                  <a:schemeClr val="bg1"/>
+                </a:solidFill>
+                <a:effectLst/>
+              </a:rPr>
+              <a:t> en el </a:t>
+            </a:r>
+            <a:r>
+              <a:rPr kumimoji="0" lang="en-US" altLang="es-AR" i="0" u="none" strike="noStrike" cap="none" normalizeH="0" baseline="0" dirty="0" err="1">
+                <a:ln>
+                  <a:noFill/>
+                </a:ln>
+                <a:solidFill>
+                  <a:schemeClr val="bg1"/>
+                </a:solidFill>
+                <a:effectLst/>
+              </a:rPr>
+              <a:t>objeto</a:t>
+            </a:r>
+            <a:r>
+              <a:rPr kumimoji="0" lang="en-US" altLang="es-AR" i="0" u="none" strike="noStrike" cap="none" normalizeH="0" baseline="0" dirty="0">
+                <a:ln>
+                  <a:noFill/>
+                </a:ln>
+                <a:solidFill>
+                  <a:schemeClr val="bg1"/>
+                </a:solidFill>
+                <a:effectLst/>
+              </a:rPr>
+              <a:t> Usuario) para garantizar </a:t>
+            </a:r>
+            <a:r>
+              <a:rPr kumimoji="0" lang="en-US" altLang="es-AR" i="0" u="none" strike="noStrike" cap="none" normalizeH="0" baseline="0" dirty="0" err="1">
+                <a:ln>
+                  <a:noFill/>
+                </a:ln>
+                <a:solidFill>
+                  <a:schemeClr val="bg1"/>
+                </a:solidFill>
+                <a:effectLst/>
+              </a:rPr>
+              <a:t>que</a:t>
+            </a:r>
+            <a:r>
+              <a:rPr kumimoji="0" lang="en-US" altLang="es-AR" i="0" u="none" strike="noStrike" cap="none" normalizeH="0" baseline="0" dirty="0">
+                <a:ln>
+                  <a:noFill/>
+                </a:ln>
+                <a:solidFill>
+                  <a:schemeClr val="bg1"/>
+                </a:solidFill>
+                <a:effectLst/>
+              </a:rPr>
+              <a:t> el </a:t>
+            </a:r>
+            <a:r>
+              <a:rPr kumimoji="0" lang="en-US" altLang="es-AR" i="0" u="none" strike="noStrike" cap="none" normalizeH="0" baseline="0" dirty="0" err="1">
+                <a:ln>
+                  <a:noFill/>
+                </a:ln>
+                <a:solidFill>
+                  <a:schemeClr val="bg1"/>
+                </a:solidFill>
+                <a:effectLst/>
+              </a:rPr>
+              <a:t>mensaje</a:t>
+            </a:r>
+            <a:r>
+              <a:rPr kumimoji="0" lang="en-US" altLang="es-AR" i="0" u="none" strike="noStrike" cap="none" normalizeH="0" baseline="0" dirty="0">
+                <a:ln>
+                  <a:noFill/>
+                </a:ln>
+                <a:solidFill>
+                  <a:schemeClr val="bg1"/>
+                </a:solidFill>
+                <a:effectLst/>
+              </a:rPr>
+              <a:t> </a:t>
+            </a:r>
+            <a:r>
+              <a:rPr kumimoji="0" lang="en-US" altLang="es-AR" i="0" u="none" strike="noStrike" cap="none" normalizeH="0" baseline="0" dirty="0" err="1">
+                <a:ln>
+                  <a:noFill/>
+                </a:ln>
+                <a:solidFill>
+                  <a:schemeClr val="bg1"/>
+                </a:solidFill>
+                <a:effectLst/>
+              </a:rPr>
+              <a:t>más</a:t>
+            </a:r>
+            <a:r>
+              <a:rPr kumimoji="0" lang="en-US" altLang="es-AR" i="0" u="none" strike="noStrike" cap="none" normalizeH="0" baseline="0" dirty="0">
+                <a:ln>
+                  <a:noFill/>
+                </a:ln>
+                <a:solidFill>
+                  <a:schemeClr val="bg1"/>
+                </a:solidFill>
+                <a:effectLst/>
+              </a:rPr>
+              <a:t> </a:t>
+            </a:r>
+            <a:r>
+              <a:rPr kumimoji="0" lang="en-US" altLang="es-AR" i="0" u="none" strike="noStrike" cap="none" normalizeH="0" baseline="0" dirty="0" err="1">
+                <a:ln>
+                  <a:noFill/>
+                </a:ln>
+                <a:solidFill>
+                  <a:schemeClr val="bg1"/>
+                </a:solidFill>
+                <a:effectLst/>
+              </a:rPr>
+              <a:t>urgente</a:t>
+            </a:r>
+            <a:r>
+              <a:rPr kumimoji="0" lang="en-US" altLang="es-AR" i="0" u="none" strike="noStrike" cap="none" normalizeH="0" baseline="0" dirty="0">
+                <a:ln>
+                  <a:noFill/>
+                </a:ln>
+                <a:solidFill>
+                  <a:schemeClr val="bg1"/>
+                </a:solidFill>
+                <a:effectLst/>
+              </a:rPr>
+              <a:t> se procese primero.</a:t>
+            </a:r>
+          </a:p>
+          <a:p>
+            <a:pPr marR="0" lvl="0" defTabSz="914400" fontAlgn="base">
+              <a:lnSpc>
+                <a:spcPct val="110000"/>
+              </a:lnSpc>
+              <a:spcBef>
+                <a:spcPct val="0"/>
+              </a:spcBef>
+              <a:spcAft>
+                <a:spcPts val="600"/>
+              </a:spcAft>
+              <a:buClrTx/>
+              <a:buSzPct val="125000"/>
+              <a:tabLst/>
+            </a:pPr>
+            <a:r>
+              <a:rPr kumimoji="0" lang="en-US" altLang="es-AR" i="0" u="none" strike="noStrike" cap="none" normalizeH="0" baseline="0" dirty="0">
+                <a:ln>
+                  <a:noFill/>
+                </a:ln>
+                <a:solidFill>
+                  <a:schemeClr val="bg1"/>
+                </a:solidFill>
+                <a:effectLst/>
+              </a:rPr>
+              <a:t>Enrutamiento Automático: El Usuario aplica el Filtro a los Mensajes entrantes, moviéndolos automáticamente sin intervención del servidor.</a:t>
+            </a:r>
+          </a:p>
+          <a:p>
+            <a:pPr marL="0" marR="0" lvl="0" indent="-228600" defTabSz="914400" fontAlgn="base">
+              <a:lnSpc>
+                <a:spcPct val="110000"/>
+              </a:lnSpc>
+              <a:spcBef>
+                <a:spcPct val="0"/>
+              </a:spcBef>
+              <a:spcAft>
+                <a:spcPts val="600"/>
+              </a:spcAft>
+              <a:buClrTx/>
+              <a:buSzPct val="125000"/>
+              <a:buFont typeface="Arial" panose="020B0604020202020204" pitchFamily="34" charset="0"/>
+              <a:buChar char="•"/>
+              <a:tabLst/>
+            </a:pPr>
+            <a:endParaRPr kumimoji="0" lang="en-US" altLang="es-AR" sz="1400" b="0" i="0" u="none" strike="noStrike" cap="none" normalizeH="0" baseline="0" dirty="0">
+              <a:ln>
+                <a:noFill/>
+              </a:ln>
+              <a:effectLst/>
+            </a:endParaRPr>
+          </a:p>
+        </p:txBody>
+      </p:sp>
+      <p:grpSp>
+        <p:nvGrpSpPr>
+          <p:cNvPr id="70" name="Group 15">
+            <a:extLst>
+              <a:ext uri="{FF2B5EF4-FFF2-40B4-BE49-F238E27FC236}">
+                <a16:creationId xmlns:a16="http://schemas.microsoft.com/office/drawing/2014/main" id="{453E4DEE-E996-40F8-8635-0FF43D7348F9}"/>
+              </a:ext>
+              <a:ext uri="{C183D7F6-B498-43B3-948B-1728B52AA6E4}">
+                <adec:decorative xmlns:adec="http://schemas.microsoft.com/office/drawing/2017/decorative" val="1"/>
+              </a:ext>
+            </a:extLst>
+          </p:cNvPr>
+          <p:cNvGrpSpPr>
+            <a:grpSpLocks noGrp="1" noUngrp="1" noRot="1" noChangeAspect="1" noMove="1" noResize="1"/>
+          </p:cNvGrpSpPr>
+          <p:nvPr>
+            <p:extLst>
+              <p:ext uri="{386F3935-93C4-4BCD-93E2-E3B085C9AB24}">
+                <p16:designElem xmlns:p16="http://schemas.microsoft.com/office/powerpoint/2015/main" val="1"/>
+              </p:ext>
+            </p:extLst>
+          </p:nvPr>
+        </p:nvGrpSpPr>
+        <p:grpSpPr>
+          <a:xfrm>
+            <a:off x="0" y="0"/>
+            <a:ext cx="1220788" cy="6858001"/>
+            <a:chOff x="-14288" y="0"/>
+            <a:chExt cx="1220788" cy="6858001"/>
+          </a:xfrm>
+          <a:gradFill flip="none" rotWithShape="1">
+            <a:gsLst>
+              <a:gs pos="0">
+                <a:schemeClr val="tx2"/>
+              </a:gs>
+              <a:gs pos="100000">
+                <a:schemeClr val="bg2">
+                  <a:lumMod val="60000"/>
+                  <a:lumOff val="40000"/>
+                </a:schemeClr>
+              </a:gs>
+            </a:gsLst>
+            <a:lin ang="5400000" scaled="0"/>
+            <a:tileRect/>
+          </a:gradFill>
+        </p:grpSpPr>
+        <p:sp>
+          <p:nvSpPr>
+            <p:cNvPr id="71" name="Rectangle 5">
+              <a:extLst>
+                <a:ext uri="{FF2B5EF4-FFF2-40B4-BE49-F238E27FC236}">
+                  <a16:creationId xmlns:a16="http://schemas.microsoft.com/office/drawing/2014/main" id="{08BD1D3E-43CE-49EB-A424-0738950C6424}"/>
+                </a:ext>
+                <a:ext uri="{C183D7F6-B498-43B3-948B-1728B52AA6E4}">
+                  <adec:decorative xmlns:adec="http://schemas.microsoft.com/office/drawing/2017/decorative" val="1"/>
+                </a:ext>
+              </a:extLst>
+            </p:cNvPr>
+            <p:cNvSpPr>
+              <a:spLocks noChangeArrowheads="1"/>
+            </p:cNvSpPr>
+            <p:nvPr>
+              <p:extLst>
+                <p:ext uri="{386F3935-93C4-4BCD-93E2-E3B085C9AB24}">
+                  <p16:designElem xmlns:p16="http://schemas.microsoft.com/office/powerpoint/2015/main" val="1"/>
+                </p:ext>
+              </p:extLst>
+            </p:nvPr>
+          </p:nvSpPr>
+          <p:spPr bwMode="auto">
+            <a:xfrm>
+              <a:off x="114300" y="4763"/>
+              <a:ext cx="23813" cy="2181225"/>
+            </a:xfrm>
+            <a:prstGeom prst="rect">
+              <a:avLst/>
+            </a:prstGeom>
+            <a:grpFill/>
+            <a:ln>
+              <a:noFill/>
+            </a:ln>
+            <a:extLst>
+              <a:ext uri="{91240B29-F687-4f45-9708-019B960494DF}">
+                <a14:hiddenLine xmlns="" xmlns:a16="http://schemas.microsoft.com/office/drawing/2014/main" xmlns:p14="http://schemas.microsoft.com/office/powerpoint/2010/main" xmlns:a14="http://schemas.microsoft.com/office/drawing/2010/main" w="9525">
+                  <a:solidFill>
+                    <a:srgbClr val="000000"/>
+                  </a:solidFill>
+                  <a:miter lim="800000"/>
+                  <a:headEnd/>
+                  <a:tailEnd/>
+                </a14:hiddenLine>
+              </a:ext>
+            </a:extLst>
+          </p:spPr>
+          <p:txBody>
+            <a:bodyPr/>
+            <a:lstStyle/>
+            <a:p>
+              <a:endParaRPr lang="es-AR"/>
+            </a:p>
+          </p:txBody>
+        </p:sp>
+        <p:sp>
+          <p:nvSpPr>
+            <p:cNvPr id="72" name="Freeform 6">
+              <a:extLst>
+                <a:ext uri="{FF2B5EF4-FFF2-40B4-BE49-F238E27FC236}">
+                  <a16:creationId xmlns:a16="http://schemas.microsoft.com/office/drawing/2014/main" id="{E9182037-E3FA-489A-95D5-29E4248420D8}"/>
+                </a:ext>
+                <a:ext uri="{C183D7F6-B498-43B3-948B-1728B52AA6E4}">
+                  <adec:decorative xmlns:adec="http://schemas.microsoft.com/office/drawing/2017/decorative" val="1"/>
+                </a:ext>
+              </a:extLst>
+            </p:cNvPr>
+            <p:cNvSpPr>
+              <a:spLocks noEditPoints="1"/>
+            </p:cNvSpPr>
+            <p:nvPr>
+              <p:extLst>
+                <p:ext uri="{386F3935-93C4-4BCD-93E2-E3B085C9AB24}">
+                  <p16:designElem xmlns:p16="http://schemas.microsoft.com/office/powerpoint/2015/main" val="1"/>
+                </p:ext>
+              </p:extLst>
+            </p:nvPr>
+          </p:nvSpPr>
+          <p:spPr bwMode="auto">
+            <a:xfrm>
+              <a:off x="33337" y="2176463"/>
+              <a:ext cx="190500" cy="190500"/>
+            </a:xfrm>
+            <a:custGeom>
+              <a:avLst/>
+              <a:gdLst/>
+              <a:ahLst/>
+              <a:cxnLst/>
+              <a:rect l="0" t="0" r="r" b="b"/>
+              <a:pathLst>
+                <a:path w="40" h="40">
+                  <a:moveTo>
+                    <a:pt x="20" y="40"/>
+                  </a:moveTo>
+                  <a:cubicBezTo>
+                    <a:pt x="9" y="40"/>
+                    <a:pt x="0" y="31"/>
+                    <a:pt x="0" y="20"/>
+                  </a:cubicBezTo>
+                  <a:cubicBezTo>
+                    <a:pt x="0" y="9"/>
+                    <a:pt x="9" y="0"/>
+                    <a:pt x="20" y="0"/>
+                  </a:cubicBezTo>
+                  <a:cubicBezTo>
+                    <a:pt x="31" y="0"/>
+                    <a:pt x="40" y="9"/>
+                    <a:pt x="40" y="20"/>
+                  </a:cubicBezTo>
+                  <a:cubicBezTo>
+                    <a:pt x="40" y="31"/>
+                    <a:pt x="31" y="40"/>
+                    <a:pt x="20" y="40"/>
+                  </a:cubicBezTo>
+                  <a:close/>
+                  <a:moveTo>
+                    <a:pt x="20" y="4"/>
+                  </a:moveTo>
+                  <a:cubicBezTo>
+                    <a:pt x="11" y="4"/>
+                    <a:pt x="4" y="11"/>
+                    <a:pt x="4" y="20"/>
+                  </a:cubicBezTo>
+                  <a:cubicBezTo>
+                    <a:pt x="4" y="29"/>
+                    <a:pt x="11" y="36"/>
+                    <a:pt x="20" y="36"/>
+                  </a:cubicBezTo>
+                  <a:cubicBezTo>
+                    <a:pt x="28" y="36"/>
+                    <a:pt x="36" y="29"/>
+                    <a:pt x="36" y="20"/>
+                  </a:cubicBezTo>
+                  <a:cubicBezTo>
+                    <a:pt x="36" y="11"/>
+                    <a:pt x="28" y="4"/>
+                    <a:pt x="20" y="4"/>
+                  </a:cubicBezTo>
+                  <a:close/>
+                </a:path>
+              </a:pathLst>
+            </a:custGeom>
+            <a:grpFill/>
+            <a:ln>
+              <a:noFill/>
+            </a:ln>
+            <a:extLst>
+              <a:ext uri="{91240B29-F687-4f45-9708-019B960494DF}">
+                <a14:hiddenLine xmlns="" xmlns:a16="http://schemas.microsoft.com/office/drawing/2014/main" xmlns:p14="http://schemas.microsoft.com/office/powerpoint/2010/main" xmlns:a14="http://schemas.microsoft.com/office/drawing/2010/main" w="9525">
+                  <a:solidFill>
+                    <a:srgbClr val="000000"/>
+                  </a:solidFill>
+                  <a:round/>
+                  <a:headEnd/>
+                  <a:tailEnd/>
+                </a14:hiddenLine>
+              </a:ext>
+            </a:extLst>
+          </p:spPr>
+          <p:txBody>
+            <a:bodyPr/>
+            <a:lstStyle/>
+            <a:p>
+              <a:endParaRPr lang="es-AR"/>
+            </a:p>
+          </p:txBody>
+        </p:sp>
+        <p:sp>
+          <p:nvSpPr>
+            <p:cNvPr id="73" name="Freeform 7">
+              <a:extLst>
+                <a:ext uri="{FF2B5EF4-FFF2-40B4-BE49-F238E27FC236}">
+                  <a16:creationId xmlns:a16="http://schemas.microsoft.com/office/drawing/2014/main" id="{E8864E76-AD7F-4BEE-B3F6-A78FA42AEFAC}"/>
+                </a:ext>
+                <a:ext uri="{C183D7F6-B498-43B3-948B-1728B52AA6E4}">
+                  <adec:decorative xmlns:adec="http://schemas.microsoft.com/office/drawing/2017/decorative" val="1"/>
+                </a:ext>
+              </a:extLst>
+            </p:cNvPr>
+            <p:cNvSpPr>
+              <a:spLocks noEditPoints="1"/>
+            </p:cNvSpPr>
+            <p:nvPr>
+              <p:extLst>
+                <p:ext uri="{386F3935-93C4-4BCD-93E2-E3B085C9AB24}">
+                  <p16:designElem xmlns:p16="http://schemas.microsoft.com/office/powerpoint/2015/main" val="1"/>
+                </p:ext>
+              </p:extLst>
+            </p:nvPr>
+          </p:nvSpPr>
+          <p:spPr bwMode="auto">
+            <a:xfrm>
+              <a:off x="28575" y="4021138"/>
+              <a:ext cx="190500" cy="188913"/>
+            </a:xfrm>
+            <a:custGeom>
+              <a:avLst/>
+              <a:gdLst/>
+              <a:ahLst/>
+              <a:cxnLst/>
+              <a:rect l="0" t="0" r="r" b="b"/>
+              <a:pathLst>
+                <a:path w="40" h="40">
+                  <a:moveTo>
+                    <a:pt x="20" y="40"/>
+                  </a:moveTo>
+                  <a:cubicBezTo>
+                    <a:pt x="9" y="40"/>
+                    <a:pt x="0" y="31"/>
+                    <a:pt x="0" y="20"/>
+                  </a:cubicBezTo>
+                  <a:cubicBezTo>
+                    <a:pt x="0" y="9"/>
+                    <a:pt x="9" y="0"/>
+                    <a:pt x="20" y="0"/>
+                  </a:cubicBezTo>
+                  <a:cubicBezTo>
+                    <a:pt x="31" y="0"/>
+                    <a:pt x="40" y="9"/>
+                    <a:pt x="40" y="20"/>
+                  </a:cubicBezTo>
+                  <a:cubicBezTo>
+                    <a:pt x="40" y="31"/>
+                    <a:pt x="31" y="40"/>
+                    <a:pt x="20" y="40"/>
+                  </a:cubicBezTo>
+                  <a:close/>
+                  <a:moveTo>
+                    <a:pt x="20" y="4"/>
+                  </a:moveTo>
+                  <a:cubicBezTo>
+                    <a:pt x="12" y="4"/>
+                    <a:pt x="4" y="11"/>
+                    <a:pt x="4" y="20"/>
+                  </a:cubicBezTo>
+                  <a:cubicBezTo>
+                    <a:pt x="4" y="29"/>
+                    <a:pt x="12" y="36"/>
+                    <a:pt x="20" y="36"/>
+                  </a:cubicBezTo>
+                  <a:cubicBezTo>
+                    <a:pt x="29" y="36"/>
+                    <a:pt x="36" y="29"/>
+                    <a:pt x="36" y="20"/>
+                  </a:cubicBezTo>
+                  <a:cubicBezTo>
+                    <a:pt x="36" y="11"/>
+                    <a:pt x="29" y="4"/>
+                    <a:pt x="20" y="4"/>
+                  </a:cubicBezTo>
+                  <a:close/>
+                </a:path>
+              </a:pathLst>
+            </a:custGeom>
+            <a:grpFill/>
+            <a:ln>
+              <a:noFill/>
+            </a:ln>
+            <a:extLst>
+              <a:ext uri="{91240B29-F687-4f45-9708-019B960494DF}">
+                <a14:hiddenLine xmlns="" xmlns:a16="http://schemas.microsoft.com/office/drawing/2014/main" xmlns:p14="http://schemas.microsoft.com/office/powerpoint/2010/main" xmlns:a14="http://schemas.microsoft.com/office/drawing/2010/main" w="9525">
+                  <a:solidFill>
+                    <a:srgbClr val="000000"/>
+                  </a:solidFill>
+                  <a:round/>
+                  <a:headEnd/>
+                  <a:tailEnd/>
+                </a14:hiddenLine>
+              </a:ext>
+            </a:extLst>
+          </p:spPr>
+          <p:txBody>
+            <a:bodyPr/>
+            <a:lstStyle/>
+            <a:p>
+              <a:endParaRPr lang="es-AR"/>
+            </a:p>
+          </p:txBody>
+        </p:sp>
+        <p:sp>
+          <p:nvSpPr>
+            <p:cNvPr id="74" name="Freeform 8">
+              <a:extLst>
+                <a:ext uri="{FF2B5EF4-FFF2-40B4-BE49-F238E27FC236}">
+                  <a16:creationId xmlns:a16="http://schemas.microsoft.com/office/drawing/2014/main" id="{8AD071B3-046D-4479-91FE-01E9AD7C8AAB}"/>
+                </a:ext>
+                <a:ext uri="{C183D7F6-B498-43B3-948B-1728B52AA6E4}">
+                  <adec:decorative xmlns:adec="http://schemas.microsoft.com/office/drawing/2017/decorative" val="1"/>
+                </a:ext>
+              </a:extLst>
+            </p:cNvPr>
+            <p:cNvSpPr/>
+            <p:nvPr>
+              <p:extLst>
+                <p:ext uri="{386F3935-93C4-4BCD-93E2-E3B085C9AB24}">
+                  <p16:designElem xmlns:p16="http://schemas.microsoft.com/office/powerpoint/2015/main" val="1"/>
+                </p:ext>
+              </p:extLst>
+            </p:nvPr>
+          </p:nvSpPr>
+          <p:spPr bwMode="auto">
+            <a:xfrm>
+              <a:off x="200025" y="4763"/>
+              <a:ext cx="369888" cy="1811338"/>
+            </a:xfrm>
+            <a:custGeom>
+              <a:avLst/>
+              <a:gdLst/>
+              <a:ahLst/>
+              <a:cxnLst/>
+              <a:rect l="0" t="0" r="r" b="b"/>
+              <a:pathLst>
+                <a:path w="233" h="1141">
+                  <a:moveTo>
+                    <a:pt x="218" y="1141"/>
+                  </a:moveTo>
+                  <a:lnTo>
+                    <a:pt x="0" y="626"/>
+                  </a:lnTo>
+                  <a:lnTo>
+                    <a:pt x="0" y="0"/>
+                  </a:lnTo>
+                  <a:lnTo>
+                    <a:pt x="15" y="0"/>
+                  </a:lnTo>
+                  <a:lnTo>
+                    <a:pt x="15" y="623"/>
+                  </a:lnTo>
+                  <a:lnTo>
+                    <a:pt x="233" y="1135"/>
+                  </a:lnTo>
+                  <a:lnTo>
+                    <a:pt x="218" y="1141"/>
+                  </a:lnTo>
+                  <a:close/>
+                </a:path>
+              </a:pathLst>
+            </a:custGeom>
+            <a:grpFill/>
+            <a:ln>
+              <a:noFill/>
+            </a:ln>
+            <a:extLst>
+              <a:ext uri="{91240B29-F687-4f45-9708-019B960494DF}">
+                <a14:hiddenLine xmlns="" xmlns:a16="http://schemas.microsoft.com/office/drawing/2014/main" xmlns:p14="http://schemas.microsoft.com/office/powerpoint/2010/main" xmlns:a14="http://schemas.microsoft.com/office/drawing/2010/main" w="9525">
+                  <a:solidFill>
+                    <a:srgbClr val="000000"/>
+                  </a:solidFill>
+                  <a:round/>
+                  <a:headEnd/>
+                  <a:tailEnd/>
+                </a14:hiddenLine>
+              </a:ext>
+            </a:extLst>
+          </p:spPr>
+          <p:txBody>
+            <a:bodyPr/>
+            <a:lstStyle/>
+            <a:p>
+              <a:endParaRPr lang="es-AR"/>
+            </a:p>
+          </p:txBody>
+        </p:sp>
+        <p:sp>
+          <p:nvSpPr>
+            <p:cNvPr id="75" name="Freeform 9">
+              <a:extLst>
+                <a:ext uri="{FF2B5EF4-FFF2-40B4-BE49-F238E27FC236}">
+                  <a16:creationId xmlns:a16="http://schemas.microsoft.com/office/drawing/2014/main" id="{91D776F5-E902-4A4D-A75D-A46E063C9F38}"/>
+                </a:ext>
+                <a:ext uri="{C183D7F6-B498-43B3-948B-1728B52AA6E4}">
+                  <adec:decorative xmlns:adec="http://schemas.microsoft.com/office/drawing/2017/decorative" val="1"/>
+                </a:ext>
+              </a:extLst>
+            </p:cNvPr>
+            <p:cNvSpPr>
+              <a:spLocks noEditPoints="1"/>
+            </p:cNvSpPr>
+            <p:nvPr>
+              <p:extLst>
+                <p:ext uri="{386F3935-93C4-4BCD-93E2-E3B085C9AB24}">
+                  <p16:designElem xmlns:p16="http://schemas.microsoft.com/office/powerpoint/2015/main" val="1"/>
+                </p:ext>
+              </p:extLst>
+            </p:nvPr>
+          </p:nvSpPr>
+          <p:spPr bwMode="auto">
+            <a:xfrm>
+              <a:off x="503237" y="1801813"/>
+              <a:ext cx="190500" cy="188913"/>
+            </a:xfrm>
+            <a:custGeom>
+              <a:avLst/>
+              <a:gdLst/>
+              <a:ahLst/>
+              <a:cxnLst/>
+              <a:rect l="0" t="0" r="r" b="b"/>
+              <a:pathLst>
+                <a:path w="40" h="40">
+                  <a:moveTo>
+                    <a:pt x="20" y="40"/>
+                  </a:moveTo>
+                  <a:cubicBezTo>
+                    <a:pt x="9" y="40"/>
+                    <a:pt x="0" y="31"/>
+                    <a:pt x="0" y="20"/>
+                  </a:cubicBezTo>
+                  <a:cubicBezTo>
+                    <a:pt x="0" y="9"/>
+                    <a:pt x="9" y="0"/>
+                    <a:pt x="20" y="0"/>
+                  </a:cubicBezTo>
+                  <a:cubicBezTo>
+                    <a:pt x="33" y="0"/>
+                    <a:pt x="40" y="6"/>
+                    <a:pt x="40" y="20"/>
+                  </a:cubicBezTo>
+                  <a:cubicBezTo>
+                    <a:pt x="40" y="31"/>
+                    <a:pt x="31" y="40"/>
+                    <a:pt x="20" y="40"/>
+                  </a:cubicBezTo>
+                  <a:close/>
+                  <a:moveTo>
+                    <a:pt x="20" y="4"/>
+                  </a:moveTo>
+                  <a:cubicBezTo>
+                    <a:pt x="11" y="4"/>
+                    <a:pt x="4" y="11"/>
+                    <a:pt x="4" y="20"/>
+                  </a:cubicBezTo>
+                  <a:cubicBezTo>
+                    <a:pt x="4" y="29"/>
+                    <a:pt x="11" y="36"/>
+                    <a:pt x="20" y="36"/>
+                  </a:cubicBezTo>
+                  <a:cubicBezTo>
+                    <a:pt x="28" y="36"/>
+                    <a:pt x="36" y="29"/>
+                    <a:pt x="36" y="20"/>
+                  </a:cubicBezTo>
+                  <a:cubicBezTo>
+                    <a:pt x="36" y="9"/>
+                    <a:pt x="31" y="4"/>
+                    <a:pt x="20" y="4"/>
+                  </a:cubicBezTo>
+                  <a:close/>
+                </a:path>
+              </a:pathLst>
+            </a:custGeom>
+            <a:grpFill/>
+            <a:ln>
+              <a:noFill/>
+            </a:ln>
+            <a:extLst>
+              <a:ext uri="{91240B29-F687-4f45-9708-019B960494DF}">
+                <a14:hiddenLine xmlns="" xmlns:a16="http://schemas.microsoft.com/office/drawing/2014/main" xmlns:p14="http://schemas.microsoft.com/office/powerpoint/2010/main" xmlns:a14="http://schemas.microsoft.com/office/drawing/2010/main" w="9525">
+                  <a:solidFill>
+                    <a:srgbClr val="000000"/>
+                  </a:solidFill>
+                  <a:round/>
+                  <a:headEnd/>
+                  <a:tailEnd/>
+                </a14:hiddenLine>
+              </a:ext>
+            </a:extLst>
+          </p:spPr>
+          <p:txBody>
+            <a:bodyPr/>
+            <a:lstStyle/>
+            <a:p>
+              <a:endParaRPr lang="es-AR"/>
+            </a:p>
+          </p:txBody>
+        </p:sp>
+        <p:sp>
+          <p:nvSpPr>
+            <p:cNvPr id="76" name="Freeform 10">
+              <a:extLst>
+                <a:ext uri="{FF2B5EF4-FFF2-40B4-BE49-F238E27FC236}">
+                  <a16:creationId xmlns:a16="http://schemas.microsoft.com/office/drawing/2014/main" id="{EBED8F24-A998-4952-AB68-E2074F0746FE}"/>
+                </a:ext>
+                <a:ext uri="{C183D7F6-B498-43B3-948B-1728B52AA6E4}">
+                  <adec:decorative xmlns:adec="http://schemas.microsoft.com/office/drawing/2017/decorative" val="1"/>
+                </a:ext>
+              </a:extLst>
+            </p:cNvPr>
+            <p:cNvSpPr/>
+            <p:nvPr>
+              <p:extLst>
+                <p:ext uri="{386F3935-93C4-4BCD-93E2-E3B085C9AB24}">
+                  <p16:designElem xmlns:p16="http://schemas.microsoft.com/office/powerpoint/2015/main" val="1"/>
+                </p:ext>
+              </p:extLst>
+            </p:nvPr>
+          </p:nvSpPr>
+          <p:spPr bwMode="auto">
+            <a:xfrm>
+              <a:off x="285750" y="4763"/>
+              <a:ext cx="369888" cy="1430338"/>
+            </a:xfrm>
+            <a:custGeom>
+              <a:avLst/>
+              <a:gdLst/>
+              <a:ahLst/>
+              <a:cxnLst/>
+              <a:rect l="0" t="0" r="r" b="b"/>
+              <a:pathLst>
+                <a:path w="233" h="901">
+                  <a:moveTo>
+                    <a:pt x="221" y="901"/>
+                  </a:moveTo>
+                  <a:lnTo>
+                    <a:pt x="0" y="383"/>
+                  </a:lnTo>
+                  <a:lnTo>
+                    <a:pt x="0" y="0"/>
+                  </a:lnTo>
+                  <a:lnTo>
+                    <a:pt x="18" y="0"/>
+                  </a:lnTo>
+                  <a:lnTo>
+                    <a:pt x="18" y="380"/>
+                  </a:lnTo>
+                  <a:lnTo>
+                    <a:pt x="233" y="895"/>
+                  </a:lnTo>
+                  <a:lnTo>
+                    <a:pt x="221" y="901"/>
+                  </a:lnTo>
+                  <a:close/>
+                </a:path>
+              </a:pathLst>
+            </a:custGeom>
+            <a:grpFill/>
+            <a:ln>
+              <a:noFill/>
+            </a:ln>
+            <a:extLst>
+              <a:ext uri="{91240B29-F687-4f45-9708-019B960494DF}">
+                <a14:hiddenLine xmlns="" xmlns:a16="http://schemas.microsoft.com/office/drawing/2014/main" xmlns:p14="http://schemas.microsoft.com/office/powerpoint/2010/main" xmlns:a14="http://schemas.microsoft.com/office/drawing/2010/main" w="9525">
+                  <a:solidFill>
+                    <a:srgbClr val="000000"/>
+                  </a:solidFill>
+                  <a:round/>
+                  <a:headEnd/>
+                  <a:tailEnd/>
+                </a14:hiddenLine>
+              </a:ext>
+            </a:extLst>
+          </p:spPr>
+          <p:txBody>
+            <a:bodyPr/>
+            <a:lstStyle/>
+            <a:p>
+              <a:endParaRPr lang="es-AR"/>
+            </a:p>
+          </p:txBody>
+        </p:sp>
+        <p:sp>
+          <p:nvSpPr>
+            <p:cNvPr id="77" name="Freeform 11">
+              <a:extLst>
+                <a:ext uri="{FF2B5EF4-FFF2-40B4-BE49-F238E27FC236}">
+                  <a16:creationId xmlns:a16="http://schemas.microsoft.com/office/drawing/2014/main" id="{74D7A646-8CDC-49B3-9C44-3EF38DB4264C}"/>
+                </a:ext>
+                <a:ext uri="{C183D7F6-B498-43B3-948B-1728B52AA6E4}">
+                  <adec:decorative xmlns:adec="http://schemas.microsoft.com/office/drawing/2017/decorative" val="1"/>
+                </a:ext>
+              </a:extLst>
+            </p:cNvPr>
+            <p:cNvSpPr/>
+            <p:nvPr>
+              <p:extLst>
+                <p:ext uri="{386F3935-93C4-4BCD-93E2-E3B085C9AB24}">
+                  <p16:designElem xmlns:p16="http://schemas.microsoft.com/office/powerpoint/2015/main" val="1"/>
+                </p:ext>
+              </p:extLst>
+            </p:nvPr>
+          </p:nvSpPr>
+          <p:spPr bwMode="auto">
+            <a:xfrm>
+              <a:off x="546100" y="0"/>
+              <a:ext cx="152400" cy="912813"/>
+            </a:xfrm>
+            <a:custGeom>
+              <a:avLst/>
+              <a:gdLst/>
+              <a:ahLst/>
+              <a:cxnLst/>
+              <a:rect l="0" t="0" r="r" b="b"/>
+              <a:pathLst>
+                <a:path w="96" h="575">
+                  <a:moveTo>
+                    <a:pt x="96" y="575"/>
+                  </a:moveTo>
+                  <a:lnTo>
+                    <a:pt x="78" y="575"/>
+                  </a:lnTo>
+                  <a:lnTo>
+                    <a:pt x="78" y="192"/>
+                  </a:lnTo>
+                  <a:lnTo>
+                    <a:pt x="0" y="6"/>
+                  </a:lnTo>
+                  <a:lnTo>
+                    <a:pt x="15" y="0"/>
+                  </a:lnTo>
+                  <a:lnTo>
+                    <a:pt x="96" y="189"/>
+                  </a:lnTo>
+                  <a:lnTo>
+                    <a:pt x="96" y="575"/>
+                  </a:lnTo>
+                  <a:close/>
+                </a:path>
+              </a:pathLst>
+            </a:custGeom>
+            <a:grpFill/>
+            <a:ln>
+              <a:noFill/>
+            </a:ln>
+            <a:extLst>
+              <a:ext uri="{91240B29-F687-4f45-9708-019B960494DF}">
+                <a14:hiddenLine xmlns="" xmlns:a16="http://schemas.microsoft.com/office/drawing/2014/main" xmlns:p14="http://schemas.microsoft.com/office/powerpoint/2010/main" xmlns:a14="http://schemas.microsoft.com/office/drawing/2010/main" w="9525">
+                  <a:solidFill>
+                    <a:srgbClr val="000000"/>
+                  </a:solidFill>
+                  <a:round/>
+                  <a:headEnd/>
+                  <a:tailEnd/>
+                </a14:hiddenLine>
+              </a:ext>
+            </a:extLst>
+          </p:spPr>
+          <p:txBody>
+            <a:bodyPr/>
+            <a:lstStyle/>
+            <a:p>
+              <a:endParaRPr lang="es-AR"/>
+            </a:p>
+          </p:txBody>
+        </p:sp>
+        <p:sp>
+          <p:nvSpPr>
+            <p:cNvPr id="78" name="Freeform 12">
+              <a:extLst>
+                <a:ext uri="{FF2B5EF4-FFF2-40B4-BE49-F238E27FC236}">
+                  <a16:creationId xmlns:a16="http://schemas.microsoft.com/office/drawing/2014/main" id="{D4E99D14-E4F4-419B-9AAF-8D1CEAB28A2D}"/>
+                </a:ext>
+                <a:ext uri="{C183D7F6-B498-43B3-948B-1728B52AA6E4}">
+                  <adec:decorative xmlns:adec="http://schemas.microsoft.com/office/drawing/2017/decorative" val="1"/>
+                </a:ext>
+              </a:extLst>
+            </p:cNvPr>
+            <p:cNvSpPr>
+              <a:spLocks noEditPoints="1"/>
+            </p:cNvSpPr>
+            <p:nvPr>
+              <p:extLst>
+                <p:ext uri="{386F3935-93C4-4BCD-93E2-E3B085C9AB24}">
+                  <p16:designElem xmlns:p16="http://schemas.microsoft.com/office/powerpoint/2015/main" val="1"/>
+                </p:ext>
+              </p:extLst>
+            </p:nvPr>
+          </p:nvSpPr>
+          <p:spPr bwMode="auto">
+            <a:xfrm>
+              <a:off x="588962" y="1420813"/>
+              <a:ext cx="190500" cy="190500"/>
+            </a:xfrm>
+            <a:custGeom>
+              <a:avLst/>
+              <a:gdLst/>
+              <a:ahLst/>
+              <a:cxnLst/>
+              <a:rect l="0" t="0" r="r" b="b"/>
+              <a:pathLst>
+                <a:path w="40" h="40">
+                  <a:moveTo>
+                    <a:pt x="20" y="40"/>
+                  </a:moveTo>
+                  <a:cubicBezTo>
+                    <a:pt x="9" y="40"/>
+                    <a:pt x="0" y="31"/>
+                    <a:pt x="0" y="20"/>
+                  </a:cubicBezTo>
+                  <a:cubicBezTo>
+                    <a:pt x="0" y="9"/>
+                    <a:pt x="9" y="0"/>
+                    <a:pt x="20" y="0"/>
+                  </a:cubicBezTo>
+                  <a:cubicBezTo>
+                    <a:pt x="33" y="0"/>
+                    <a:pt x="40" y="7"/>
+                    <a:pt x="40" y="20"/>
+                  </a:cubicBezTo>
+                  <a:cubicBezTo>
+                    <a:pt x="40" y="31"/>
+                    <a:pt x="31" y="40"/>
+                    <a:pt x="20" y="40"/>
+                  </a:cubicBezTo>
+                  <a:close/>
+                  <a:moveTo>
+                    <a:pt x="20" y="4"/>
+                  </a:moveTo>
+                  <a:cubicBezTo>
+                    <a:pt x="11" y="4"/>
+                    <a:pt x="4" y="11"/>
+                    <a:pt x="4" y="20"/>
+                  </a:cubicBezTo>
+                  <a:cubicBezTo>
+                    <a:pt x="4" y="29"/>
+                    <a:pt x="11" y="36"/>
+                    <a:pt x="20" y="36"/>
+                  </a:cubicBezTo>
+                  <a:cubicBezTo>
+                    <a:pt x="29" y="36"/>
+                    <a:pt x="36" y="29"/>
+                    <a:pt x="36" y="20"/>
+                  </a:cubicBezTo>
+                  <a:cubicBezTo>
+                    <a:pt x="36" y="9"/>
+                    <a:pt x="31" y="4"/>
+                    <a:pt x="20" y="4"/>
+                  </a:cubicBezTo>
+                  <a:close/>
+                </a:path>
+              </a:pathLst>
+            </a:custGeom>
+            <a:grpFill/>
+            <a:ln>
+              <a:noFill/>
+            </a:ln>
+            <a:extLst>
+              <a:ext uri="{91240B29-F687-4f45-9708-019B960494DF}">
+                <a14:hiddenLine xmlns="" xmlns:a16="http://schemas.microsoft.com/office/drawing/2014/main" xmlns:p14="http://schemas.microsoft.com/office/powerpoint/2010/main" xmlns:a14="http://schemas.microsoft.com/office/drawing/2010/main" w="9525">
+                  <a:solidFill>
+                    <a:srgbClr val="000000"/>
+                  </a:solidFill>
+                  <a:round/>
+                  <a:headEnd/>
+                  <a:tailEnd/>
+                </a14:hiddenLine>
+              </a:ext>
+            </a:extLst>
+          </p:spPr>
+          <p:txBody>
+            <a:bodyPr/>
+            <a:lstStyle/>
+            <a:p>
+              <a:endParaRPr lang="es-AR"/>
+            </a:p>
+          </p:txBody>
+        </p:sp>
+        <p:sp>
+          <p:nvSpPr>
+            <p:cNvPr id="79" name="Freeform 13">
+              <a:extLst>
+                <a:ext uri="{FF2B5EF4-FFF2-40B4-BE49-F238E27FC236}">
+                  <a16:creationId xmlns:a16="http://schemas.microsoft.com/office/drawing/2014/main" id="{377E106C-5445-4A52-9F7E-DA1738744291}"/>
+                </a:ext>
+                <a:ext uri="{C183D7F6-B498-43B3-948B-1728B52AA6E4}">
+                  <adec:decorative xmlns:adec="http://schemas.microsoft.com/office/drawing/2017/decorative" val="1"/>
+                </a:ext>
+              </a:extLst>
+            </p:cNvPr>
+            <p:cNvSpPr>
+              <a:spLocks noEditPoints="1"/>
+            </p:cNvSpPr>
+            <p:nvPr>
+              <p:extLst>
+                <p:ext uri="{386F3935-93C4-4BCD-93E2-E3B085C9AB24}">
+                  <p16:designElem xmlns:p16="http://schemas.microsoft.com/office/powerpoint/2015/main" val="1"/>
+                </p:ext>
+              </p:extLst>
+            </p:nvPr>
+          </p:nvSpPr>
+          <p:spPr bwMode="auto">
+            <a:xfrm>
+              <a:off x="588962" y="903288"/>
+              <a:ext cx="190500" cy="190500"/>
+            </a:xfrm>
+            <a:custGeom>
+              <a:avLst/>
+              <a:gdLst/>
+              <a:ahLst/>
+              <a:cxnLst/>
+              <a:rect l="0" t="0" r="r" b="b"/>
+              <a:pathLst>
+                <a:path w="40" h="40">
+                  <a:moveTo>
+                    <a:pt x="20" y="40"/>
+                  </a:moveTo>
+                  <a:cubicBezTo>
+                    <a:pt x="9" y="40"/>
+                    <a:pt x="0" y="31"/>
+                    <a:pt x="0" y="20"/>
+                  </a:cubicBezTo>
+                  <a:cubicBezTo>
+                    <a:pt x="0" y="9"/>
+                    <a:pt x="9" y="0"/>
+                    <a:pt x="20" y="0"/>
+                  </a:cubicBezTo>
+                  <a:cubicBezTo>
+                    <a:pt x="31" y="0"/>
+                    <a:pt x="40" y="9"/>
+                    <a:pt x="40" y="20"/>
+                  </a:cubicBezTo>
+                  <a:cubicBezTo>
+                    <a:pt x="40" y="31"/>
+                    <a:pt x="31" y="40"/>
+                    <a:pt x="20" y="40"/>
+                  </a:cubicBezTo>
+                  <a:close/>
+                  <a:moveTo>
+                    <a:pt x="20" y="4"/>
+                  </a:moveTo>
+                  <a:cubicBezTo>
+                    <a:pt x="11" y="4"/>
+                    <a:pt x="4" y="11"/>
+                    <a:pt x="4" y="20"/>
+                  </a:cubicBezTo>
+                  <a:cubicBezTo>
+                    <a:pt x="4" y="29"/>
+                    <a:pt x="11" y="36"/>
+                    <a:pt x="20" y="36"/>
+                  </a:cubicBezTo>
+                  <a:cubicBezTo>
+                    <a:pt x="29" y="36"/>
+                    <a:pt x="36" y="29"/>
+                    <a:pt x="36" y="20"/>
+                  </a:cubicBezTo>
+                  <a:cubicBezTo>
+                    <a:pt x="36" y="11"/>
+                    <a:pt x="29" y="4"/>
+                    <a:pt x="20" y="4"/>
+                  </a:cubicBezTo>
+                  <a:close/>
+                </a:path>
+              </a:pathLst>
+            </a:custGeom>
+            <a:grpFill/>
+            <a:ln>
+              <a:noFill/>
+            </a:ln>
+            <a:extLst>
+              <a:ext uri="{91240B29-F687-4f45-9708-019B960494DF}">
+                <a14:hiddenLine xmlns="" xmlns:a16="http://schemas.microsoft.com/office/drawing/2014/main" xmlns:p14="http://schemas.microsoft.com/office/powerpoint/2010/main" xmlns:a14="http://schemas.microsoft.com/office/drawing/2010/main" w="9525">
+                  <a:solidFill>
+                    <a:srgbClr val="000000"/>
+                  </a:solidFill>
+                  <a:round/>
+                  <a:headEnd/>
+                  <a:tailEnd/>
+                </a14:hiddenLine>
+              </a:ext>
+            </a:extLst>
+          </p:spPr>
+          <p:txBody>
+            <a:bodyPr/>
+            <a:lstStyle/>
+            <a:p>
+              <a:endParaRPr lang="es-AR"/>
+            </a:p>
+          </p:txBody>
+        </p:sp>
+        <p:sp>
+          <p:nvSpPr>
+            <p:cNvPr id="83" name="Freeform 14">
+              <a:extLst>
+                <a:ext uri="{FF2B5EF4-FFF2-40B4-BE49-F238E27FC236}">
+                  <a16:creationId xmlns:a16="http://schemas.microsoft.com/office/drawing/2014/main" id="{752BFE96-D378-4BAE-A64B-F851A34C4770}"/>
+                </a:ext>
+                <a:ext uri="{C183D7F6-B498-43B3-948B-1728B52AA6E4}">
+                  <adec:decorative xmlns:adec="http://schemas.microsoft.com/office/drawing/2017/decorative" val="1"/>
+                </a:ext>
+              </a:extLst>
+            </p:cNvPr>
+            <p:cNvSpPr/>
+            <p:nvPr>
+              <p:extLst>
+                <p:ext uri="{386F3935-93C4-4BCD-93E2-E3B085C9AB24}">
+                  <p16:designElem xmlns:p16="http://schemas.microsoft.com/office/powerpoint/2015/main" val="1"/>
+                </p:ext>
+              </p:extLst>
+            </p:nvPr>
+          </p:nvSpPr>
+          <p:spPr bwMode="auto">
+            <a:xfrm>
+              <a:off x="641350" y="0"/>
+              <a:ext cx="422275" cy="527050"/>
+            </a:xfrm>
+            <a:custGeom>
+              <a:avLst/>
+              <a:gdLst/>
+              <a:ahLst/>
+              <a:cxnLst/>
+              <a:rect l="0" t="0" r="r" b="b"/>
+              <a:pathLst>
+                <a:path w="266" h="332">
+                  <a:moveTo>
+                    <a:pt x="257" y="332"/>
+                  </a:moveTo>
+                  <a:lnTo>
+                    <a:pt x="48" y="123"/>
+                  </a:lnTo>
+                  <a:lnTo>
+                    <a:pt x="0" y="6"/>
+                  </a:lnTo>
+                  <a:lnTo>
+                    <a:pt x="15" y="0"/>
+                  </a:lnTo>
+                  <a:lnTo>
+                    <a:pt x="63" y="114"/>
+                  </a:lnTo>
+                  <a:lnTo>
+                    <a:pt x="266" y="320"/>
+                  </a:lnTo>
+                  <a:lnTo>
+                    <a:pt x="257" y="332"/>
+                  </a:lnTo>
+                  <a:close/>
+                </a:path>
+              </a:pathLst>
+            </a:custGeom>
+            <a:grpFill/>
+            <a:ln>
+              <a:noFill/>
+            </a:ln>
+            <a:extLst>
+              <a:ext uri="{91240B29-F687-4f45-9708-019B960494DF}">
+                <a14:hiddenLine xmlns="" xmlns:a16="http://schemas.microsoft.com/office/drawing/2014/main" xmlns:p14="http://schemas.microsoft.com/office/powerpoint/2010/main" xmlns:a14="http://schemas.microsoft.com/office/drawing/2010/main" w="9525">
+                  <a:solidFill>
+                    <a:srgbClr val="000000"/>
+                  </a:solidFill>
+                  <a:round/>
+                  <a:headEnd/>
+                  <a:tailEnd/>
+                </a14:hiddenLine>
+              </a:ext>
+            </a:extLst>
+          </p:spPr>
+          <p:txBody>
+            <a:bodyPr/>
+            <a:lstStyle/>
+            <a:p>
+              <a:endParaRPr lang="es-AR"/>
+            </a:p>
+          </p:txBody>
+        </p:sp>
+        <p:sp>
+          <p:nvSpPr>
+            <p:cNvPr id="86" name="Freeform 15">
+              <a:extLst>
+                <a:ext uri="{FF2B5EF4-FFF2-40B4-BE49-F238E27FC236}">
+                  <a16:creationId xmlns:a16="http://schemas.microsoft.com/office/drawing/2014/main" id="{B88FFB19-5A5E-4078-B467-9D4ABD21BD9A}"/>
+                </a:ext>
+                <a:ext uri="{C183D7F6-B498-43B3-948B-1728B52AA6E4}">
+                  <adec:decorative xmlns:adec="http://schemas.microsoft.com/office/drawing/2017/decorative" val="1"/>
+                </a:ext>
+              </a:extLst>
+            </p:cNvPr>
+            <p:cNvSpPr>
+              <a:spLocks noEditPoints="1"/>
+            </p:cNvSpPr>
+            <p:nvPr>
+              <p:extLst>
+                <p:ext uri="{386F3935-93C4-4BCD-93E2-E3B085C9AB24}">
+                  <p16:designElem xmlns:p16="http://schemas.microsoft.com/office/powerpoint/2015/main" val="1"/>
+                </p:ext>
+              </p:extLst>
+            </p:nvPr>
+          </p:nvSpPr>
+          <p:spPr bwMode="auto">
+            <a:xfrm>
+              <a:off x="1020762" y="488950"/>
+              <a:ext cx="161925" cy="147638"/>
+            </a:xfrm>
+            <a:custGeom>
+              <a:avLst/>
+              <a:gdLst/>
+              <a:ahLst/>
+              <a:cxnLst/>
+              <a:rect l="0" t="0" r="r" b="b"/>
+              <a:pathLst>
+                <a:path w="34" h="31">
+                  <a:moveTo>
+                    <a:pt x="17" y="31"/>
+                  </a:moveTo>
+                  <a:cubicBezTo>
+                    <a:pt x="13" y="31"/>
+                    <a:pt x="9" y="30"/>
+                    <a:pt x="6" y="27"/>
+                  </a:cubicBezTo>
+                  <a:cubicBezTo>
+                    <a:pt x="0" y="20"/>
+                    <a:pt x="0" y="10"/>
+                    <a:pt x="6" y="4"/>
+                  </a:cubicBezTo>
+                  <a:cubicBezTo>
+                    <a:pt x="9" y="1"/>
+                    <a:pt x="13" y="0"/>
+                    <a:pt x="17" y="0"/>
+                  </a:cubicBezTo>
+                  <a:cubicBezTo>
+                    <a:pt x="21" y="0"/>
+                    <a:pt x="25" y="1"/>
+                    <a:pt x="28" y="4"/>
+                  </a:cubicBezTo>
+                  <a:cubicBezTo>
+                    <a:pt x="34" y="10"/>
+                    <a:pt x="34" y="20"/>
+                    <a:pt x="28" y="27"/>
+                  </a:cubicBezTo>
+                  <a:cubicBezTo>
+                    <a:pt x="25" y="30"/>
+                    <a:pt x="21" y="31"/>
+                    <a:pt x="17" y="31"/>
+                  </a:cubicBezTo>
+                  <a:close/>
+                  <a:moveTo>
+                    <a:pt x="17" y="4"/>
+                  </a:moveTo>
+                  <a:cubicBezTo>
+                    <a:pt x="14" y="4"/>
+                    <a:pt x="11" y="5"/>
+                    <a:pt x="9" y="7"/>
+                  </a:cubicBezTo>
+                  <a:cubicBezTo>
+                    <a:pt x="4" y="12"/>
+                    <a:pt x="4" y="19"/>
+                    <a:pt x="9" y="24"/>
+                  </a:cubicBezTo>
+                  <a:cubicBezTo>
+                    <a:pt x="11" y="26"/>
+                    <a:pt x="14" y="27"/>
+                    <a:pt x="17" y="27"/>
+                  </a:cubicBezTo>
+                  <a:cubicBezTo>
+                    <a:pt x="20" y="27"/>
+                    <a:pt x="23" y="26"/>
+                    <a:pt x="25" y="24"/>
+                  </a:cubicBezTo>
+                  <a:cubicBezTo>
+                    <a:pt x="30" y="19"/>
+                    <a:pt x="30" y="12"/>
+                    <a:pt x="25" y="7"/>
+                  </a:cubicBezTo>
+                  <a:cubicBezTo>
+                    <a:pt x="23" y="5"/>
+                    <a:pt x="20" y="4"/>
+                    <a:pt x="17" y="4"/>
+                  </a:cubicBezTo>
+                  <a:close/>
+                </a:path>
+              </a:pathLst>
+            </a:custGeom>
+            <a:grpFill/>
+            <a:ln>
+              <a:noFill/>
+            </a:ln>
+            <a:extLst>
+              <a:ext uri="{91240B29-F687-4f45-9708-019B960494DF}">
+                <a14:hiddenLine xmlns="" xmlns:a16="http://schemas.microsoft.com/office/drawing/2014/main" xmlns:p14="http://schemas.microsoft.com/office/powerpoint/2010/main" xmlns:a14="http://schemas.microsoft.com/office/drawing/2010/main" w="9525">
+                  <a:solidFill>
+                    <a:srgbClr val="000000"/>
+                  </a:solidFill>
+                  <a:round/>
+                  <a:headEnd/>
+                  <a:tailEnd/>
+                </a14:hiddenLine>
+              </a:ext>
+            </a:extLst>
+          </p:spPr>
+          <p:txBody>
+            <a:bodyPr/>
+            <a:lstStyle/>
+            <a:p>
+              <a:endParaRPr lang="es-AR"/>
+            </a:p>
+          </p:txBody>
+        </p:sp>
+        <p:sp>
+          <p:nvSpPr>
+            <p:cNvPr id="87" name="Line 16">
+              <a:extLst>
+                <a:ext uri="{FF2B5EF4-FFF2-40B4-BE49-F238E27FC236}">
+                  <a16:creationId xmlns:a16="http://schemas.microsoft.com/office/drawing/2014/main" id="{11042975-3D19-4728-BCDA-D3F5CD633EDB}"/>
+                </a:ext>
+                <a:ext uri="{C183D7F6-B498-43B3-948B-1728B52AA6E4}">
+                  <adec:decorative xmlns:adec="http://schemas.microsoft.com/office/drawing/2017/decorative" val="1"/>
+                </a:ext>
+              </a:extLst>
+            </p:cNvPr>
+            <p:cNvSpPr>
+              <a:spLocks noChangeShapeType="1"/>
+            </p:cNvSpPr>
+            <p:nvPr>
+              <p:extLst>
+                <p:ext uri="{386F3935-93C4-4BCD-93E2-E3B085C9AB24}">
+                  <p16:designElem xmlns:p16="http://schemas.microsoft.com/office/powerpoint/2015/main" val="1"/>
+                </p:ext>
+              </p:extLst>
+            </p:nvPr>
+          </p:nvSpPr>
+          <p:spPr bwMode="auto">
+            <a:xfrm>
+              <a:off x="-4763" y="9525"/>
+              <a:ext cx="0" cy="0"/>
+            </a:xfrm>
+            <a:prstGeom prst="line">
+              <a:avLst/>
+            </a:prstGeom>
+            <a:grpFill/>
+            <a:ln w="15" cap="flat">
+              <a:solidFill>
+                <a:srgbClr val="FFFFFF"/>
+              </a:solidFill>
+              <a:prstDash val="solid"/>
+              <a:miter lim="800000"/>
+              <a:headEnd/>
+              <a:tailEnd/>
+            </a:ln>
+          </p:spPr>
+          <p:txBody>
+            <a:bodyPr/>
+            <a:lstStyle/>
+            <a:p>
+              <a:endParaRPr lang="es-AR"/>
+            </a:p>
+          </p:txBody>
+        </p:sp>
+        <p:sp>
+          <p:nvSpPr>
+            <p:cNvPr id="88" name="Freeform 17">
+              <a:extLst>
+                <a:ext uri="{FF2B5EF4-FFF2-40B4-BE49-F238E27FC236}">
+                  <a16:creationId xmlns:a16="http://schemas.microsoft.com/office/drawing/2014/main" id="{A28972BD-D2E1-4DCA-A907-2E3B6F606649}"/>
+                </a:ext>
+                <a:ext uri="{C183D7F6-B498-43B3-948B-1728B52AA6E4}">
+                  <adec:decorative xmlns:adec="http://schemas.microsoft.com/office/drawing/2017/decorative" val="1"/>
+                </a:ext>
+              </a:extLst>
+            </p:cNvPr>
+            <p:cNvSpPr/>
+            <p:nvPr>
+              <p:extLst>
+                <p:ext uri="{386F3935-93C4-4BCD-93E2-E3B085C9AB24}">
+                  <p16:designElem xmlns:p16="http://schemas.microsoft.com/office/powerpoint/2015/main" val="1"/>
+                </p:ext>
+              </p:extLst>
+            </p:nvPr>
+          </p:nvSpPr>
+          <p:spPr bwMode="auto">
+            <a:xfrm>
+              <a:off x="9525" y="1801813"/>
+              <a:ext cx="123825" cy="127000"/>
+            </a:xfrm>
+            <a:custGeom>
+              <a:avLst/>
+              <a:gdLst/>
+              <a:ahLst/>
+              <a:cxnLst/>
+              <a:rect l="0" t="0" r="r" b="b"/>
+              <a:pathLst>
+                <a:path w="78" h="80">
+                  <a:moveTo>
+                    <a:pt x="6" y="80"/>
+                  </a:moveTo>
+                  <a:lnTo>
+                    <a:pt x="0" y="71"/>
+                  </a:lnTo>
+                  <a:lnTo>
+                    <a:pt x="69" y="0"/>
+                  </a:lnTo>
+                  <a:lnTo>
+                    <a:pt x="78" y="9"/>
+                  </a:lnTo>
+                  <a:lnTo>
+                    <a:pt x="6" y="80"/>
+                  </a:lnTo>
+                  <a:close/>
+                </a:path>
+              </a:pathLst>
+            </a:custGeom>
+            <a:grpFill/>
+            <a:ln>
+              <a:noFill/>
+            </a:ln>
+            <a:extLst>
+              <a:ext uri="{91240B29-F687-4f45-9708-019B960494DF}">
+                <a14:hiddenLine xmlns="" xmlns:a16="http://schemas.microsoft.com/office/drawing/2014/main" xmlns:p14="http://schemas.microsoft.com/office/powerpoint/2010/main" xmlns:a14="http://schemas.microsoft.com/office/drawing/2010/main" w="9525">
+                  <a:solidFill>
+                    <a:srgbClr val="000000"/>
+                  </a:solidFill>
+                  <a:round/>
+                  <a:headEnd/>
+                  <a:tailEnd/>
+                </a14:hiddenLine>
+              </a:ext>
+            </a:extLst>
+          </p:spPr>
+          <p:txBody>
+            <a:bodyPr/>
+            <a:lstStyle/>
+            <a:p>
+              <a:endParaRPr lang="es-AR"/>
+            </a:p>
+          </p:txBody>
+        </p:sp>
+        <p:sp>
+          <p:nvSpPr>
+            <p:cNvPr id="92" name="Freeform 18">
+              <a:extLst>
+                <a:ext uri="{FF2B5EF4-FFF2-40B4-BE49-F238E27FC236}">
+                  <a16:creationId xmlns:a16="http://schemas.microsoft.com/office/drawing/2014/main" id="{1C806824-5C2D-4747-B038-69EE4074B366}"/>
+                </a:ext>
+                <a:ext uri="{C183D7F6-B498-43B3-948B-1728B52AA6E4}">
+                  <adec:decorative xmlns:adec="http://schemas.microsoft.com/office/drawing/2017/decorative" val="1"/>
+                </a:ext>
+              </a:extLst>
+            </p:cNvPr>
+            <p:cNvSpPr/>
+            <p:nvPr>
+              <p:extLst>
+                <p:ext uri="{386F3935-93C4-4BCD-93E2-E3B085C9AB24}">
+                  <p16:designElem xmlns:p16="http://schemas.microsoft.com/office/powerpoint/2015/main" val="1"/>
+                </p:ext>
+              </p:extLst>
+            </p:nvPr>
+          </p:nvSpPr>
+          <p:spPr bwMode="auto">
+            <a:xfrm>
+              <a:off x="-9525" y="3549650"/>
+              <a:ext cx="147638" cy="481013"/>
+            </a:xfrm>
+            <a:custGeom>
+              <a:avLst/>
+              <a:gdLst/>
+              <a:ahLst/>
+              <a:cxnLst/>
+              <a:rect l="0" t="0" r="r" b="b"/>
+              <a:pathLst>
+                <a:path w="93" h="303">
+                  <a:moveTo>
+                    <a:pt x="93" y="303"/>
+                  </a:moveTo>
+                  <a:lnTo>
+                    <a:pt x="78" y="303"/>
+                  </a:lnTo>
+                  <a:lnTo>
+                    <a:pt x="78" y="78"/>
+                  </a:lnTo>
+                  <a:lnTo>
+                    <a:pt x="0" y="12"/>
+                  </a:lnTo>
+                  <a:lnTo>
+                    <a:pt x="12" y="0"/>
+                  </a:lnTo>
+                  <a:lnTo>
+                    <a:pt x="93" y="69"/>
+                  </a:lnTo>
+                  <a:lnTo>
+                    <a:pt x="93" y="303"/>
+                  </a:lnTo>
+                  <a:close/>
+                </a:path>
+              </a:pathLst>
+            </a:custGeom>
+            <a:grpFill/>
+            <a:ln>
+              <a:noFill/>
+            </a:ln>
+            <a:extLst>
+              <a:ext uri="{91240B29-F687-4f45-9708-019B960494DF}">
+                <a14:hiddenLine xmlns="" xmlns:a16="http://schemas.microsoft.com/office/drawing/2014/main" xmlns:p14="http://schemas.microsoft.com/office/powerpoint/2010/main" xmlns:a14="http://schemas.microsoft.com/office/drawing/2010/main" w="9525">
+                  <a:solidFill>
+                    <a:srgbClr val="000000"/>
+                  </a:solidFill>
+                  <a:round/>
+                  <a:headEnd/>
+                  <a:tailEnd/>
+                </a14:hiddenLine>
+              </a:ext>
+            </a:extLst>
+          </p:spPr>
+          <p:txBody>
+            <a:bodyPr/>
+            <a:lstStyle/>
+            <a:p>
+              <a:endParaRPr lang="es-AR"/>
+            </a:p>
+          </p:txBody>
+        </p:sp>
+        <p:sp>
+          <p:nvSpPr>
+            <p:cNvPr id="98" name="Freeform 19">
+              <a:extLst>
+                <a:ext uri="{FF2B5EF4-FFF2-40B4-BE49-F238E27FC236}">
+                  <a16:creationId xmlns:a16="http://schemas.microsoft.com/office/drawing/2014/main" id="{3B33F710-16D7-4F48-BFCA-66C9CA2352CB}"/>
+                </a:ext>
+                <a:ext uri="{C183D7F6-B498-43B3-948B-1728B52AA6E4}">
+                  <adec:decorative xmlns:adec="http://schemas.microsoft.com/office/drawing/2017/decorative" val="1"/>
+                </a:ext>
+              </a:extLst>
+            </p:cNvPr>
+            <p:cNvSpPr/>
+            <p:nvPr>
+              <p:extLst>
+                <p:ext uri="{386F3935-93C4-4BCD-93E2-E3B085C9AB24}">
+                  <p16:designElem xmlns:p16="http://schemas.microsoft.com/office/powerpoint/2015/main" val="1"/>
+                </p:ext>
+              </p:extLst>
+            </p:nvPr>
+          </p:nvSpPr>
+          <p:spPr bwMode="auto">
+            <a:xfrm>
+              <a:off x="128587" y="1382713"/>
+              <a:ext cx="142875" cy="476250"/>
+            </a:xfrm>
+            <a:custGeom>
+              <a:avLst/>
+              <a:gdLst/>
+              <a:ahLst/>
+              <a:cxnLst/>
+              <a:rect l="0" t="0" r="r" b="b"/>
+              <a:pathLst>
+                <a:path w="90" h="300">
+                  <a:moveTo>
+                    <a:pt x="90" y="300"/>
+                  </a:moveTo>
+                  <a:lnTo>
+                    <a:pt x="78" y="300"/>
+                  </a:lnTo>
+                  <a:lnTo>
+                    <a:pt x="78" y="84"/>
+                  </a:lnTo>
+                  <a:lnTo>
+                    <a:pt x="0" y="9"/>
+                  </a:lnTo>
+                  <a:lnTo>
+                    <a:pt x="9" y="0"/>
+                  </a:lnTo>
+                  <a:lnTo>
+                    <a:pt x="90" y="81"/>
+                  </a:lnTo>
+                  <a:lnTo>
+                    <a:pt x="90" y="300"/>
+                  </a:lnTo>
+                  <a:close/>
+                </a:path>
+              </a:pathLst>
+            </a:custGeom>
+            <a:grpFill/>
+            <a:ln>
+              <a:noFill/>
+            </a:ln>
+            <a:extLst>
+              <a:ext uri="{91240B29-F687-4f45-9708-019B960494DF}">
+                <a14:hiddenLine xmlns="" xmlns:a16="http://schemas.microsoft.com/office/drawing/2014/main" xmlns:p14="http://schemas.microsoft.com/office/powerpoint/2010/main" xmlns:a14="http://schemas.microsoft.com/office/drawing/2010/main" w="9525">
+                  <a:solidFill>
+                    <a:srgbClr val="000000"/>
+                  </a:solidFill>
+                  <a:round/>
+                  <a:headEnd/>
+                  <a:tailEnd/>
+                </a14:hiddenLine>
+              </a:ext>
+            </a:extLst>
+          </p:spPr>
+          <p:txBody>
+            <a:bodyPr/>
+            <a:lstStyle/>
+            <a:p>
+              <a:endParaRPr lang="es-AR"/>
+            </a:p>
+          </p:txBody>
+        </p:sp>
+        <p:sp>
+          <p:nvSpPr>
+            <p:cNvPr id="99" name="Freeform 20">
+              <a:extLst>
+                <a:ext uri="{FF2B5EF4-FFF2-40B4-BE49-F238E27FC236}">
+                  <a16:creationId xmlns:a16="http://schemas.microsoft.com/office/drawing/2014/main" id="{6C8C8ED4-90FA-4E97-AAF0-D5D51E6A935E}"/>
+                </a:ext>
+                <a:ext uri="{C183D7F6-B498-43B3-948B-1728B52AA6E4}">
+                  <adec:decorative xmlns:adec="http://schemas.microsoft.com/office/drawing/2017/decorative" val="1"/>
+                </a:ext>
+              </a:extLst>
+            </p:cNvPr>
+            <p:cNvSpPr>
+              <a:spLocks noEditPoints="1"/>
+            </p:cNvSpPr>
+            <p:nvPr>
+              <p:extLst>
+                <p:ext uri="{386F3935-93C4-4BCD-93E2-E3B085C9AB24}">
+                  <p16:designElem xmlns:p16="http://schemas.microsoft.com/office/powerpoint/2015/main" val="1"/>
+                </p:ext>
+              </p:extLst>
+            </p:nvPr>
+          </p:nvSpPr>
+          <p:spPr bwMode="auto">
+            <a:xfrm>
+              <a:off x="204787" y="1849438"/>
+              <a:ext cx="114300" cy="107950"/>
+            </a:xfrm>
+            <a:custGeom>
+              <a:avLst/>
+              <a:gdLst/>
+              <a:ahLst/>
+              <a:cxnLst/>
+              <a:rect l="0" t="0" r="r" b="b"/>
+              <a:pathLst>
+                <a:path w="24" h="23">
+                  <a:moveTo>
+                    <a:pt x="12" y="23"/>
+                  </a:moveTo>
+                  <a:cubicBezTo>
+                    <a:pt x="6" y="23"/>
+                    <a:pt x="0" y="18"/>
+                    <a:pt x="0" y="12"/>
+                  </a:cubicBezTo>
+                  <a:cubicBezTo>
+                    <a:pt x="0" y="5"/>
+                    <a:pt x="6" y="0"/>
+                    <a:pt x="12" y="0"/>
+                  </a:cubicBezTo>
+                  <a:cubicBezTo>
+                    <a:pt x="18" y="0"/>
+                    <a:pt x="24" y="5"/>
+                    <a:pt x="24" y="12"/>
+                  </a:cubicBezTo>
+                  <a:cubicBezTo>
+                    <a:pt x="24" y="18"/>
+                    <a:pt x="18" y="23"/>
+                    <a:pt x="12" y="23"/>
+                  </a:cubicBezTo>
+                  <a:close/>
+                  <a:moveTo>
+                    <a:pt x="12" y="4"/>
+                  </a:moveTo>
+                  <a:cubicBezTo>
+                    <a:pt x="8" y="4"/>
+                    <a:pt x="4" y="8"/>
+                    <a:pt x="4" y="12"/>
+                  </a:cubicBezTo>
+                  <a:cubicBezTo>
+                    <a:pt x="4" y="16"/>
+                    <a:pt x="8" y="19"/>
+                    <a:pt x="12" y="19"/>
+                  </a:cubicBezTo>
+                  <a:cubicBezTo>
+                    <a:pt x="16" y="19"/>
+                    <a:pt x="20" y="16"/>
+                    <a:pt x="20" y="12"/>
+                  </a:cubicBezTo>
+                  <a:cubicBezTo>
+                    <a:pt x="20" y="8"/>
+                    <a:pt x="16" y="4"/>
+                    <a:pt x="12" y="4"/>
+                  </a:cubicBezTo>
+                  <a:close/>
+                </a:path>
+              </a:pathLst>
+            </a:custGeom>
+            <a:grpFill/>
+            <a:ln>
+              <a:noFill/>
+            </a:ln>
+            <a:extLst>
+              <a:ext uri="{91240B29-F687-4f45-9708-019B960494DF}">
+                <a14:hiddenLine xmlns="" xmlns:a16="http://schemas.microsoft.com/office/drawing/2014/main" xmlns:p14="http://schemas.microsoft.com/office/powerpoint/2010/main" xmlns:a14="http://schemas.microsoft.com/office/drawing/2010/main" w="9525">
+                  <a:solidFill>
+                    <a:srgbClr val="000000"/>
+                  </a:solidFill>
+                  <a:round/>
+                  <a:headEnd/>
+                  <a:tailEnd/>
+                </a14:hiddenLine>
+              </a:ext>
+            </a:extLst>
+          </p:spPr>
+          <p:txBody>
+            <a:bodyPr/>
+            <a:lstStyle/>
+            <a:p>
+              <a:endParaRPr lang="es-AR"/>
+            </a:p>
+          </p:txBody>
+        </p:sp>
+        <p:sp>
+          <p:nvSpPr>
+            <p:cNvPr id="100" name="Rectangle 21">
+              <a:extLst>
+                <a:ext uri="{FF2B5EF4-FFF2-40B4-BE49-F238E27FC236}">
+                  <a16:creationId xmlns:a16="http://schemas.microsoft.com/office/drawing/2014/main" id="{6C5EB9C1-B25F-4172-8A96-5950ECC828FC}"/>
+                </a:ext>
+                <a:ext uri="{C183D7F6-B498-43B3-948B-1728B52AA6E4}">
+                  <adec:decorative xmlns:adec="http://schemas.microsoft.com/office/drawing/2017/decorative" val="1"/>
+                </a:ext>
+              </a:extLst>
+            </p:cNvPr>
+            <p:cNvSpPr>
+              <a:spLocks noChangeArrowheads="1"/>
+            </p:cNvSpPr>
+            <p:nvPr>
+              <p:extLst>
+                <p:ext uri="{386F3935-93C4-4BCD-93E2-E3B085C9AB24}">
+                  <p16:designElem xmlns:p16="http://schemas.microsoft.com/office/powerpoint/2015/main" val="1"/>
+                </p:ext>
+              </p:extLst>
+            </p:nvPr>
+          </p:nvSpPr>
+          <p:spPr bwMode="auto">
+            <a:xfrm>
+              <a:off x="133350" y="4662488"/>
+              <a:ext cx="23813" cy="2181225"/>
+            </a:xfrm>
+            <a:prstGeom prst="rect">
+              <a:avLst/>
+            </a:prstGeom>
+            <a:grpFill/>
+            <a:ln>
+              <a:noFill/>
+            </a:ln>
+            <a:extLst>
+              <a:ext uri="{91240B29-F687-4f45-9708-019B960494DF}">
+                <a14:hiddenLine xmlns="" xmlns:a16="http://schemas.microsoft.com/office/drawing/2014/main" xmlns:p14="http://schemas.microsoft.com/office/powerpoint/2010/main" xmlns:a14="http://schemas.microsoft.com/office/drawing/2010/main" w="9525">
+                  <a:solidFill>
+                    <a:srgbClr val="000000"/>
+                  </a:solidFill>
+                  <a:miter lim="800000"/>
+                  <a:headEnd/>
+                  <a:tailEnd/>
+                </a14:hiddenLine>
+              </a:ext>
+            </a:extLst>
+          </p:spPr>
+          <p:txBody>
+            <a:bodyPr/>
+            <a:lstStyle/>
+            <a:p>
+              <a:endParaRPr lang="es-AR"/>
+            </a:p>
+          </p:txBody>
+        </p:sp>
+        <p:sp>
+          <p:nvSpPr>
+            <p:cNvPr id="101" name="Freeform 22">
+              <a:extLst>
+                <a:ext uri="{FF2B5EF4-FFF2-40B4-BE49-F238E27FC236}">
+                  <a16:creationId xmlns:a16="http://schemas.microsoft.com/office/drawing/2014/main" id="{097E6E8A-9373-4655-882B-21715CCE97EE}"/>
+                </a:ext>
+                <a:ext uri="{C183D7F6-B498-43B3-948B-1728B52AA6E4}">
+                  <adec:decorative xmlns:adec="http://schemas.microsoft.com/office/drawing/2017/decorative" val="1"/>
+                </a:ext>
+              </a:extLst>
+            </p:cNvPr>
+            <p:cNvSpPr/>
+            <p:nvPr>
+              <p:extLst>
+                <p:ext uri="{386F3935-93C4-4BCD-93E2-E3B085C9AB24}">
+                  <p16:designElem xmlns:p16="http://schemas.microsoft.com/office/powerpoint/2015/main" val="1"/>
+                </p:ext>
+              </p:extLst>
+            </p:nvPr>
+          </p:nvSpPr>
+          <p:spPr bwMode="auto">
+            <a:xfrm>
+              <a:off x="223837" y="5041900"/>
+              <a:ext cx="369888" cy="1801813"/>
+            </a:xfrm>
+            <a:custGeom>
+              <a:avLst/>
+              <a:gdLst/>
+              <a:ahLst/>
+              <a:cxnLst/>
+              <a:rect l="0" t="0" r="r" b="b"/>
+              <a:pathLst>
+                <a:path w="233" h="1135">
+                  <a:moveTo>
+                    <a:pt x="15" y="1135"/>
+                  </a:moveTo>
+                  <a:lnTo>
+                    <a:pt x="0" y="1135"/>
+                  </a:lnTo>
+                  <a:lnTo>
+                    <a:pt x="0" y="515"/>
+                  </a:lnTo>
+                  <a:lnTo>
+                    <a:pt x="0" y="512"/>
+                  </a:lnTo>
+                  <a:lnTo>
+                    <a:pt x="218" y="0"/>
+                  </a:lnTo>
+                  <a:lnTo>
+                    <a:pt x="233" y="6"/>
+                  </a:lnTo>
+                  <a:lnTo>
+                    <a:pt x="15" y="518"/>
+                  </a:lnTo>
+                  <a:lnTo>
+                    <a:pt x="15" y="1135"/>
+                  </a:lnTo>
+                  <a:close/>
+                </a:path>
+              </a:pathLst>
+            </a:custGeom>
+            <a:grpFill/>
+            <a:ln>
+              <a:noFill/>
+            </a:ln>
+            <a:extLst>
+              <a:ext uri="{91240B29-F687-4f45-9708-019B960494DF}">
+                <a14:hiddenLine xmlns="" xmlns:a16="http://schemas.microsoft.com/office/drawing/2014/main" xmlns:p14="http://schemas.microsoft.com/office/powerpoint/2010/main" xmlns:a14="http://schemas.microsoft.com/office/drawing/2010/main" w="9525">
+                  <a:solidFill>
+                    <a:srgbClr val="000000"/>
+                  </a:solidFill>
+                  <a:round/>
+                  <a:headEnd/>
+                  <a:tailEnd/>
+                </a14:hiddenLine>
+              </a:ext>
+            </a:extLst>
+          </p:spPr>
+          <p:txBody>
+            <a:bodyPr/>
+            <a:lstStyle/>
+            <a:p>
+              <a:endParaRPr lang="es-AR"/>
+            </a:p>
+          </p:txBody>
+        </p:sp>
+        <p:sp>
+          <p:nvSpPr>
+            <p:cNvPr id="102" name="Freeform 23">
+              <a:extLst>
+                <a:ext uri="{FF2B5EF4-FFF2-40B4-BE49-F238E27FC236}">
+                  <a16:creationId xmlns:a16="http://schemas.microsoft.com/office/drawing/2014/main" id="{EB8CC766-1206-4372-ACAF-8230AF4D5421}"/>
+                </a:ext>
+                <a:ext uri="{C183D7F6-B498-43B3-948B-1728B52AA6E4}">
+                  <adec:decorative xmlns:adec="http://schemas.microsoft.com/office/drawing/2017/decorative" val="1"/>
+                </a:ext>
+              </a:extLst>
+            </p:cNvPr>
+            <p:cNvSpPr>
+              <a:spLocks noEditPoints="1"/>
+            </p:cNvSpPr>
+            <p:nvPr>
+              <p:extLst>
+                <p:ext uri="{386F3935-93C4-4BCD-93E2-E3B085C9AB24}">
+                  <p16:designElem xmlns:p16="http://schemas.microsoft.com/office/powerpoint/2015/main" val="1"/>
+                </p:ext>
+              </p:extLst>
+            </p:nvPr>
+          </p:nvSpPr>
+          <p:spPr bwMode="auto">
+            <a:xfrm>
+              <a:off x="52387" y="4481513"/>
+              <a:ext cx="190500" cy="190500"/>
+            </a:xfrm>
+            <a:custGeom>
+              <a:avLst/>
+              <a:gdLst/>
+              <a:ahLst/>
+              <a:cxnLst/>
+              <a:rect l="0" t="0" r="r" b="b"/>
+              <a:pathLst>
+                <a:path w="40" h="40">
+                  <a:moveTo>
+                    <a:pt x="20" y="40"/>
+                  </a:moveTo>
+                  <a:cubicBezTo>
+                    <a:pt x="9" y="40"/>
+                    <a:pt x="0" y="31"/>
+                    <a:pt x="0" y="20"/>
+                  </a:cubicBezTo>
+                  <a:cubicBezTo>
+                    <a:pt x="0" y="9"/>
+                    <a:pt x="9" y="0"/>
+                    <a:pt x="20" y="0"/>
+                  </a:cubicBezTo>
+                  <a:cubicBezTo>
+                    <a:pt x="31" y="0"/>
+                    <a:pt x="40" y="9"/>
+                    <a:pt x="40" y="20"/>
+                  </a:cubicBezTo>
+                  <a:cubicBezTo>
+                    <a:pt x="40" y="31"/>
+                    <a:pt x="31" y="40"/>
+                    <a:pt x="20" y="40"/>
+                  </a:cubicBezTo>
+                  <a:close/>
+                  <a:moveTo>
+                    <a:pt x="20" y="4"/>
+                  </a:moveTo>
+                  <a:cubicBezTo>
+                    <a:pt x="11" y="4"/>
+                    <a:pt x="4" y="11"/>
+                    <a:pt x="4" y="20"/>
+                  </a:cubicBezTo>
+                  <a:cubicBezTo>
+                    <a:pt x="4" y="29"/>
+                    <a:pt x="11" y="36"/>
+                    <a:pt x="20" y="36"/>
+                  </a:cubicBezTo>
+                  <a:cubicBezTo>
+                    <a:pt x="28" y="36"/>
+                    <a:pt x="36" y="29"/>
+                    <a:pt x="36" y="20"/>
+                  </a:cubicBezTo>
+                  <a:cubicBezTo>
+                    <a:pt x="36" y="11"/>
+                    <a:pt x="28" y="4"/>
+                    <a:pt x="20" y="4"/>
+                  </a:cubicBezTo>
+                  <a:close/>
+                </a:path>
+              </a:pathLst>
+            </a:custGeom>
+            <a:grpFill/>
+            <a:ln>
+              <a:noFill/>
+            </a:ln>
+            <a:extLst>
+              <a:ext uri="{91240B29-F687-4f45-9708-019B960494DF}">
+                <a14:hiddenLine xmlns="" xmlns:a16="http://schemas.microsoft.com/office/drawing/2014/main" xmlns:p14="http://schemas.microsoft.com/office/powerpoint/2010/main" xmlns:a14="http://schemas.microsoft.com/office/drawing/2010/main" w="9525">
+                  <a:solidFill>
+                    <a:srgbClr val="000000"/>
+                  </a:solidFill>
+                  <a:round/>
+                  <a:headEnd/>
+                  <a:tailEnd/>
+                </a14:hiddenLine>
+              </a:ext>
+            </a:extLst>
+          </p:spPr>
+          <p:txBody>
+            <a:bodyPr/>
+            <a:lstStyle/>
+            <a:p>
+              <a:endParaRPr lang="es-AR"/>
+            </a:p>
+          </p:txBody>
+        </p:sp>
+        <p:sp>
+          <p:nvSpPr>
+            <p:cNvPr id="103" name="Freeform 24">
+              <a:extLst>
+                <a:ext uri="{FF2B5EF4-FFF2-40B4-BE49-F238E27FC236}">
+                  <a16:creationId xmlns:a16="http://schemas.microsoft.com/office/drawing/2014/main" id="{1C8E2511-2489-47B2-9C19-C410910DD901}"/>
+                </a:ext>
+                <a:ext uri="{C183D7F6-B498-43B3-948B-1728B52AA6E4}">
+                  <adec:decorative xmlns:adec="http://schemas.microsoft.com/office/drawing/2017/decorative" val="1"/>
+                </a:ext>
+              </a:extLst>
+            </p:cNvPr>
+            <p:cNvSpPr/>
+            <p:nvPr>
+              <p:extLst>
+                <p:ext uri="{386F3935-93C4-4BCD-93E2-E3B085C9AB24}">
+                  <p16:designElem xmlns:p16="http://schemas.microsoft.com/office/powerpoint/2015/main" val="1"/>
+                </p:ext>
+              </p:extLst>
+            </p:nvPr>
+          </p:nvSpPr>
+          <p:spPr bwMode="auto">
+            <a:xfrm>
+              <a:off x="-14288" y="5627688"/>
+              <a:ext cx="85725" cy="1216025"/>
+            </a:xfrm>
+            <a:custGeom>
+              <a:avLst/>
+              <a:gdLst/>
+              <a:ahLst/>
+              <a:cxnLst/>
+              <a:rect l="0" t="0" r="r" b="b"/>
+              <a:pathLst>
+                <a:path w="54" h="766">
+                  <a:moveTo>
+                    <a:pt x="54" y="766"/>
+                  </a:moveTo>
+                  <a:lnTo>
+                    <a:pt x="36" y="766"/>
+                  </a:lnTo>
+                  <a:lnTo>
+                    <a:pt x="36" y="149"/>
+                  </a:lnTo>
+                  <a:lnTo>
+                    <a:pt x="0" y="3"/>
+                  </a:lnTo>
+                  <a:lnTo>
+                    <a:pt x="18" y="0"/>
+                  </a:lnTo>
+                  <a:lnTo>
+                    <a:pt x="54" y="146"/>
+                  </a:lnTo>
+                  <a:lnTo>
+                    <a:pt x="54" y="766"/>
+                  </a:lnTo>
+                  <a:close/>
+                </a:path>
+              </a:pathLst>
+            </a:custGeom>
+            <a:grpFill/>
+            <a:ln>
+              <a:noFill/>
+            </a:ln>
+            <a:extLst>
+              <a:ext uri="{91240B29-F687-4f45-9708-019B960494DF}">
+                <a14:hiddenLine xmlns="" xmlns:a16="http://schemas.microsoft.com/office/drawing/2014/main" xmlns:p14="http://schemas.microsoft.com/office/powerpoint/2010/main" xmlns:a14="http://schemas.microsoft.com/office/drawing/2010/main" w="9525">
+                  <a:solidFill>
+                    <a:srgbClr val="000000"/>
+                  </a:solidFill>
+                  <a:round/>
+                  <a:headEnd/>
+                  <a:tailEnd/>
+                </a14:hiddenLine>
+              </a:ext>
+            </a:extLst>
+          </p:spPr>
+          <p:txBody>
+            <a:bodyPr/>
+            <a:lstStyle/>
+            <a:p>
+              <a:endParaRPr lang="es-AR"/>
+            </a:p>
+          </p:txBody>
+        </p:sp>
+        <p:sp>
+          <p:nvSpPr>
+            <p:cNvPr id="104" name="Freeform 25">
+              <a:extLst>
+                <a:ext uri="{FF2B5EF4-FFF2-40B4-BE49-F238E27FC236}">
+                  <a16:creationId xmlns:a16="http://schemas.microsoft.com/office/drawing/2014/main" id="{D7820196-0A47-47EF-832C-A688E8977D60}"/>
+                </a:ext>
+                <a:ext uri="{C183D7F6-B498-43B3-948B-1728B52AA6E4}">
+                  <adec:decorative xmlns:adec="http://schemas.microsoft.com/office/drawing/2017/decorative" val="1"/>
+                </a:ext>
+              </a:extLst>
+            </p:cNvPr>
+            <p:cNvSpPr>
+              <a:spLocks noEditPoints="1"/>
+            </p:cNvSpPr>
+            <p:nvPr>
+              <p:extLst>
+                <p:ext uri="{386F3935-93C4-4BCD-93E2-E3B085C9AB24}">
+                  <p16:designElem xmlns:p16="http://schemas.microsoft.com/office/powerpoint/2015/main" val="1"/>
+                </p:ext>
+              </p:extLst>
+            </p:nvPr>
+          </p:nvSpPr>
+          <p:spPr bwMode="auto">
+            <a:xfrm>
+              <a:off x="527050" y="4867275"/>
+              <a:ext cx="190500" cy="188913"/>
+            </a:xfrm>
+            <a:custGeom>
+              <a:avLst/>
+              <a:gdLst/>
+              <a:ahLst/>
+              <a:cxnLst/>
+              <a:rect l="0" t="0" r="r" b="b"/>
+              <a:pathLst>
+                <a:path w="40" h="40">
+                  <a:moveTo>
+                    <a:pt x="20" y="40"/>
+                  </a:moveTo>
+                  <a:cubicBezTo>
+                    <a:pt x="9" y="40"/>
+                    <a:pt x="0" y="31"/>
+                    <a:pt x="0" y="20"/>
+                  </a:cubicBezTo>
+                  <a:cubicBezTo>
+                    <a:pt x="0" y="9"/>
+                    <a:pt x="9" y="0"/>
+                    <a:pt x="20" y="0"/>
+                  </a:cubicBezTo>
+                  <a:cubicBezTo>
+                    <a:pt x="31" y="0"/>
+                    <a:pt x="40" y="9"/>
+                    <a:pt x="40" y="20"/>
+                  </a:cubicBezTo>
+                  <a:cubicBezTo>
+                    <a:pt x="40" y="31"/>
+                    <a:pt x="31" y="40"/>
+                    <a:pt x="20" y="40"/>
+                  </a:cubicBezTo>
+                  <a:close/>
+                  <a:moveTo>
+                    <a:pt x="20" y="4"/>
+                  </a:moveTo>
+                  <a:cubicBezTo>
+                    <a:pt x="11" y="4"/>
+                    <a:pt x="4" y="11"/>
+                    <a:pt x="4" y="20"/>
+                  </a:cubicBezTo>
+                  <a:cubicBezTo>
+                    <a:pt x="4" y="29"/>
+                    <a:pt x="11" y="36"/>
+                    <a:pt x="20" y="36"/>
+                  </a:cubicBezTo>
+                  <a:cubicBezTo>
+                    <a:pt x="29" y="36"/>
+                    <a:pt x="36" y="29"/>
+                    <a:pt x="36" y="20"/>
+                  </a:cubicBezTo>
+                  <a:cubicBezTo>
+                    <a:pt x="36" y="11"/>
+                    <a:pt x="29" y="4"/>
+                    <a:pt x="20" y="4"/>
+                  </a:cubicBezTo>
+                  <a:close/>
+                </a:path>
+              </a:pathLst>
+            </a:custGeom>
+            <a:grpFill/>
+            <a:ln>
+              <a:noFill/>
+            </a:ln>
+            <a:extLst>
+              <a:ext uri="{91240B29-F687-4f45-9708-019B960494DF}">
+                <a14:hiddenLine xmlns="" xmlns:a16="http://schemas.microsoft.com/office/drawing/2014/main" xmlns:p14="http://schemas.microsoft.com/office/powerpoint/2010/main" xmlns:a14="http://schemas.microsoft.com/office/drawing/2010/main" w="9525">
+                  <a:solidFill>
+                    <a:srgbClr val="000000"/>
+                  </a:solidFill>
+                  <a:round/>
+                  <a:headEnd/>
+                  <a:tailEnd/>
+                </a14:hiddenLine>
+              </a:ext>
+            </a:extLst>
+          </p:spPr>
+          <p:txBody>
+            <a:bodyPr/>
+            <a:lstStyle/>
+            <a:p>
+              <a:endParaRPr lang="es-AR"/>
+            </a:p>
+          </p:txBody>
+        </p:sp>
+        <p:sp>
+          <p:nvSpPr>
+            <p:cNvPr id="105" name="Freeform 26">
+              <a:extLst>
+                <a:ext uri="{FF2B5EF4-FFF2-40B4-BE49-F238E27FC236}">
+                  <a16:creationId xmlns:a16="http://schemas.microsoft.com/office/drawing/2014/main" id="{4982E0BF-34AE-48A3-AD6B-E0F3CD05DB34}"/>
+                </a:ext>
+                <a:ext uri="{C183D7F6-B498-43B3-948B-1728B52AA6E4}">
+                  <adec:decorative xmlns:adec="http://schemas.microsoft.com/office/drawing/2017/decorative" val="1"/>
+                </a:ext>
+              </a:extLst>
+            </p:cNvPr>
+            <p:cNvSpPr/>
+            <p:nvPr>
+              <p:extLst>
+                <p:ext uri="{386F3935-93C4-4BCD-93E2-E3B085C9AB24}">
+                  <p16:designElem xmlns:p16="http://schemas.microsoft.com/office/powerpoint/2015/main" val="1"/>
+                </p:ext>
+              </p:extLst>
+            </p:nvPr>
+          </p:nvSpPr>
+          <p:spPr bwMode="auto">
+            <a:xfrm>
+              <a:off x="309562" y="5422900"/>
+              <a:ext cx="374650" cy="1425575"/>
+            </a:xfrm>
+            <a:custGeom>
+              <a:avLst/>
+              <a:gdLst/>
+              <a:ahLst/>
+              <a:cxnLst/>
+              <a:rect l="0" t="0" r="r" b="b"/>
+              <a:pathLst>
+                <a:path w="236" h="898">
+                  <a:moveTo>
+                    <a:pt x="18" y="898"/>
+                  </a:moveTo>
+                  <a:lnTo>
+                    <a:pt x="0" y="898"/>
+                  </a:lnTo>
+                  <a:lnTo>
+                    <a:pt x="0" y="515"/>
+                  </a:lnTo>
+                  <a:lnTo>
+                    <a:pt x="3" y="512"/>
+                  </a:lnTo>
+                  <a:lnTo>
+                    <a:pt x="221" y="0"/>
+                  </a:lnTo>
+                  <a:lnTo>
+                    <a:pt x="236" y="6"/>
+                  </a:lnTo>
+                  <a:lnTo>
+                    <a:pt x="18" y="518"/>
+                  </a:lnTo>
+                  <a:lnTo>
+                    <a:pt x="18" y="898"/>
+                  </a:lnTo>
+                  <a:close/>
+                </a:path>
+              </a:pathLst>
+            </a:custGeom>
+            <a:grpFill/>
+            <a:ln>
+              <a:noFill/>
+            </a:ln>
+            <a:extLst>
+              <a:ext uri="{91240B29-F687-4f45-9708-019B960494DF}">
+                <a14:hiddenLine xmlns="" xmlns:a16="http://schemas.microsoft.com/office/drawing/2014/main" xmlns:p14="http://schemas.microsoft.com/office/powerpoint/2010/main" xmlns:a14="http://schemas.microsoft.com/office/drawing/2010/main" w="9525">
+                  <a:solidFill>
+                    <a:srgbClr val="000000"/>
+                  </a:solidFill>
+                  <a:round/>
+                  <a:headEnd/>
+                  <a:tailEnd/>
+                </a14:hiddenLine>
+              </a:ext>
+            </a:extLst>
+          </p:spPr>
+          <p:txBody>
+            <a:bodyPr/>
+            <a:lstStyle/>
+            <a:p>
+              <a:endParaRPr lang="es-AR"/>
+            </a:p>
+          </p:txBody>
+        </p:sp>
+        <p:sp>
+          <p:nvSpPr>
+            <p:cNvPr id="106" name="Freeform 27">
+              <a:extLst>
+                <a:ext uri="{FF2B5EF4-FFF2-40B4-BE49-F238E27FC236}">
+                  <a16:creationId xmlns:a16="http://schemas.microsoft.com/office/drawing/2014/main" id="{CD34643B-9DF2-4310-8868-48252C3393F0}"/>
+                </a:ext>
+                <a:ext uri="{C183D7F6-B498-43B3-948B-1728B52AA6E4}">
+                  <adec:decorative xmlns:adec="http://schemas.microsoft.com/office/drawing/2017/decorative" val="1"/>
+                </a:ext>
+              </a:extLst>
+            </p:cNvPr>
+            <p:cNvSpPr/>
+            <p:nvPr>
+              <p:extLst>
+                <p:ext uri="{386F3935-93C4-4BCD-93E2-E3B085C9AB24}">
+                  <p16:designElem xmlns:p16="http://schemas.microsoft.com/office/powerpoint/2015/main" val="1"/>
+                </p:ext>
+              </p:extLst>
+            </p:nvPr>
+          </p:nvSpPr>
+          <p:spPr bwMode="auto">
+            <a:xfrm>
+              <a:off x="569912" y="5945188"/>
+              <a:ext cx="152400" cy="912813"/>
+            </a:xfrm>
+            <a:custGeom>
+              <a:avLst/>
+              <a:gdLst/>
+              <a:ahLst/>
+              <a:cxnLst/>
+              <a:rect l="0" t="0" r="r" b="b"/>
+              <a:pathLst>
+                <a:path w="96" h="575">
+                  <a:moveTo>
+                    <a:pt x="15" y="575"/>
+                  </a:moveTo>
+                  <a:lnTo>
+                    <a:pt x="0" y="569"/>
+                  </a:lnTo>
+                  <a:lnTo>
+                    <a:pt x="81" y="383"/>
+                  </a:lnTo>
+                  <a:lnTo>
+                    <a:pt x="81" y="0"/>
+                  </a:lnTo>
+                  <a:lnTo>
+                    <a:pt x="96" y="0"/>
+                  </a:lnTo>
+                  <a:lnTo>
+                    <a:pt x="96" y="386"/>
+                  </a:lnTo>
+                  <a:lnTo>
+                    <a:pt x="15" y="575"/>
+                  </a:lnTo>
+                  <a:close/>
+                </a:path>
+              </a:pathLst>
+            </a:custGeom>
+            <a:grpFill/>
+            <a:ln>
+              <a:noFill/>
+            </a:ln>
+            <a:extLst>
+              <a:ext uri="{91240B29-F687-4f45-9708-019B960494DF}">
+                <a14:hiddenLine xmlns="" xmlns:a16="http://schemas.microsoft.com/office/drawing/2014/main" xmlns:p14="http://schemas.microsoft.com/office/powerpoint/2010/main" xmlns:a14="http://schemas.microsoft.com/office/drawing/2010/main" w="9525">
+                  <a:solidFill>
+                    <a:srgbClr val="000000"/>
+                  </a:solidFill>
+                  <a:round/>
+                  <a:headEnd/>
+                  <a:tailEnd/>
+                </a14:hiddenLine>
+              </a:ext>
+            </a:extLst>
+          </p:spPr>
+          <p:txBody>
+            <a:bodyPr/>
+            <a:lstStyle/>
+            <a:p>
+              <a:endParaRPr lang="es-AR"/>
+            </a:p>
+          </p:txBody>
+        </p:sp>
+        <p:sp>
+          <p:nvSpPr>
+            <p:cNvPr id="107" name="Freeform 28">
+              <a:extLst>
+                <a:ext uri="{FF2B5EF4-FFF2-40B4-BE49-F238E27FC236}">
+                  <a16:creationId xmlns:a16="http://schemas.microsoft.com/office/drawing/2014/main" id="{4E020C4E-AF64-44A8-B830-779541D8D549}"/>
+                </a:ext>
+                <a:ext uri="{C183D7F6-B498-43B3-948B-1728B52AA6E4}">
+                  <adec:decorative xmlns:adec="http://schemas.microsoft.com/office/drawing/2017/decorative" val="1"/>
+                </a:ext>
+              </a:extLst>
+            </p:cNvPr>
+            <p:cNvSpPr>
+              <a:spLocks noEditPoints="1"/>
+            </p:cNvSpPr>
+            <p:nvPr>
+              <p:extLst>
+                <p:ext uri="{386F3935-93C4-4BCD-93E2-E3B085C9AB24}">
+                  <p16:designElem xmlns:p16="http://schemas.microsoft.com/office/powerpoint/2015/main" val="1"/>
+                </p:ext>
+              </p:extLst>
+            </p:nvPr>
+          </p:nvSpPr>
+          <p:spPr bwMode="auto">
+            <a:xfrm>
+              <a:off x="612775" y="5246688"/>
+              <a:ext cx="190500" cy="190500"/>
+            </a:xfrm>
+            <a:custGeom>
+              <a:avLst/>
+              <a:gdLst/>
+              <a:ahLst/>
+              <a:cxnLst/>
+              <a:rect l="0" t="0" r="r" b="b"/>
+              <a:pathLst>
+                <a:path w="40" h="40">
+                  <a:moveTo>
+                    <a:pt x="20" y="40"/>
+                  </a:moveTo>
+                  <a:cubicBezTo>
+                    <a:pt x="9" y="40"/>
+                    <a:pt x="0" y="31"/>
+                    <a:pt x="0" y="20"/>
+                  </a:cubicBezTo>
+                  <a:cubicBezTo>
+                    <a:pt x="0" y="9"/>
+                    <a:pt x="9" y="0"/>
+                    <a:pt x="20" y="0"/>
+                  </a:cubicBezTo>
+                  <a:cubicBezTo>
+                    <a:pt x="31" y="0"/>
+                    <a:pt x="40" y="9"/>
+                    <a:pt x="40" y="20"/>
+                  </a:cubicBezTo>
+                  <a:cubicBezTo>
+                    <a:pt x="40" y="31"/>
+                    <a:pt x="31" y="40"/>
+                    <a:pt x="20" y="40"/>
+                  </a:cubicBezTo>
+                  <a:close/>
+                  <a:moveTo>
+                    <a:pt x="20" y="4"/>
+                  </a:moveTo>
+                  <a:cubicBezTo>
+                    <a:pt x="12" y="4"/>
+                    <a:pt x="4" y="11"/>
+                    <a:pt x="4" y="20"/>
+                  </a:cubicBezTo>
+                  <a:cubicBezTo>
+                    <a:pt x="4" y="29"/>
+                    <a:pt x="12" y="36"/>
+                    <a:pt x="20" y="36"/>
+                  </a:cubicBezTo>
+                  <a:cubicBezTo>
+                    <a:pt x="29" y="36"/>
+                    <a:pt x="36" y="29"/>
+                    <a:pt x="36" y="20"/>
+                  </a:cubicBezTo>
+                  <a:cubicBezTo>
+                    <a:pt x="36" y="11"/>
+                    <a:pt x="29" y="4"/>
+                    <a:pt x="20" y="4"/>
+                  </a:cubicBezTo>
+                  <a:close/>
+                </a:path>
+              </a:pathLst>
+            </a:custGeom>
+            <a:grpFill/>
+            <a:ln>
+              <a:noFill/>
+            </a:ln>
+            <a:extLst>
+              <a:ext uri="{91240B29-F687-4f45-9708-019B960494DF}">
+                <a14:hiddenLine xmlns="" xmlns:a16="http://schemas.microsoft.com/office/drawing/2014/main" xmlns:p14="http://schemas.microsoft.com/office/powerpoint/2010/main" xmlns:a14="http://schemas.microsoft.com/office/drawing/2010/main" w="9525">
+                  <a:solidFill>
+                    <a:srgbClr val="000000"/>
+                  </a:solidFill>
+                  <a:round/>
+                  <a:headEnd/>
+                  <a:tailEnd/>
+                </a14:hiddenLine>
+              </a:ext>
+            </a:extLst>
+          </p:spPr>
+          <p:txBody>
+            <a:bodyPr/>
+            <a:lstStyle/>
+            <a:p>
+              <a:endParaRPr lang="es-AR"/>
+            </a:p>
+          </p:txBody>
+        </p:sp>
+        <p:sp>
+          <p:nvSpPr>
+            <p:cNvPr id="108" name="Freeform 29">
+              <a:extLst>
+                <a:ext uri="{FF2B5EF4-FFF2-40B4-BE49-F238E27FC236}">
+                  <a16:creationId xmlns:a16="http://schemas.microsoft.com/office/drawing/2014/main" id="{D97BC3D3-B1B3-4825-9169-BBEF1DBCF055}"/>
+                </a:ext>
+                <a:ext uri="{C183D7F6-B498-43B3-948B-1728B52AA6E4}">
+                  <adec:decorative xmlns:adec="http://schemas.microsoft.com/office/drawing/2017/decorative" val="1"/>
+                </a:ext>
+              </a:extLst>
+            </p:cNvPr>
+            <p:cNvSpPr>
+              <a:spLocks noEditPoints="1"/>
+            </p:cNvSpPr>
+            <p:nvPr>
+              <p:extLst>
+                <p:ext uri="{386F3935-93C4-4BCD-93E2-E3B085C9AB24}">
+                  <p16:designElem xmlns:p16="http://schemas.microsoft.com/office/powerpoint/2015/main" val="1"/>
+                </p:ext>
+              </p:extLst>
+            </p:nvPr>
+          </p:nvSpPr>
+          <p:spPr bwMode="auto">
+            <a:xfrm>
+              <a:off x="612775" y="5764213"/>
+              <a:ext cx="190500" cy="190500"/>
+            </a:xfrm>
+            <a:custGeom>
+              <a:avLst/>
+              <a:gdLst/>
+              <a:ahLst/>
+              <a:cxnLst/>
+              <a:rect l="0" t="0" r="r" b="b"/>
+              <a:pathLst>
+                <a:path w="40" h="40">
+                  <a:moveTo>
+                    <a:pt x="20" y="40"/>
+                  </a:moveTo>
+                  <a:cubicBezTo>
+                    <a:pt x="9" y="40"/>
+                    <a:pt x="0" y="31"/>
+                    <a:pt x="0" y="20"/>
+                  </a:cubicBezTo>
+                  <a:cubicBezTo>
+                    <a:pt x="0" y="9"/>
+                    <a:pt x="9" y="0"/>
+                    <a:pt x="20" y="0"/>
+                  </a:cubicBezTo>
+                  <a:cubicBezTo>
+                    <a:pt x="31" y="0"/>
+                    <a:pt x="40" y="9"/>
+                    <a:pt x="40" y="20"/>
+                  </a:cubicBezTo>
+                  <a:cubicBezTo>
+                    <a:pt x="40" y="31"/>
+                    <a:pt x="31" y="40"/>
+                    <a:pt x="20" y="40"/>
+                  </a:cubicBezTo>
+                  <a:close/>
+                  <a:moveTo>
+                    <a:pt x="20" y="4"/>
+                  </a:moveTo>
+                  <a:cubicBezTo>
+                    <a:pt x="12" y="4"/>
+                    <a:pt x="4" y="11"/>
+                    <a:pt x="4" y="20"/>
+                  </a:cubicBezTo>
+                  <a:cubicBezTo>
+                    <a:pt x="4" y="29"/>
+                    <a:pt x="12" y="36"/>
+                    <a:pt x="20" y="36"/>
+                  </a:cubicBezTo>
+                  <a:cubicBezTo>
+                    <a:pt x="29" y="36"/>
+                    <a:pt x="36" y="29"/>
+                    <a:pt x="36" y="20"/>
+                  </a:cubicBezTo>
+                  <a:cubicBezTo>
+                    <a:pt x="36" y="11"/>
+                    <a:pt x="29" y="4"/>
+                    <a:pt x="20" y="4"/>
+                  </a:cubicBezTo>
+                  <a:close/>
+                </a:path>
+              </a:pathLst>
+            </a:custGeom>
+            <a:grpFill/>
+            <a:ln>
+              <a:noFill/>
+            </a:ln>
+            <a:extLst>
+              <a:ext uri="{91240B29-F687-4f45-9708-019B960494DF}">
+                <a14:hiddenLine xmlns="" xmlns:a16="http://schemas.microsoft.com/office/drawing/2014/main" xmlns:p14="http://schemas.microsoft.com/office/powerpoint/2010/main" xmlns:a14="http://schemas.microsoft.com/office/drawing/2010/main" w="9525">
+                  <a:solidFill>
+                    <a:srgbClr val="000000"/>
+                  </a:solidFill>
+                  <a:round/>
+                  <a:headEnd/>
+                  <a:tailEnd/>
+                </a14:hiddenLine>
+              </a:ext>
+            </a:extLst>
+          </p:spPr>
+          <p:txBody>
+            <a:bodyPr/>
+            <a:lstStyle/>
+            <a:p>
+              <a:endParaRPr lang="es-AR"/>
+            </a:p>
+          </p:txBody>
+        </p:sp>
+        <p:sp>
+          <p:nvSpPr>
+            <p:cNvPr id="109" name="Freeform 30">
+              <a:extLst>
+                <a:ext uri="{FF2B5EF4-FFF2-40B4-BE49-F238E27FC236}">
+                  <a16:creationId xmlns:a16="http://schemas.microsoft.com/office/drawing/2014/main" id="{A750DC4F-1DAF-470E-98C6-6C68DEB93363}"/>
+                </a:ext>
+                <a:ext uri="{C183D7F6-B498-43B3-948B-1728B52AA6E4}">
+                  <adec:decorative xmlns:adec="http://schemas.microsoft.com/office/drawing/2017/decorative" val="1"/>
+                </a:ext>
+              </a:extLst>
+            </p:cNvPr>
+            <p:cNvSpPr/>
+            <p:nvPr>
+              <p:extLst>
+                <p:ext uri="{386F3935-93C4-4BCD-93E2-E3B085C9AB24}">
+                  <p16:designElem xmlns:p16="http://schemas.microsoft.com/office/powerpoint/2015/main" val="1"/>
+                </p:ext>
+              </p:extLst>
+            </p:nvPr>
+          </p:nvSpPr>
+          <p:spPr bwMode="auto">
+            <a:xfrm>
+              <a:off x="669925" y="6330950"/>
+              <a:ext cx="417513" cy="517525"/>
+            </a:xfrm>
+            <a:custGeom>
+              <a:avLst/>
+              <a:gdLst/>
+              <a:ahLst/>
+              <a:cxnLst/>
+              <a:rect l="0" t="0" r="r" b="b"/>
+              <a:pathLst>
+                <a:path w="263" h="326">
+                  <a:moveTo>
+                    <a:pt x="15" y="326"/>
+                  </a:moveTo>
+                  <a:lnTo>
+                    <a:pt x="0" y="320"/>
+                  </a:lnTo>
+                  <a:lnTo>
+                    <a:pt x="45" y="206"/>
+                  </a:lnTo>
+                  <a:lnTo>
+                    <a:pt x="48" y="206"/>
+                  </a:lnTo>
+                  <a:lnTo>
+                    <a:pt x="254" y="0"/>
+                  </a:lnTo>
+                  <a:lnTo>
+                    <a:pt x="263" y="12"/>
+                  </a:lnTo>
+                  <a:lnTo>
+                    <a:pt x="60" y="215"/>
+                  </a:lnTo>
+                  <a:lnTo>
+                    <a:pt x="15" y="326"/>
+                  </a:lnTo>
+                  <a:close/>
+                </a:path>
+              </a:pathLst>
+            </a:custGeom>
+            <a:grpFill/>
+            <a:ln>
+              <a:noFill/>
+            </a:ln>
+            <a:extLst>
+              <a:ext uri="{91240B29-F687-4f45-9708-019B960494DF}">
+                <a14:hiddenLine xmlns="" xmlns:a16="http://schemas.microsoft.com/office/drawing/2014/main" xmlns:p14="http://schemas.microsoft.com/office/powerpoint/2010/main" xmlns:a14="http://schemas.microsoft.com/office/drawing/2010/main" w="9525">
+                  <a:solidFill>
+                    <a:srgbClr val="000000"/>
+                  </a:solidFill>
+                  <a:round/>
+                  <a:headEnd/>
+                  <a:tailEnd/>
+                </a14:hiddenLine>
+              </a:ext>
+            </a:extLst>
+          </p:spPr>
+          <p:txBody>
+            <a:bodyPr/>
+            <a:lstStyle/>
+            <a:p>
+              <a:endParaRPr lang="es-AR"/>
+            </a:p>
+          </p:txBody>
+        </p:sp>
+        <p:sp>
+          <p:nvSpPr>
+            <p:cNvPr id="110" name="Freeform 31">
+              <a:extLst>
+                <a:ext uri="{FF2B5EF4-FFF2-40B4-BE49-F238E27FC236}">
+                  <a16:creationId xmlns:a16="http://schemas.microsoft.com/office/drawing/2014/main" id="{2F99594A-5BBD-4E10-A818-8BE52B7D952C}"/>
+                </a:ext>
+                <a:ext uri="{C183D7F6-B498-43B3-948B-1728B52AA6E4}">
+                  <adec:decorative xmlns:adec="http://schemas.microsoft.com/office/drawing/2017/decorative" val="1"/>
+                </a:ext>
+              </a:extLst>
+            </p:cNvPr>
+            <p:cNvSpPr>
+              <a:spLocks noEditPoints="1"/>
+            </p:cNvSpPr>
+            <p:nvPr>
+              <p:extLst>
+                <p:ext uri="{386F3935-93C4-4BCD-93E2-E3B085C9AB24}">
+                  <p16:designElem xmlns:p16="http://schemas.microsoft.com/office/powerpoint/2015/main" val="1"/>
+                </p:ext>
+              </p:extLst>
+            </p:nvPr>
+          </p:nvSpPr>
+          <p:spPr bwMode="auto">
+            <a:xfrm>
+              <a:off x="1049337" y="6221413"/>
+              <a:ext cx="157163" cy="147638"/>
+            </a:xfrm>
+            <a:custGeom>
+              <a:avLst/>
+              <a:gdLst/>
+              <a:ahLst/>
+              <a:cxnLst/>
+              <a:rect l="0" t="0" r="r" b="b"/>
+              <a:pathLst>
+                <a:path w="33" h="31">
+                  <a:moveTo>
+                    <a:pt x="16" y="31"/>
+                  </a:moveTo>
+                  <a:cubicBezTo>
+                    <a:pt x="12" y="31"/>
+                    <a:pt x="8" y="29"/>
+                    <a:pt x="5" y="26"/>
+                  </a:cubicBezTo>
+                  <a:cubicBezTo>
+                    <a:pt x="2" y="24"/>
+                    <a:pt x="0" y="20"/>
+                    <a:pt x="0" y="15"/>
+                  </a:cubicBezTo>
+                  <a:cubicBezTo>
+                    <a:pt x="0" y="11"/>
+                    <a:pt x="2" y="7"/>
+                    <a:pt x="5" y="4"/>
+                  </a:cubicBezTo>
+                  <a:cubicBezTo>
+                    <a:pt x="8" y="1"/>
+                    <a:pt x="12" y="0"/>
+                    <a:pt x="16" y="0"/>
+                  </a:cubicBezTo>
+                  <a:cubicBezTo>
+                    <a:pt x="20" y="0"/>
+                    <a:pt x="24" y="1"/>
+                    <a:pt x="27" y="4"/>
+                  </a:cubicBezTo>
+                  <a:cubicBezTo>
+                    <a:pt x="33" y="10"/>
+                    <a:pt x="33" y="20"/>
+                    <a:pt x="27" y="26"/>
+                  </a:cubicBezTo>
+                  <a:cubicBezTo>
+                    <a:pt x="24" y="29"/>
+                    <a:pt x="20" y="31"/>
+                    <a:pt x="16" y="31"/>
+                  </a:cubicBezTo>
+                  <a:close/>
+                  <a:moveTo>
+                    <a:pt x="16" y="4"/>
+                  </a:moveTo>
+                  <a:cubicBezTo>
+                    <a:pt x="13" y="4"/>
+                    <a:pt x="10" y="5"/>
+                    <a:pt x="8" y="7"/>
+                  </a:cubicBezTo>
+                  <a:cubicBezTo>
+                    <a:pt x="6" y="9"/>
+                    <a:pt x="4" y="12"/>
+                    <a:pt x="4" y="15"/>
+                  </a:cubicBezTo>
+                  <a:cubicBezTo>
+                    <a:pt x="4" y="19"/>
+                    <a:pt x="6" y="21"/>
+                    <a:pt x="8" y="24"/>
+                  </a:cubicBezTo>
+                  <a:cubicBezTo>
+                    <a:pt x="10" y="26"/>
+                    <a:pt x="13" y="27"/>
+                    <a:pt x="16" y="27"/>
+                  </a:cubicBezTo>
+                  <a:cubicBezTo>
+                    <a:pt x="19" y="27"/>
+                    <a:pt x="22" y="26"/>
+                    <a:pt x="24" y="24"/>
+                  </a:cubicBezTo>
+                  <a:cubicBezTo>
+                    <a:pt x="29" y="19"/>
+                    <a:pt x="29" y="12"/>
+                    <a:pt x="24" y="7"/>
+                  </a:cubicBezTo>
+                  <a:cubicBezTo>
+                    <a:pt x="22" y="5"/>
+                    <a:pt x="19" y="4"/>
+                    <a:pt x="16" y="4"/>
+                  </a:cubicBezTo>
+                  <a:close/>
+                </a:path>
+              </a:pathLst>
+            </a:custGeom>
+            <a:grpFill/>
+            <a:ln>
+              <a:noFill/>
+            </a:ln>
+            <a:extLst>
+              <a:ext uri="{91240B29-F687-4f45-9708-019B960494DF}">
+                <a14:hiddenLine xmlns="" xmlns:a16="http://schemas.microsoft.com/office/drawing/2014/main" xmlns:p14="http://schemas.microsoft.com/office/powerpoint/2010/main" xmlns:a14="http://schemas.microsoft.com/office/drawing/2010/main" w="9525">
+                  <a:solidFill>
+                    <a:srgbClr val="000000"/>
+                  </a:solidFill>
+                  <a:round/>
+                  <a:headEnd/>
+                  <a:tailEnd/>
+                </a14:hiddenLine>
+              </a:ext>
+            </a:extLst>
+          </p:spPr>
+          <p:txBody>
+            <a:bodyPr/>
+            <a:lstStyle/>
+            <a:p>
+              <a:endParaRPr lang="es-AR"/>
+            </a:p>
+          </p:txBody>
+        </p:sp>
+      </p:grpSp>
+      <p:graphicFrame>
+        <p:nvGraphicFramePr>
+          <p:cNvPr id="6" name="Marcador de contenido 5">
+            <a:extLst>
+              <a:ext uri="{FF2B5EF4-FFF2-40B4-BE49-F238E27FC236}">
+                <a16:creationId xmlns:a16="http://schemas.microsoft.com/office/drawing/2014/main" id="{2D191B1D-310C-6396-031F-9214F53CA0AC}"/>
+              </a:ext>
+            </a:extLst>
+          </p:cNvPr>
+          <p:cNvGraphicFramePr>
+            <a:graphicFrameLocks noGrp="1"/>
+          </p:cNvGraphicFramePr>
           <p:nvPr>
             <p:ph idx="1"/>
+            <p:extLst>
+              <p:ext uri="{D42A27DB-BD31-4B8C-83A1-F6EECF244321}">
+                <p14:modId xmlns:p14="http://schemas.microsoft.com/office/powerpoint/2010/main" val="2613375520"/>
+              </p:ext>
+            </p:extLst>
           </p:nvPr>
+        </p:nvGraphicFramePr>
+        <p:xfrm>
+          <a:off x="6164163" y="2176463"/>
+          <a:ext cx="5407120" cy="3462580"/>
+        </p:xfrm>
+        <a:graphic>
+          <a:graphicData uri="http://schemas.openxmlformats.org/drawingml/2006/table">
+            <a:tbl>
+              <a:tblPr/>
+              <a:tblGrid>
+                <a:gridCol w="1506491">
+                  <a:extLst>
+                    <a:ext uri="{9D8B030D-6E8A-4147-A177-3AD203B41FA5}">
+                      <a16:colId xmlns:a16="http://schemas.microsoft.com/office/drawing/2014/main" val="559880934"/>
+                    </a:ext>
+                  </a:extLst>
+                </a:gridCol>
+                <a:gridCol w="1832700">
+                  <a:extLst>
+                    <a:ext uri="{9D8B030D-6E8A-4147-A177-3AD203B41FA5}">
+                      <a16:colId xmlns:a16="http://schemas.microsoft.com/office/drawing/2014/main" val="103836720"/>
+                    </a:ext>
+                  </a:extLst>
+                </a:gridCol>
+                <a:gridCol w="2067929">
+                  <a:extLst>
+                    <a:ext uri="{9D8B030D-6E8A-4147-A177-3AD203B41FA5}">
+                      <a16:colId xmlns:a16="http://schemas.microsoft.com/office/drawing/2014/main" val="2508212965"/>
+                    </a:ext>
+                  </a:extLst>
+                </a:gridCol>
+              </a:tblGrid>
+              <a:tr h="331204">
+                <a:tc>
+                  <a:txBody>
+                    <a:bodyPr/>
+                    <a:lstStyle/>
+                    <a:p>
+                      <a:pPr>
+                        <a:buNone/>
+                      </a:pPr>
+                      <a:r>
+                        <a:rPr lang="es-AR" sz="1500" b="0" dirty="0">
+                          <a:solidFill>
+                            <a:schemeClr val="bg1"/>
+                          </a:solidFill>
+                        </a:rPr>
+                        <a:t>Archivo/Módulo</a:t>
+                      </a:r>
+                    </a:p>
+                  </a:txBody>
+                  <a:tcPr marL="75273" marR="75273" marT="37637" marB="37637" anchor="ctr">
+                    <a:lnL w="12700" cap="flat" cmpd="sng" algn="ctr">
+                      <a:solidFill>
+                        <a:schemeClr val="tx1"/>
+                      </a:solidFill>
+                      <a:prstDash val="solid"/>
+                      <a:round/>
+                      <a:headEnd type="none" w="med" len="med"/>
+                      <a:tailEnd type="none" w="med" len="med"/>
+                    </a:lnL>
+                    <a:lnR w="12700" cap="flat" cmpd="sng" algn="ctr">
+                      <a:solidFill>
+                        <a:schemeClr val="tx1"/>
+                      </a:solidFill>
+                      <a:prstDash val="solid"/>
+                      <a:round/>
+                      <a:headEnd type="none" w="med" len="med"/>
+                      <a:tailEnd type="none" w="med" len="med"/>
+                    </a:lnR>
+                    <a:lnT w="12700" cap="flat" cmpd="sng" algn="ctr">
+                      <a:solidFill>
+                        <a:schemeClr val="tx1"/>
+                      </a:solidFill>
+                      <a:prstDash val="solid"/>
+                      <a:round/>
+                      <a:headEnd type="none" w="med" len="med"/>
+                      <a:tailEnd type="none" w="med" len="med"/>
+                    </a:lnT>
+                    <a:lnB w="12700" cap="flat" cmpd="sng" algn="ctr">
+                      <a:solidFill>
+                        <a:schemeClr val="tx1"/>
+                      </a:solidFill>
+                      <a:prstDash val="solid"/>
+                      <a:round/>
+                      <a:headEnd type="none" w="med" len="med"/>
+                      <a:tailEnd type="none" w="med" len="med"/>
+                    </a:lnB>
+                    <a:noFill/>
+                  </a:tcPr>
+                </a:tc>
+                <a:tc>
+                  <a:txBody>
+                    <a:bodyPr/>
+                    <a:lstStyle/>
+                    <a:p>
+                      <a:pPr>
+                        <a:buNone/>
+                      </a:pPr>
+                      <a:r>
+                        <a:rPr lang="es-AR" sz="1500" b="0">
+                          <a:solidFill>
+                            <a:schemeClr val="bg1"/>
+                          </a:solidFill>
+                        </a:rPr>
+                        <a:t>Contenido Clave</a:t>
+                      </a:r>
+                    </a:p>
+                  </a:txBody>
+                  <a:tcPr marL="75273" marR="75273" marT="37637" marB="37637" anchor="ctr">
+                    <a:lnL w="12700" cap="flat" cmpd="sng" algn="ctr">
+                      <a:solidFill>
+                        <a:schemeClr val="tx1"/>
+                      </a:solidFill>
+                      <a:prstDash val="solid"/>
+                      <a:round/>
+                      <a:headEnd type="none" w="med" len="med"/>
+                      <a:tailEnd type="none" w="med" len="med"/>
+                    </a:lnL>
+                    <a:lnR w="12700" cap="flat" cmpd="sng" algn="ctr">
+                      <a:solidFill>
+                        <a:schemeClr val="tx1"/>
+                      </a:solidFill>
+                      <a:prstDash val="solid"/>
+                      <a:round/>
+                      <a:headEnd type="none" w="med" len="med"/>
+                      <a:tailEnd type="none" w="med" len="med"/>
+                    </a:lnR>
+                    <a:lnT w="12700" cap="flat" cmpd="sng" algn="ctr">
+                      <a:solidFill>
+                        <a:schemeClr val="tx1"/>
+                      </a:solidFill>
+                      <a:prstDash val="solid"/>
+                      <a:round/>
+                      <a:headEnd type="none" w="med" len="med"/>
+                      <a:tailEnd type="none" w="med" len="med"/>
+                    </a:lnT>
+                    <a:lnB w="12700" cap="flat" cmpd="sng" algn="ctr">
+                      <a:solidFill>
+                        <a:schemeClr val="tx1"/>
+                      </a:solidFill>
+                      <a:prstDash val="solid"/>
+                      <a:round/>
+                      <a:headEnd type="none" w="med" len="med"/>
+                      <a:tailEnd type="none" w="med" len="med"/>
+                    </a:lnB>
+                    <a:noFill/>
+                  </a:tcPr>
+                </a:tc>
+                <a:tc>
+                  <a:txBody>
+                    <a:bodyPr/>
+                    <a:lstStyle/>
+                    <a:p>
+                      <a:pPr>
+                        <a:buNone/>
+                      </a:pPr>
+                      <a:r>
+                        <a:rPr lang="es-AR" sz="1500" b="0" dirty="0">
+                          <a:solidFill>
+                            <a:schemeClr val="bg1"/>
+                          </a:solidFill>
+                        </a:rPr>
+                        <a:t>Rol en el Sistema</a:t>
+                      </a:r>
+                    </a:p>
+                  </a:txBody>
+                  <a:tcPr marL="75273" marR="75273" marT="37637" marB="37637" anchor="ctr">
+                    <a:lnL w="12700" cap="flat" cmpd="sng" algn="ctr">
+                      <a:solidFill>
+                        <a:schemeClr val="tx1"/>
+                      </a:solidFill>
+                      <a:prstDash val="solid"/>
+                      <a:round/>
+                      <a:headEnd type="none" w="med" len="med"/>
+                      <a:tailEnd type="none" w="med" len="med"/>
+                    </a:lnL>
+                    <a:lnR w="12700" cap="flat" cmpd="sng" algn="ctr">
+                      <a:solidFill>
+                        <a:schemeClr val="tx1"/>
+                      </a:solidFill>
+                      <a:prstDash val="solid"/>
+                      <a:round/>
+                      <a:headEnd type="none" w="med" len="med"/>
+                      <a:tailEnd type="none" w="med" len="med"/>
+                    </a:lnR>
+                    <a:lnT w="12700" cap="flat" cmpd="sng" algn="ctr">
+                      <a:solidFill>
+                        <a:schemeClr val="tx1"/>
+                      </a:solidFill>
+                      <a:prstDash val="solid"/>
+                      <a:round/>
+                      <a:headEnd type="none" w="med" len="med"/>
+                      <a:tailEnd type="none" w="med" len="med"/>
+                    </a:lnT>
+                    <a:lnB w="12700" cap="flat" cmpd="sng" algn="ctr">
+                      <a:solidFill>
+                        <a:schemeClr val="tx1"/>
+                      </a:solidFill>
+                      <a:prstDash val="solid"/>
+                      <a:round/>
+                      <a:headEnd type="none" w="med" len="med"/>
+                      <a:tailEnd type="none" w="med" len="med"/>
+                    </a:lnB>
+                    <a:noFill/>
+                  </a:tcPr>
+                </a:tc>
+                <a:extLst>
+                  <a:ext uri="{0D108BD9-81ED-4DB2-BD59-A6C34878D82A}">
+                    <a16:rowId xmlns:a16="http://schemas.microsoft.com/office/drawing/2014/main" val="2743413493"/>
+                  </a:ext>
+                </a:extLst>
+              </a:tr>
+              <a:tr h="782844">
+                <a:tc>
+                  <a:txBody>
+                    <a:bodyPr/>
+                    <a:lstStyle/>
+                    <a:p>
+                      <a:pPr>
+                        <a:buNone/>
+                      </a:pPr>
+                      <a:r>
+                        <a:rPr lang="es-AR" sz="1500" b="0" dirty="0">
+                          <a:solidFill>
+                            <a:schemeClr val="bg1"/>
+                          </a:solidFill>
+                          <a:latin typeface="Courier New" panose="02070309020205020404" pitchFamily="49" charset="0"/>
+                        </a:rPr>
+                        <a:t>servidor.py</a:t>
+                      </a:r>
+                      <a:endParaRPr lang="es-AR" sz="1500" b="0" dirty="0">
+                        <a:solidFill>
+                          <a:schemeClr val="bg1"/>
+                        </a:solidFill>
+                      </a:endParaRPr>
+                    </a:p>
+                  </a:txBody>
+                  <a:tcPr marL="75273" marR="75273" marT="37637" marB="37637" anchor="ctr">
+                    <a:lnL w="12700" cap="flat" cmpd="sng" algn="ctr">
+                      <a:solidFill>
+                        <a:schemeClr val="tx1"/>
+                      </a:solidFill>
+                      <a:prstDash val="solid"/>
+                      <a:round/>
+                      <a:headEnd type="none" w="med" len="med"/>
+                      <a:tailEnd type="none" w="med" len="med"/>
+                    </a:lnL>
+                    <a:lnR w="12700" cap="flat" cmpd="sng" algn="ctr">
+                      <a:solidFill>
+                        <a:schemeClr val="tx1"/>
+                      </a:solidFill>
+                      <a:prstDash val="solid"/>
+                      <a:round/>
+                      <a:headEnd type="none" w="med" len="med"/>
+                      <a:tailEnd type="none" w="med" len="med"/>
+                    </a:lnR>
+                    <a:lnT w="12700" cap="flat" cmpd="sng" algn="ctr">
+                      <a:solidFill>
+                        <a:schemeClr val="tx1"/>
+                      </a:solidFill>
+                      <a:prstDash val="solid"/>
+                      <a:round/>
+                      <a:headEnd type="none" w="med" len="med"/>
+                      <a:tailEnd type="none" w="med" len="med"/>
+                    </a:lnT>
+                    <a:lnB w="12700" cap="flat" cmpd="sng" algn="ctr">
+                      <a:solidFill>
+                        <a:schemeClr val="tx1"/>
+                      </a:solidFill>
+                      <a:prstDash val="solid"/>
+                      <a:round/>
+                      <a:headEnd type="none" w="med" len="med"/>
+                      <a:tailEnd type="none" w="med" len="med"/>
+                    </a:lnB>
+                    <a:noFill/>
+                  </a:tcPr>
+                </a:tc>
+                <a:tc>
+                  <a:txBody>
+                    <a:bodyPr/>
+                    <a:lstStyle/>
+                    <a:p>
+                      <a:pPr>
+                        <a:buNone/>
+                      </a:pPr>
+                      <a:r>
+                        <a:rPr lang="es-AR" sz="1500" b="0">
+                          <a:solidFill>
+                            <a:schemeClr val="bg1"/>
+                          </a:solidFill>
+                        </a:rPr>
+                        <a:t>Clase </a:t>
+                      </a:r>
+                      <a:r>
+                        <a:rPr lang="es-AR" sz="1500" b="0">
+                          <a:solidFill>
+                            <a:schemeClr val="bg1"/>
+                          </a:solidFill>
+                          <a:latin typeface="Courier New" panose="02070309020205020404" pitchFamily="49" charset="0"/>
+                        </a:rPr>
+                        <a:t>ServidorCorreo</a:t>
+                      </a:r>
+                      <a:endParaRPr lang="es-AR" sz="1500" b="0">
+                        <a:solidFill>
+                          <a:schemeClr val="bg1"/>
+                        </a:solidFill>
+                      </a:endParaRPr>
+                    </a:p>
+                  </a:txBody>
+                  <a:tcPr marL="75273" marR="75273" marT="37637" marB="37637" anchor="ctr">
+                    <a:lnL w="12700" cap="flat" cmpd="sng" algn="ctr">
+                      <a:solidFill>
+                        <a:schemeClr val="tx1"/>
+                      </a:solidFill>
+                      <a:prstDash val="solid"/>
+                      <a:round/>
+                      <a:headEnd type="none" w="med" len="med"/>
+                      <a:tailEnd type="none" w="med" len="med"/>
+                    </a:lnL>
+                    <a:lnR w="12700" cap="flat" cmpd="sng" algn="ctr">
+                      <a:solidFill>
+                        <a:schemeClr val="tx1"/>
+                      </a:solidFill>
+                      <a:prstDash val="solid"/>
+                      <a:round/>
+                      <a:headEnd type="none" w="med" len="med"/>
+                      <a:tailEnd type="none" w="med" len="med"/>
+                    </a:lnR>
+                    <a:lnT w="12700" cap="flat" cmpd="sng" algn="ctr">
+                      <a:solidFill>
+                        <a:schemeClr val="tx1"/>
+                      </a:solidFill>
+                      <a:prstDash val="solid"/>
+                      <a:round/>
+                      <a:headEnd type="none" w="med" len="med"/>
+                      <a:tailEnd type="none" w="med" len="med"/>
+                    </a:lnT>
+                    <a:lnB w="12700" cap="flat" cmpd="sng" algn="ctr">
+                      <a:solidFill>
+                        <a:schemeClr val="tx1"/>
+                      </a:solidFill>
+                      <a:prstDash val="solid"/>
+                      <a:round/>
+                      <a:headEnd type="none" w="med" len="med"/>
+                      <a:tailEnd type="none" w="med" len="med"/>
+                    </a:lnB>
+                    <a:noFill/>
+                  </a:tcPr>
+                </a:tc>
+                <a:tc>
+                  <a:txBody>
+                    <a:bodyPr/>
+                    <a:lstStyle/>
+                    <a:p>
+                      <a:pPr>
+                        <a:buNone/>
+                      </a:pPr>
+                      <a:r>
+                        <a:rPr lang="es-ES" sz="1500" b="0" dirty="0">
+                          <a:solidFill>
+                            <a:schemeClr val="bg1"/>
+                          </a:solidFill>
+                        </a:rPr>
+                        <a:t>Orquestador central y gestor de la Cola de Prioridad (Heap).</a:t>
+                      </a:r>
+                    </a:p>
+                  </a:txBody>
+                  <a:tcPr marL="75273" marR="75273" marT="37637" marB="37637" anchor="ctr">
+                    <a:lnL w="12700" cap="flat" cmpd="sng" algn="ctr">
+                      <a:solidFill>
+                        <a:schemeClr val="tx1"/>
+                      </a:solidFill>
+                      <a:prstDash val="solid"/>
+                      <a:round/>
+                      <a:headEnd type="none" w="med" len="med"/>
+                      <a:tailEnd type="none" w="med" len="med"/>
+                    </a:lnL>
+                    <a:lnR w="12700" cap="flat" cmpd="sng" algn="ctr">
+                      <a:solidFill>
+                        <a:schemeClr val="tx1"/>
+                      </a:solidFill>
+                      <a:prstDash val="solid"/>
+                      <a:round/>
+                      <a:headEnd type="none" w="med" len="med"/>
+                      <a:tailEnd type="none" w="med" len="med"/>
+                    </a:lnR>
+                    <a:lnT w="12700" cap="flat" cmpd="sng" algn="ctr">
+                      <a:solidFill>
+                        <a:schemeClr val="tx1"/>
+                      </a:solidFill>
+                      <a:prstDash val="solid"/>
+                      <a:round/>
+                      <a:headEnd type="none" w="med" len="med"/>
+                      <a:tailEnd type="none" w="med" len="med"/>
+                    </a:lnT>
+                    <a:lnB w="12700" cap="flat" cmpd="sng" algn="ctr">
+                      <a:solidFill>
+                        <a:schemeClr val="tx1"/>
+                      </a:solidFill>
+                      <a:prstDash val="solid"/>
+                      <a:round/>
+                      <a:headEnd type="none" w="med" len="med"/>
+                      <a:tailEnd type="none" w="med" len="med"/>
+                    </a:lnB>
+                    <a:noFill/>
+                  </a:tcPr>
+                </a:tc>
+                <a:extLst>
+                  <a:ext uri="{0D108BD9-81ED-4DB2-BD59-A6C34878D82A}">
+                    <a16:rowId xmlns:a16="http://schemas.microsoft.com/office/drawing/2014/main" val="1845035533"/>
+                  </a:ext>
+                </a:extLst>
+              </a:tr>
+              <a:tr h="782844">
+                <a:tc>
+                  <a:txBody>
+                    <a:bodyPr/>
+                    <a:lstStyle/>
+                    <a:p>
+                      <a:pPr>
+                        <a:buNone/>
+                      </a:pPr>
+                      <a:r>
+                        <a:rPr lang="es-AR" sz="1500" b="0" dirty="0">
+                          <a:solidFill>
+                            <a:schemeClr val="bg1"/>
+                          </a:solidFill>
+                          <a:latin typeface="Courier New" panose="02070309020205020404" pitchFamily="49" charset="0"/>
+                        </a:rPr>
+                        <a:t>usuario.py</a:t>
+                      </a:r>
+                      <a:endParaRPr lang="es-AR" sz="1500" b="0" dirty="0">
+                        <a:solidFill>
+                          <a:schemeClr val="bg1"/>
+                        </a:solidFill>
+                      </a:endParaRPr>
+                    </a:p>
+                  </a:txBody>
+                  <a:tcPr marL="75273" marR="75273" marT="37637" marB="37637" anchor="ctr">
+                    <a:lnL w="12700" cap="flat" cmpd="sng" algn="ctr">
+                      <a:solidFill>
+                        <a:schemeClr val="tx1"/>
+                      </a:solidFill>
+                      <a:prstDash val="solid"/>
+                      <a:round/>
+                      <a:headEnd type="none" w="med" len="med"/>
+                      <a:tailEnd type="none" w="med" len="med"/>
+                    </a:lnL>
+                    <a:lnR w="12700" cap="flat" cmpd="sng" algn="ctr">
+                      <a:solidFill>
+                        <a:schemeClr val="tx1"/>
+                      </a:solidFill>
+                      <a:prstDash val="solid"/>
+                      <a:round/>
+                      <a:headEnd type="none" w="med" len="med"/>
+                      <a:tailEnd type="none" w="med" len="med"/>
+                    </a:lnR>
+                    <a:lnT w="12700" cap="flat" cmpd="sng" algn="ctr">
+                      <a:solidFill>
+                        <a:schemeClr val="tx1"/>
+                      </a:solidFill>
+                      <a:prstDash val="solid"/>
+                      <a:round/>
+                      <a:headEnd type="none" w="med" len="med"/>
+                      <a:tailEnd type="none" w="med" len="med"/>
+                    </a:lnT>
+                    <a:lnB w="12700" cap="flat" cmpd="sng" algn="ctr">
+                      <a:solidFill>
+                        <a:schemeClr val="tx1"/>
+                      </a:solidFill>
+                      <a:prstDash val="solid"/>
+                      <a:round/>
+                      <a:headEnd type="none" w="med" len="med"/>
+                      <a:tailEnd type="none" w="med" len="med"/>
+                    </a:lnB>
+                    <a:noFill/>
+                  </a:tcPr>
+                </a:tc>
+                <a:tc>
+                  <a:txBody>
+                    <a:bodyPr/>
+                    <a:lstStyle/>
+                    <a:p>
+                      <a:pPr>
+                        <a:buNone/>
+                      </a:pPr>
+                      <a:r>
+                        <a:rPr lang="es-AR" sz="1500" b="0" dirty="0">
+                          <a:solidFill>
+                            <a:schemeClr val="bg1"/>
+                          </a:solidFill>
+                        </a:rPr>
+                        <a:t>Clase </a:t>
+                      </a:r>
+                      <a:r>
+                        <a:rPr lang="es-AR" sz="1500" b="0" dirty="0">
+                          <a:solidFill>
+                            <a:schemeClr val="bg1"/>
+                          </a:solidFill>
+                          <a:latin typeface="Courier New" panose="02070309020205020404" pitchFamily="49" charset="0"/>
+                        </a:rPr>
+                        <a:t>Usuario</a:t>
+                      </a:r>
+                      <a:endParaRPr lang="es-AR" sz="1500" b="0" dirty="0">
+                        <a:solidFill>
+                          <a:schemeClr val="bg1"/>
+                        </a:solidFill>
+                      </a:endParaRPr>
+                    </a:p>
+                  </a:txBody>
+                  <a:tcPr marL="75273" marR="75273" marT="37637" marB="37637" anchor="ctr">
+                    <a:lnL w="12700" cap="flat" cmpd="sng" algn="ctr">
+                      <a:solidFill>
+                        <a:schemeClr val="tx1"/>
+                      </a:solidFill>
+                      <a:prstDash val="solid"/>
+                      <a:round/>
+                      <a:headEnd type="none" w="med" len="med"/>
+                      <a:tailEnd type="none" w="med" len="med"/>
+                    </a:lnL>
+                    <a:lnR w="12700" cap="flat" cmpd="sng" algn="ctr">
+                      <a:solidFill>
+                        <a:schemeClr val="tx1"/>
+                      </a:solidFill>
+                      <a:prstDash val="solid"/>
+                      <a:round/>
+                      <a:headEnd type="none" w="med" len="med"/>
+                      <a:tailEnd type="none" w="med" len="med"/>
+                    </a:lnR>
+                    <a:lnT w="12700" cap="flat" cmpd="sng" algn="ctr">
+                      <a:solidFill>
+                        <a:schemeClr val="tx1"/>
+                      </a:solidFill>
+                      <a:prstDash val="solid"/>
+                      <a:round/>
+                      <a:headEnd type="none" w="med" len="med"/>
+                      <a:tailEnd type="none" w="med" len="med"/>
+                    </a:lnT>
+                    <a:lnB w="12700" cap="flat" cmpd="sng" algn="ctr">
+                      <a:solidFill>
+                        <a:schemeClr val="tx1"/>
+                      </a:solidFill>
+                      <a:prstDash val="solid"/>
+                      <a:round/>
+                      <a:headEnd type="none" w="med" len="med"/>
+                      <a:tailEnd type="none" w="med" len="med"/>
+                    </a:lnB>
+                    <a:noFill/>
+                  </a:tcPr>
+                </a:tc>
+                <a:tc>
+                  <a:txBody>
+                    <a:bodyPr/>
+                    <a:lstStyle/>
+                    <a:p>
+                      <a:pPr>
+                        <a:buNone/>
+                      </a:pPr>
+                      <a:r>
+                        <a:rPr lang="es-ES" sz="1500" b="0">
+                          <a:solidFill>
+                            <a:schemeClr val="bg1"/>
+                          </a:solidFill>
+                        </a:rPr>
+                        <a:t>Gestor del Árbol de Carpetas y de los Filtros Automáticos.</a:t>
+                      </a:r>
+                    </a:p>
+                  </a:txBody>
+                  <a:tcPr marL="75273" marR="75273" marT="37637" marB="37637" anchor="ctr">
+                    <a:lnL w="12700" cap="flat" cmpd="sng" algn="ctr">
+                      <a:solidFill>
+                        <a:schemeClr val="tx1"/>
+                      </a:solidFill>
+                      <a:prstDash val="solid"/>
+                      <a:round/>
+                      <a:headEnd type="none" w="med" len="med"/>
+                      <a:tailEnd type="none" w="med" len="med"/>
+                    </a:lnL>
+                    <a:lnR w="12700" cap="flat" cmpd="sng" algn="ctr">
+                      <a:solidFill>
+                        <a:schemeClr val="tx1"/>
+                      </a:solidFill>
+                      <a:prstDash val="solid"/>
+                      <a:round/>
+                      <a:headEnd type="none" w="med" len="med"/>
+                      <a:tailEnd type="none" w="med" len="med"/>
+                    </a:lnR>
+                    <a:lnT w="12700" cap="flat" cmpd="sng" algn="ctr">
+                      <a:solidFill>
+                        <a:schemeClr val="tx1"/>
+                      </a:solidFill>
+                      <a:prstDash val="solid"/>
+                      <a:round/>
+                      <a:headEnd type="none" w="med" len="med"/>
+                      <a:tailEnd type="none" w="med" len="med"/>
+                    </a:lnT>
+                    <a:lnB w="12700" cap="flat" cmpd="sng" algn="ctr">
+                      <a:solidFill>
+                        <a:schemeClr val="tx1"/>
+                      </a:solidFill>
+                      <a:prstDash val="solid"/>
+                      <a:round/>
+                      <a:headEnd type="none" w="med" len="med"/>
+                      <a:tailEnd type="none" w="med" len="med"/>
+                    </a:lnB>
+                    <a:noFill/>
+                  </a:tcPr>
+                </a:tc>
+                <a:extLst>
+                  <a:ext uri="{0D108BD9-81ED-4DB2-BD59-A6C34878D82A}">
+                    <a16:rowId xmlns:a16="http://schemas.microsoft.com/office/drawing/2014/main" val="1687713419"/>
+                  </a:ext>
+                </a:extLst>
+              </a:tr>
+              <a:tr h="782844">
+                <a:tc>
+                  <a:txBody>
+                    <a:bodyPr/>
+                    <a:lstStyle/>
+                    <a:p>
+                      <a:pPr>
+                        <a:buNone/>
+                      </a:pPr>
+                      <a:r>
+                        <a:rPr lang="es-AR" sz="1500" b="0">
+                          <a:solidFill>
+                            <a:schemeClr val="bg1"/>
+                          </a:solidFill>
+                          <a:latin typeface="Courier New" panose="02070309020205020404" pitchFamily="49" charset="0"/>
+                        </a:rPr>
+                        <a:t>carpeta.py</a:t>
+                      </a:r>
+                      <a:endParaRPr lang="es-AR" sz="1500" b="0">
+                        <a:solidFill>
+                          <a:schemeClr val="bg1"/>
+                        </a:solidFill>
+                      </a:endParaRPr>
+                    </a:p>
+                  </a:txBody>
+                  <a:tcPr marL="75273" marR="75273" marT="37637" marB="37637" anchor="ctr">
+                    <a:lnL w="12700" cap="flat" cmpd="sng" algn="ctr">
+                      <a:solidFill>
+                        <a:schemeClr val="tx1"/>
+                      </a:solidFill>
+                      <a:prstDash val="solid"/>
+                      <a:round/>
+                      <a:headEnd type="none" w="med" len="med"/>
+                      <a:tailEnd type="none" w="med" len="med"/>
+                    </a:lnL>
+                    <a:lnR w="12700" cap="flat" cmpd="sng" algn="ctr">
+                      <a:solidFill>
+                        <a:schemeClr val="tx1"/>
+                      </a:solidFill>
+                      <a:prstDash val="solid"/>
+                      <a:round/>
+                      <a:headEnd type="none" w="med" len="med"/>
+                      <a:tailEnd type="none" w="med" len="med"/>
+                    </a:lnR>
+                    <a:lnT w="12700" cap="flat" cmpd="sng" algn="ctr">
+                      <a:solidFill>
+                        <a:schemeClr val="tx1"/>
+                      </a:solidFill>
+                      <a:prstDash val="solid"/>
+                      <a:round/>
+                      <a:headEnd type="none" w="med" len="med"/>
+                      <a:tailEnd type="none" w="med" len="med"/>
+                    </a:lnT>
+                    <a:lnB w="12700" cap="flat" cmpd="sng" algn="ctr">
+                      <a:solidFill>
+                        <a:schemeClr val="tx1"/>
+                      </a:solidFill>
+                      <a:prstDash val="solid"/>
+                      <a:round/>
+                      <a:headEnd type="none" w="med" len="med"/>
+                      <a:tailEnd type="none" w="med" len="med"/>
+                    </a:lnB>
+                    <a:noFill/>
+                  </a:tcPr>
+                </a:tc>
+                <a:tc>
+                  <a:txBody>
+                    <a:bodyPr/>
+                    <a:lstStyle/>
+                    <a:p>
+                      <a:pPr>
+                        <a:buNone/>
+                      </a:pPr>
+                      <a:r>
+                        <a:rPr lang="es-AR" sz="1500" b="0">
+                          <a:solidFill>
+                            <a:schemeClr val="bg1"/>
+                          </a:solidFill>
+                        </a:rPr>
+                        <a:t>Clase </a:t>
+                      </a:r>
+                      <a:r>
+                        <a:rPr lang="es-AR" sz="1500" b="0">
+                          <a:solidFill>
+                            <a:schemeClr val="bg1"/>
+                          </a:solidFill>
+                          <a:latin typeface="Courier New" panose="02070309020205020404" pitchFamily="49" charset="0"/>
+                        </a:rPr>
+                        <a:t>Carpeta</a:t>
+                      </a:r>
+                      <a:endParaRPr lang="es-AR" sz="1500" b="0">
+                        <a:solidFill>
+                          <a:schemeClr val="bg1"/>
+                        </a:solidFill>
+                      </a:endParaRPr>
+                    </a:p>
+                  </a:txBody>
+                  <a:tcPr marL="75273" marR="75273" marT="37637" marB="37637" anchor="ctr">
+                    <a:lnL w="12700" cap="flat" cmpd="sng" algn="ctr">
+                      <a:solidFill>
+                        <a:schemeClr val="tx1"/>
+                      </a:solidFill>
+                      <a:prstDash val="solid"/>
+                      <a:round/>
+                      <a:headEnd type="none" w="med" len="med"/>
+                      <a:tailEnd type="none" w="med" len="med"/>
+                    </a:lnL>
+                    <a:lnR w="12700" cap="flat" cmpd="sng" algn="ctr">
+                      <a:solidFill>
+                        <a:schemeClr val="tx1"/>
+                      </a:solidFill>
+                      <a:prstDash val="solid"/>
+                      <a:round/>
+                      <a:headEnd type="none" w="med" len="med"/>
+                      <a:tailEnd type="none" w="med" len="med"/>
+                    </a:lnR>
+                    <a:lnT w="12700" cap="flat" cmpd="sng" algn="ctr">
+                      <a:solidFill>
+                        <a:schemeClr val="tx1"/>
+                      </a:solidFill>
+                      <a:prstDash val="solid"/>
+                      <a:round/>
+                      <a:headEnd type="none" w="med" len="med"/>
+                      <a:tailEnd type="none" w="med" len="med"/>
+                    </a:lnT>
+                    <a:lnB w="12700" cap="flat" cmpd="sng" algn="ctr">
+                      <a:solidFill>
+                        <a:schemeClr val="tx1"/>
+                      </a:solidFill>
+                      <a:prstDash val="solid"/>
+                      <a:round/>
+                      <a:headEnd type="none" w="med" len="med"/>
+                      <a:tailEnd type="none" w="med" len="med"/>
+                    </a:lnB>
+                    <a:noFill/>
+                  </a:tcPr>
+                </a:tc>
+                <a:tc>
+                  <a:txBody>
+                    <a:bodyPr/>
+                    <a:lstStyle/>
+                    <a:p>
+                      <a:pPr>
+                        <a:buNone/>
+                      </a:pPr>
+                      <a:r>
+                        <a:rPr lang="es-ES" sz="1500" b="0">
+                          <a:solidFill>
+                            <a:schemeClr val="bg1"/>
+                          </a:solidFill>
+                        </a:rPr>
+                        <a:t>Implementa la Recursividad para la navegación anidada.</a:t>
+                      </a:r>
+                    </a:p>
+                  </a:txBody>
+                  <a:tcPr marL="75273" marR="75273" marT="37637" marB="37637" anchor="ctr">
+                    <a:lnL w="12700" cap="flat" cmpd="sng" algn="ctr">
+                      <a:solidFill>
+                        <a:schemeClr val="tx1"/>
+                      </a:solidFill>
+                      <a:prstDash val="solid"/>
+                      <a:round/>
+                      <a:headEnd type="none" w="med" len="med"/>
+                      <a:tailEnd type="none" w="med" len="med"/>
+                    </a:lnL>
+                    <a:lnR w="12700" cap="flat" cmpd="sng" algn="ctr">
+                      <a:solidFill>
+                        <a:schemeClr val="tx1"/>
+                      </a:solidFill>
+                      <a:prstDash val="solid"/>
+                      <a:round/>
+                      <a:headEnd type="none" w="med" len="med"/>
+                      <a:tailEnd type="none" w="med" len="med"/>
+                    </a:lnR>
+                    <a:lnT w="12700" cap="flat" cmpd="sng" algn="ctr">
+                      <a:solidFill>
+                        <a:schemeClr val="tx1"/>
+                      </a:solidFill>
+                      <a:prstDash val="solid"/>
+                      <a:round/>
+                      <a:headEnd type="none" w="med" len="med"/>
+                      <a:tailEnd type="none" w="med" len="med"/>
+                    </a:lnT>
+                    <a:lnB w="12700" cap="flat" cmpd="sng" algn="ctr">
+                      <a:solidFill>
+                        <a:schemeClr val="tx1"/>
+                      </a:solidFill>
+                      <a:prstDash val="solid"/>
+                      <a:round/>
+                      <a:headEnd type="none" w="med" len="med"/>
+                      <a:tailEnd type="none" w="med" len="med"/>
+                    </a:lnB>
+                    <a:noFill/>
+                  </a:tcPr>
+                </a:tc>
+                <a:extLst>
+                  <a:ext uri="{0D108BD9-81ED-4DB2-BD59-A6C34878D82A}">
+                    <a16:rowId xmlns:a16="http://schemas.microsoft.com/office/drawing/2014/main" val="3486001684"/>
+                  </a:ext>
+                </a:extLst>
+              </a:tr>
+              <a:tr h="782844">
+                <a:tc>
+                  <a:txBody>
+                    <a:bodyPr/>
+                    <a:lstStyle/>
+                    <a:p>
+                      <a:pPr>
+                        <a:buNone/>
+                      </a:pPr>
+                      <a:r>
+                        <a:rPr lang="es-AR" sz="1500" b="0">
+                          <a:solidFill>
+                            <a:schemeClr val="bg1"/>
+                          </a:solidFill>
+                          <a:latin typeface="Courier New" panose="02070309020205020404" pitchFamily="49" charset="0"/>
+                        </a:rPr>
+                        <a:t>mensaje.py</a:t>
+                      </a:r>
+                      <a:endParaRPr lang="es-AR" sz="1500" b="0">
+                        <a:solidFill>
+                          <a:schemeClr val="bg1"/>
+                        </a:solidFill>
+                      </a:endParaRPr>
+                    </a:p>
+                  </a:txBody>
+                  <a:tcPr marL="75273" marR="75273" marT="37637" marB="37637" anchor="ctr">
+                    <a:lnL w="12700" cap="flat" cmpd="sng" algn="ctr">
+                      <a:solidFill>
+                        <a:schemeClr val="tx1"/>
+                      </a:solidFill>
+                      <a:prstDash val="solid"/>
+                      <a:round/>
+                      <a:headEnd type="none" w="med" len="med"/>
+                      <a:tailEnd type="none" w="med" len="med"/>
+                    </a:lnL>
+                    <a:lnR w="12700" cap="flat" cmpd="sng" algn="ctr">
+                      <a:solidFill>
+                        <a:schemeClr val="tx1"/>
+                      </a:solidFill>
+                      <a:prstDash val="solid"/>
+                      <a:round/>
+                      <a:headEnd type="none" w="med" len="med"/>
+                      <a:tailEnd type="none" w="med" len="med"/>
+                    </a:lnR>
+                    <a:lnT w="12700" cap="flat" cmpd="sng" algn="ctr">
+                      <a:solidFill>
+                        <a:schemeClr val="tx1"/>
+                      </a:solidFill>
+                      <a:prstDash val="solid"/>
+                      <a:round/>
+                      <a:headEnd type="none" w="med" len="med"/>
+                      <a:tailEnd type="none" w="med" len="med"/>
+                    </a:lnT>
+                    <a:lnB w="12700" cap="flat" cmpd="sng" algn="ctr">
+                      <a:solidFill>
+                        <a:schemeClr val="tx1"/>
+                      </a:solidFill>
+                      <a:prstDash val="solid"/>
+                      <a:round/>
+                      <a:headEnd type="none" w="med" len="med"/>
+                      <a:tailEnd type="none" w="med" len="med"/>
+                    </a:lnB>
+                    <a:noFill/>
+                  </a:tcPr>
+                </a:tc>
+                <a:tc>
+                  <a:txBody>
+                    <a:bodyPr/>
+                    <a:lstStyle/>
+                    <a:p>
+                      <a:pPr>
+                        <a:buNone/>
+                      </a:pPr>
+                      <a:r>
+                        <a:rPr lang="es-AR" sz="1500" b="0">
+                          <a:solidFill>
+                            <a:schemeClr val="bg1"/>
+                          </a:solidFill>
+                        </a:rPr>
+                        <a:t>Clase </a:t>
+                      </a:r>
+                      <a:r>
+                        <a:rPr lang="es-AR" sz="1500" b="0">
+                          <a:solidFill>
+                            <a:schemeClr val="bg1"/>
+                          </a:solidFill>
+                          <a:latin typeface="Courier New" panose="02070309020205020404" pitchFamily="49" charset="0"/>
+                        </a:rPr>
+                        <a:t>Mensaje</a:t>
+                      </a:r>
+                      <a:endParaRPr lang="es-AR" sz="1500" b="0">
+                        <a:solidFill>
+                          <a:schemeClr val="bg1"/>
+                        </a:solidFill>
+                      </a:endParaRPr>
+                    </a:p>
+                  </a:txBody>
+                  <a:tcPr marL="75273" marR="75273" marT="37637" marB="37637" anchor="ctr">
+                    <a:lnL w="12700" cap="flat" cmpd="sng" algn="ctr">
+                      <a:solidFill>
+                        <a:schemeClr val="tx1"/>
+                      </a:solidFill>
+                      <a:prstDash val="solid"/>
+                      <a:round/>
+                      <a:headEnd type="none" w="med" len="med"/>
+                      <a:tailEnd type="none" w="med" len="med"/>
+                    </a:lnL>
+                    <a:lnR w="12700" cap="flat" cmpd="sng" algn="ctr">
+                      <a:solidFill>
+                        <a:schemeClr val="tx1"/>
+                      </a:solidFill>
+                      <a:prstDash val="solid"/>
+                      <a:round/>
+                      <a:headEnd type="none" w="med" len="med"/>
+                      <a:tailEnd type="none" w="med" len="med"/>
+                    </a:lnR>
+                    <a:lnT w="12700" cap="flat" cmpd="sng" algn="ctr">
+                      <a:solidFill>
+                        <a:schemeClr val="tx1"/>
+                      </a:solidFill>
+                      <a:prstDash val="solid"/>
+                      <a:round/>
+                      <a:headEnd type="none" w="med" len="med"/>
+                      <a:tailEnd type="none" w="med" len="med"/>
+                    </a:lnT>
+                    <a:lnB w="12700" cap="flat" cmpd="sng" algn="ctr">
+                      <a:solidFill>
+                        <a:schemeClr val="tx1"/>
+                      </a:solidFill>
+                      <a:prstDash val="solid"/>
+                      <a:round/>
+                      <a:headEnd type="none" w="med" len="med"/>
+                      <a:tailEnd type="none" w="med" len="med"/>
+                    </a:lnB>
+                    <a:noFill/>
+                  </a:tcPr>
+                </a:tc>
+                <a:tc>
+                  <a:txBody>
+                    <a:bodyPr/>
+                    <a:lstStyle/>
+                    <a:p>
+                      <a:pPr>
+                        <a:buNone/>
+                      </a:pPr>
+                      <a:r>
+                        <a:rPr lang="es-ES" sz="1500" b="0" dirty="0">
+                          <a:solidFill>
+                            <a:schemeClr val="bg1"/>
+                          </a:solidFill>
+                        </a:rPr>
+                        <a:t>Objeto inmutable con metadatos de prioridad.</a:t>
+                      </a:r>
+                    </a:p>
+                  </a:txBody>
+                  <a:tcPr marL="75273" marR="75273" marT="37637" marB="37637" anchor="ctr">
+                    <a:lnL w="12700" cap="flat" cmpd="sng" algn="ctr">
+                      <a:solidFill>
+                        <a:schemeClr val="tx1"/>
+                      </a:solidFill>
+                      <a:prstDash val="solid"/>
+                      <a:round/>
+                      <a:headEnd type="none" w="med" len="med"/>
+                      <a:tailEnd type="none" w="med" len="med"/>
+                    </a:lnL>
+                    <a:lnR w="12700" cap="flat" cmpd="sng" algn="ctr">
+                      <a:solidFill>
+                        <a:schemeClr val="tx1"/>
+                      </a:solidFill>
+                      <a:prstDash val="solid"/>
+                      <a:round/>
+                      <a:headEnd type="none" w="med" len="med"/>
+                      <a:tailEnd type="none" w="med" len="med"/>
+                    </a:lnR>
+                    <a:lnT w="12700" cap="flat" cmpd="sng" algn="ctr">
+                      <a:solidFill>
+                        <a:schemeClr val="tx1"/>
+                      </a:solidFill>
+                      <a:prstDash val="solid"/>
+                      <a:round/>
+                      <a:headEnd type="none" w="med" len="med"/>
+                      <a:tailEnd type="none" w="med" len="med"/>
+                    </a:lnT>
+                    <a:lnB w="12700" cap="flat" cmpd="sng" algn="ctr">
+                      <a:solidFill>
+                        <a:schemeClr val="tx1"/>
+                      </a:solidFill>
+                      <a:prstDash val="solid"/>
+                      <a:round/>
+                      <a:headEnd type="none" w="med" len="med"/>
+                      <a:tailEnd type="none" w="med" len="med"/>
+                    </a:lnB>
+                    <a:noFill/>
+                  </a:tcPr>
+                </a:tc>
+                <a:extLst>
+                  <a:ext uri="{0D108BD9-81ED-4DB2-BD59-A6C34878D82A}">
+                    <a16:rowId xmlns:a16="http://schemas.microsoft.com/office/drawing/2014/main" val="3298146010"/>
+                  </a:ext>
+                </a:extLst>
+              </a:tr>
+            </a:tbl>
+          </a:graphicData>
+        </a:graphic>
+      </p:graphicFrame>
+      <p:sp>
+        <p:nvSpPr>
+          <p:cNvPr id="8" name="CuadroTexto 7">
+            <a:extLst>
+              <a:ext uri="{FF2B5EF4-FFF2-40B4-BE49-F238E27FC236}">
+                <a16:creationId xmlns:a16="http://schemas.microsoft.com/office/drawing/2014/main" id="{DF2C6617-175C-98AD-A3B0-85DF2CC327EC}"/>
+              </a:ext>
+            </a:extLst>
+          </p:cNvPr>
+          <p:cNvSpPr txBox="1"/>
+          <p:nvPr/>
         </p:nvSpPr>
-        <p:spPr/>
+        <p:spPr>
+          <a:xfrm>
+            <a:off x="6164160" y="744319"/>
+            <a:ext cx="5394427" cy="1437317"/>
+          </a:xfrm>
+          <a:prstGeom prst="rect">
+            <a:avLst/>
+          </a:prstGeom>
+          <a:noFill/>
+        </p:spPr>
         <p:txBody>
-          <a:bodyPr/>
+          <a:bodyPr wrap="square" rtlCol="0">
+            <a:spAutoFit/>
+          </a:bodyPr>
           <a:lstStyle/>
           <a:p>
-            <a:endParaRPr lang="es-AR"/>
+            <a:pPr marR="0" lvl="0" defTabSz="914400" fontAlgn="base">
+              <a:lnSpc>
+                <a:spcPct val="110000"/>
+              </a:lnSpc>
+              <a:spcBef>
+                <a:spcPct val="0"/>
+              </a:spcBef>
+              <a:spcAft>
+                <a:spcPts val="600"/>
+              </a:spcAft>
+              <a:buClrTx/>
+              <a:buSzPct val="125000"/>
+              <a:tabLst/>
+            </a:pPr>
+            <a:r>
+              <a:rPr lang="en-US" altLang="es-AR" b="1" dirty="0">
+                <a:solidFill>
+                  <a:schemeClr val="accent3">
+                    <a:lumMod val="75000"/>
+                  </a:schemeClr>
+                </a:solidFill>
+              </a:rPr>
+              <a:t>Estructura Modular</a:t>
+            </a:r>
+          </a:p>
+          <a:p>
+            <a:pPr marR="0" lvl="0" defTabSz="914400" fontAlgn="base">
+              <a:lnSpc>
+                <a:spcPct val="110000"/>
+              </a:lnSpc>
+              <a:spcBef>
+                <a:spcPct val="0"/>
+              </a:spcBef>
+              <a:spcAft>
+                <a:spcPts val="600"/>
+              </a:spcAft>
+              <a:buClrTx/>
+              <a:buSzPct val="125000"/>
+              <a:tabLst/>
+            </a:pPr>
+            <a:r>
+              <a:rPr lang="en-US" altLang="es-AR" dirty="0">
+                <a:solidFill>
+                  <a:schemeClr val="bg1"/>
+                </a:solidFill>
+              </a:rPr>
+              <a:t>El proyecto se dividió en módulos para la claridad y mantenibilidad del código:</a:t>
+            </a:r>
+          </a:p>
+          <a:p>
+            <a:endParaRPr lang="es-AR" dirty="0"/>
           </a:p>
         </p:txBody>
       </p:sp>
@@ -14965,10 +20559,21 @@
         </p:nvSpPr>
         <p:spPr/>
         <p:txBody>
-          <a:bodyPr/>
+          <a:bodyPr>
+            <a:normAutofit/>
+          </a:bodyPr>
           <a:lstStyle/>
           <a:p>
-            <a:endParaRPr lang="es-AR"/>
+            <a:r>
+              <a:rPr lang="es-AR" sz="4400" dirty="0">
+                <a:solidFill>
+                  <a:schemeClr val="accent3">
+                    <a:lumMod val="75000"/>
+                  </a:schemeClr>
+                </a:solidFill>
+              </a:rPr>
+              <a:t>Estructura de datos I: Árbol de carpetas</a:t>
+            </a:r>
           </a:p>
         </p:txBody>
       </p:sp>
@@ -14990,10 +20595,96 @@
         </p:nvSpPr>
         <p:spPr/>
         <p:txBody>
-          <a:bodyPr/>
+          <a:bodyPr>
+            <a:normAutofit fontScale="92500" lnSpcReduction="20000"/>
+          </a:bodyPr>
           <a:lstStyle/>
           <a:p>
-            <a:endParaRPr lang="es-AR"/>
+            <a:pPr marL="0" indent="0">
+              <a:buNone/>
+            </a:pPr>
+            <a:r>
+              <a:rPr lang="es-AR" b="1" dirty="0">
+                <a:solidFill>
+                  <a:schemeClr val="accent3">
+                    <a:lumMod val="75000"/>
+                  </a:schemeClr>
+                </a:solidFill>
+              </a:rPr>
+              <a:t>Modelado Jerárquico:</a:t>
+            </a:r>
+          </a:p>
+          <a:p>
+            <a:pPr marL="0" indent="0">
+              <a:buNone/>
+            </a:pPr>
+            <a:r>
+              <a:rPr lang="es-AR" dirty="0">
+                <a:solidFill>
+                  <a:schemeClr val="bg1"/>
+                </a:solidFill>
+              </a:rPr>
+              <a:t>La clase carpeta utiliza una estructura recursiva, donde cada carpeta es un nodo que puede contener N subcarpetas.</a:t>
+            </a:r>
+            <a:br>
+              <a:rPr lang="es-AR" dirty="0"/>
+            </a:br>
+            <a:r>
+              <a:rPr lang="es-AR" b="1" dirty="0">
+                <a:solidFill>
+                  <a:schemeClr val="accent3">
+                    <a:lumMod val="75000"/>
+                  </a:schemeClr>
+                </a:solidFill>
+              </a:rPr>
+              <a:t>Eficiencia de Acceso: </a:t>
+            </a:r>
+          </a:p>
+          <a:p>
+            <a:pPr marL="0" indent="0">
+              <a:buNone/>
+            </a:pPr>
+            <a:r>
+              <a:rPr lang="es-AR" dirty="0">
+                <a:solidFill>
+                  <a:schemeClr val="bg1"/>
+                </a:solidFill>
+              </a:rPr>
+              <a:t>El uso de árboles nos permite búsquedas con complejidad O (log n).</a:t>
+            </a:r>
+            <a:br>
+              <a:rPr lang="es-AR" dirty="0">
+                <a:solidFill>
+                  <a:schemeClr val="bg1"/>
+                </a:solidFill>
+              </a:rPr>
+            </a:br>
+            <a:br>
+              <a:rPr lang="es-AR" dirty="0"/>
+            </a:br>
+            <a:r>
+              <a:rPr lang="es-AR" b="1" dirty="0">
+                <a:solidFill>
+                  <a:schemeClr val="accent3">
+                    <a:lumMod val="75000"/>
+                  </a:schemeClr>
+                </a:solidFill>
+              </a:rPr>
+              <a:t>Base de recursividad: </a:t>
+            </a:r>
+          </a:p>
+          <a:p>
+            <a:pPr marL="0" indent="0">
+              <a:buNone/>
+            </a:pPr>
+            <a:r>
+              <a:rPr lang="es-AR" dirty="0">
+                <a:solidFill>
+                  <a:schemeClr val="bg1"/>
+                </a:solidFill>
+              </a:rPr>
+              <a:t>Habilita algoritmos como mover mensajes que operan en profundidad indefinida con un solo llamado.</a:t>
+            </a:r>
           </a:p>
         </p:txBody>
       </p:sp>
@@ -15045,10 +20736,21 @@
         </p:nvSpPr>
         <p:spPr/>
         <p:txBody>
-          <a:bodyPr/>
+          <a:bodyPr>
+            <a:normAutofit/>
+          </a:bodyPr>
           <a:lstStyle/>
           <a:p>
-            <a:endParaRPr lang="es-AR"/>
+            <a:r>
+              <a:rPr lang="es-AR" sz="4400" b="1" dirty="0">
+                <a:solidFill>
+                  <a:schemeClr val="accent3">
+                    <a:lumMod val="75000"/>
+                  </a:schemeClr>
+                </a:solidFill>
+              </a:rPr>
+              <a:t>Estructura de datos II: heap de prioridad</a:t>
+            </a:r>
           </a:p>
         </p:txBody>
       </p:sp>
@@ -15068,12 +20770,89 @@
             <p:ph idx="1"/>
           </p:nvPr>
         </p:nvSpPr>
-        <p:spPr/>
+        <p:spPr>
+          <a:xfrm>
+            <a:off x="1141412" y="2318312"/>
+            <a:ext cx="9905999" cy="3541714"/>
+          </a:xfrm>
+        </p:spPr>
         <p:txBody>
-          <a:bodyPr/>
+          <a:bodyPr>
+            <a:normAutofit fontScale="92500" lnSpcReduction="10000"/>
+          </a:bodyPr>
           <a:lstStyle/>
           <a:p>
-            <a:endParaRPr lang="es-AR"/>
+            <a:pPr marL="0" indent="0">
+              <a:buNone/>
+            </a:pPr>
+            <a:r>
+              <a:rPr lang="es-AR" dirty="0">
+                <a:solidFill>
+                  <a:schemeClr val="bg1"/>
+                </a:solidFill>
+              </a:rPr>
+              <a:t>Para cumplir con el requisito de que los mensajes críticos sean atendidos primero se implementó un Min-</a:t>
+            </a:r>
+            <a:r>
+              <a:rPr lang="es-AR" dirty="0" err="1">
+                <a:solidFill>
+                  <a:schemeClr val="bg1"/>
+                </a:solidFill>
+              </a:rPr>
+              <a:t>Heap</a:t>
+            </a:r>
+            <a:r>
+              <a:rPr lang="es-AR" dirty="0">
+                <a:solidFill>
+                  <a:schemeClr val="bg1"/>
+                </a:solidFill>
+              </a:rPr>
+              <a:t>.</a:t>
+            </a:r>
+          </a:p>
+          <a:p>
+            <a:endParaRPr lang="es-AR" dirty="0"/>
+          </a:p>
+          <a:p>
+            <a:pPr marL="0" indent="0">
+              <a:buNone/>
+            </a:pPr>
+            <a:r>
+              <a:rPr lang="es-AR" b="1" dirty="0">
+                <a:solidFill>
+                  <a:schemeClr val="accent3">
+                    <a:lumMod val="75000"/>
+                  </a:schemeClr>
+                </a:solidFill>
+              </a:rPr>
+              <a:t>Lógica de prioridad por rango (1-5):</a:t>
+            </a:r>
+          </a:p>
+          <a:p>
+            <a:pPr marL="0" indent="0">
+              <a:buNone/>
+            </a:pPr>
+            <a:r>
+              <a:rPr lang="es-AR" dirty="0">
+                <a:solidFill>
+                  <a:schemeClr val="bg1"/>
+                </a:solidFill>
+              </a:rPr>
+              <a:t>Se considera de prioridad alta (1) la raíz del heap y de prioridad baja (5) las hojas del Heap.</a:t>
+            </a:r>
+          </a:p>
+          <a:p>
+            <a:pPr marL="0" indent="0">
+              <a:buNone/>
+            </a:pPr>
+            <a:r>
+              <a:rPr lang="es-AR" dirty="0">
+                <a:solidFill>
+                  <a:schemeClr val="bg1"/>
+                </a:solidFill>
+              </a:rPr>
+              <a:t>La extracción del mas urgente se logra con una complejidad O(log n) y se respeta el orden FIFO para la misma prioridad.</a:t>
+            </a:r>
           </a:p>
         </p:txBody>
       </p:sp>
@@ -15125,10 +20904,21 @@
         </p:nvSpPr>
         <p:spPr/>
         <p:txBody>
-          <a:bodyPr/>
+          <a:bodyPr>
+            <a:normAutofit/>
+          </a:bodyPr>
           <a:lstStyle/>
           <a:p>
-            <a:endParaRPr lang="es-AR"/>
+            <a:r>
+              <a:rPr lang="es-AR" sz="4400" b="1" dirty="0">
+                <a:solidFill>
+                  <a:schemeClr val="accent3">
+                    <a:lumMod val="75000"/>
+                  </a:schemeClr>
+                </a:solidFill>
+              </a:rPr>
+              <a:t>Algoritmos de recorrido 	</a:t>
+            </a:r>
           </a:p>
         </p:txBody>
       </p:sp>
@@ -15148,12 +20938,73 @@
             <p:ph idx="1"/>
           </p:nvPr>
         </p:nvSpPr>
-        <p:spPr/>
+        <p:spPr>
+          <a:xfrm>
+            <a:off x="1143000" y="2249487"/>
+            <a:ext cx="9905999" cy="3541714"/>
+          </a:xfrm>
+        </p:spPr>
         <p:txBody>
           <a:bodyPr/>
           <a:lstStyle/>
           <a:p>
-            <a:endParaRPr lang="es-AR"/>
+            <a:pPr marL="0" indent="0">
+              <a:buNone/>
+            </a:pPr>
+            <a:r>
+              <a:rPr lang="es-AR" dirty="0">
+                <a:solidFill>
+                  <a:schemeClr val="bg1"/>
+                </a:solidFill>
+              </a:rPr>
+              <a:t>Navegación inteligente de la estructura de datos  con las siguientes implementaciones:</a:t>
+            </a:r>
+          </a:p>
+          <a:p>
+            <a:pPr marL="0" indent="0">
+              <a:buNone/>
+            </a:pPr>
+            <a:r>
+              <a:rPr lang="es-AR" b="1" dirty="0">
+                <a:solidFill>
+                  <a:schemeClr val="accent3">
+                    <a:lumMod val="75000"/>
+                  </a:schemeClr>
+                </a:solidFill>
+              </a:rPr>
+              <a:t>Recursivo: </a:t>
+            </a:r>
+            <a:r>
+              <a:rPr lang="es-AR" dirty="0">
+                <a:solidFill>
+                  <a:schemeClr val="bg1"/>
+                </a:solidFill>
+              </a:rPr>
+              <a:t>DFS  (profundidad) en las operaciones globales como “mover carpetas anidadas” o “búsqueda exhaustiva.</a:t>
+            </a:r>
+          </a:p>
+          <a:p>
+            <a:pPr marL="0" indent="0">
+              <a:buNone/>
+            </a:pPr>
+            <a:r>
+              <a:rPr lang="es-AR" b="1" dirty="0">
+                <a:solidFill>
+                  <a:schemeClr val="accent3">
+                    <a:lumMod val="75000"/>
+                  </a:schemeClr>
+                </a:solidFill>
+              </a:rPr>
+              <a:t>Iterativo/Cola: </a:t>
+            </a:r>
+            <a:r>
+              <a:rPr lang="es-AR" dirty="0">
+                <a:solidFill>
+                  <a:schemeClr val="bg1"/>
+                </a:solidFill>
+              </a:rPr>
+              <a:t>BFS (amplitud) listado de carpetas inmediatas o análisis de la estructura superficialmente.  </a:t>
+            </a:r>
           </a:p>
         </p:txBody>
       </p:sp>
